--- a/climate-dashboard-react/public/GHG_Internship_Review_QA_Deck.pptx
+++ b/climate-dashboard-react/public/GHG_Internship_Review_QA_Deck.pptx
@@ -5,26 +5,28 @@
     <p:sldMasterId id="2147483648" r:id="rId1"/>
   </p:sldMasterIdLst>
   <p:notesMasterIdLst>
-    <p:notesMasterId r:id="rId19"/>
+    <p:notesMasterId r:id="rId21"/>
   </p:notesMasterIdLst>
   <p:sldIdLst>
     <p:sldId id="256" r:id="rId2"/>
-    <p:sldId id="257" r:id="rId3"/>
-    <p:sldId id="297" r:id="rId4"/>
-    <p:sldId id="302" r:id="rId5"/>
-    <p:sldId id="264" r:id="rId6"/>
-    <p:sldId id="298" r:id="rId7"/>
-    <p:sldId id="303" r:id="rId8"/>
-    <p:sldId id="271" r:id="rId9"/>
-    <p:sldId id="299" r:id="rId10"/>
-    <p:sldId id="304" r:id="rId11"/>
-    <p:sldId id="282" r:id="rId12"/>
-    <p:sldId id="300" r:id="rId13"/>
-    <p:sldId id="296" r:id="rId14"/>
-    <p:sldId id="305" r:id="rId15"/>
-    <p:sldId id="290" r:id="rId16"/>
-    <p:sldId id="301" r:id="rId17"/>
-    <p:sldId id="306" r:id="rId18"/>
+    <p:sldId id="307" r:id="rId3"/>
+    <p:sldId id="257" r:id="rId4"/>
+    <p:sldId id="297" r:id="rId5"/>
+    <p:sldId id="302" r:id="rId6"/>
+    <p:sldId id="264" r:id="rId7"/>
+    <p:sldId id="298" r:id="rId8"/>
+    <p:sldId id="303" r:id="rId9"/>
+    <p:sldId id="271" r:id="rId10"/>
+    <p:sldId id="299" r:id="rId11"/>
+    <p:sldId id="308" r:id="rId12"/>
+    <p:sldId id="304" r:id="rId13"/>
+    <p:sldId id="282" r:id="rId14"/>
+    <p:sldId id="300" r:id="rId15"/>
+    <p:sldId id="296" r:id="rId16"/>
+    <p:sldId id="305" r:id="rId17"/>
+    <p:sldId id="290" r:id="rId18"/>
+    <p:sldId id="301" r:id="rId19"/>
+    <p:sldId id="306" r:id="rId20"/>
   </p:sldIdLst>
   <p:sldSz cx="12192000" cy="6858000"/>
   <p:notesSz cx="6858000" cy="12192000"/>
@@ -1381,6 +1383,13 @@
           </p:nvPr>
         </p:nvSpPr>
         <p:spPr/>
+        <p:txBody>
+          <a:bodyPr/>
+          <a:lstStyle/>
+          <a:p>
+            <a:endParaRPr lang="en-US"/>
+          </a:p>
+        </p:txBody>
       </p:sp>
       <p:sp>
         <p:nvSpPr>
@@ -1428,6 +1437,96 @@
     <p:extLst>
       <p:ext uri="{BB962C8B-B14F-4D97-AF65-F5344CB8AC3E}">
         <p14:creationId xmlns:p14="http://schemas.microsoft.com/office/powerpoint/2010/main" val="1024086991"/>
+      </p:ext>
+    </p:extLst>
+  </p:cSld>
+  <p:clrMapOvr>
+    <a:masterClrMapping/>
+  </p:clrMapOvr>
+</p:notes>
+</file>
+
+<file path=ppt/notesSlides/notesSlide10.xml><?xml version="1.0" encoding="utf-8"?>
+<p:notes xmlns:a="http://schemas.openxmlformats.org/drawingml/2006/main" xmlns:r="http://schemas.openxmlformats.org/officeDocument/2006/relationships" xmlns:p="http://schemas.openxmlformats.org/presentationml/2006/main">
+  <p:cSld>
+    <p:spTree>
+      <p:nvGrpSpPr>
+        <p:cNvPr id="1" name=""/>
+        <p:cNvGrpSpPr/>
+        <p:nvPr/>
+      </p:nvGrpSpPr>
+      <p:grpSpPr>
+        <a:xfrm>
+          <a:off x="0" y="0"/>
+          <a:ext cx="0" cy="0"/>
+          <a:chOff x="0" y="0"/>
+          <a:chExt cx="0" cy="0"/>
+        </a:xfrm>
+      </p:grpSpPr>
+      <p:sp>
+        <p:nvSpPr>
+          <p:cNvPr id="2" name="Slide Image Placeholder 1"/>
+          <p:cNvSpPr>
+            <a:spLocks noGrp="1" noRot="1" noChangeAspect="1"/>
+          </p:cNvSpPr>
+          <p:nvPr>
+            <p:ph type="sldImg"/>
+          </p:nvPr>
+        </p:nvSpPr>
+        <p:spPr>
+          <a:xfrm>
+            <a:off x="-228600" y="1524000"/>
+            <a:ext cx="7315200" cy="4114800"/>
+          </a:xfrm>
+          <a:prstGeom prst="rect">
+            <a:avLst/>
+          </a:prstGeom>
+          <a:noFill/>
+          <a:ln w="12700">
+            <a:solidFill>
+              <a:prstClr val="black"/>
+            </a:solidFill>
+          </a:ln>
+        </p:spPr>
+        <p:txBody>
+          <a:bodyPr/>
+          <a:lstStyle/>
+          <a:p>
+            <a:endParaRPr lang="en-US"/>
+          </a:p>
+        </p:txBody>
+      </p:sp>
+      <p:sp>
+        <p:nvSpPr>
+          <p:cNvPr id="3" name="Notes Placeholder 2"/>
+          <p:cNvSpPr>
+            <a:spLocks noGrp="1"/>
+          </p:cNvSpPr>
+          <p:nvPr>
+            <p:ph type="body" idx="1"/>
+          </p:nvPr>
+        </p:nvSpPr>
+        <p:spPr>
+          <a:xfrm>
+            <a:off x="685800" y="5867400"/>
+            <a:ext cx="5486400" cy="4800600"/>
+          </a:xfrm>
+          <a:prstGeom prst="rect">
+            <a:avLst/>
+          </a:prstGeom>
+        </p:spPr>
+        <p:txBody>
+          <a:bodyPr/>
+          <a:lstStyle/>
+          <a:p>
+            <a:endParaRPr lang="en-US" dirty="0"/>
+          </a:p>
+        </p:txBody>
+      </p:sp>
+    </p:spTree>
+    <p:extLst>
+      <p:ext uri="{BB962C8B-B14F-4D97-AF65-F5344CB8AC3E}">
+        <p14:creationId xmlns:p14="http://schemas.microsoft.com/office/powerpoint/2010/main" val="2391871333"/>
       </p:ext>
     </p:extLst>
   </p:cSld>
@@ -1465,6 +1564,13 @@
           </p:nvPr>
         </p:nvSpPr>
         <p:spPr/>
+        <p:txBody>
+          <a:bodyPr/>
+          <a:lstStyle/>
+          <a:p>
+            <a:endParaRPr lang="en-US"/>
+          </a:p>
+        </p:txBody>
       </p:sp>
       <p:sp>
         <p:nvSpPr>
@@ -1502,7 +1608,7 @@
           <a:p>
             <a:fld id="{F7021451-1387-4CA6-816F-3879F97B5CBC}" type="slidenum">
               <a:rPr lang="en-US"/>
-              <a:t>2</a:t>
+              <a:t>3</a:t>
             </a:fld>
             <a:endParaRPr lang="en-US"/>
           </a:p>
@@ -1549,6 +1655,13 @@
           </p:nvPr>
         </p:nvSpPr>
         <p:spPr/>
+        <p:txBody>
+          <a:bodyPr/>
+          <a:lstStyle/>
+          <a:p>
+            <a:endParaRPr lang="en-US"/>
+          </a:p>
+        </p:txBody>
       </p:sp>
       <p:sp>
         <p:nvSpPr>
@@ -1586,7 +1699,7 @@
           <a:p>
             <a:fld id="{F7021451-1387-4CA6-816F-3879F97B5CBC}" type="slidenum">
               <a:rPr lang="en-US"/>
-              <a:t>5</a:t>
+              <a:t>6</a:t>
             </a:fld>
             <a:endParaRPr lang="en-US"/>
           </a:p>
@@ -1632,7 +1745,21 @@
             <p:ph type="sldImg"/>
           </p:nvPr>
         </p:nvSpPr>
-        <p:spPr/>
+        <p:spPr>
+          <a:xfrm>
+            <a:off x="-228600" y="1524000"/>
+            <a:ext cx="7315200" cy="4114800"/>
+          </a:xfrm>
+          <a:prstGeom prst="rect">
+            <a:avLst/>
+          </a:prstGeom>
+          <a:noFill/>
+          <a:ln w="12700">
+            <a:solidFill>
+              <a:prstClr val="black"/>
+            </a:solidFill>
+          </a:ln>
+        </p:spPr>
       </p:sp>
       <p:sp>
         <p:nvSpPr>
@@ -1644,42 +1771,27 @@
             <p:ph type="body" idx="1"/>
           </p:nvPr>
         </p:nvSpPr>
-        <p:spPr/>
+        <p:spPr>
+          <a:xfrm>
+            <a:off x="685800" y="5867400"/>
+            <a:ext cx="5486400" cy="4800600"/>
+          </a:xfrm>
+          <a:prstGeom prst="rect">
+            <a:avLst/>
+          </a:prstGeom>
+        </p:spPr>
         <p:txBody>
           <a:bodyPr/>
           <a:lstStyle/>
           <a:p>
             <a:endParaRPr lang="en-US" dirty="0"/>
-          </a:p>
-        </p:txBody>
-      </p:sp>
-      <p:sp>
-        <p:nvSpPr>
-          <p:cNvPr id="4" name="Slide Number Placeholder 3"/>
-          <p:cNvSpPr>
-            <a:spLocks noGrp="1"/>
-          </p:cNvSpPr>
-          <p:nvPr>
-            <p:ph type="sldNum" sz="quarter" idx="10"/>
-          </p:nvPr>
-        </p:nvSpPr>
-        <p:spPr/>
-        <p:txBody>
-          <a:bodyPr/>
-          <a:lstStyle/>
-          <a:p>
-            <a:fld id="{F7021451-1387-4CA6-816F-3879F97B5CBC}" type="slidenum">
-              <a:rPr lang="en-US"/>
-              <a:t>8</a:t>
-            </a:fld>
-            <a:endParaRPr lang="en-US"/>
           </a:p>
         </p:txBody>
       </p:sp>
     </p:spTree>
     <p:extLst>
       <p:ext uri="{BB962C8B-B14F-4D97-AF65-F5344CB8AC3E}">
-        <p14:creationId xmlns:p14="http://schemas.microsoft.com/office/powerpoint/2010/main" val="1024086991"/>
+        <p14:creationId xmlns:p14="http://schemas.microsoft.com/office/powerpoint/2010/main" val="3998482410"/>
       </p:ext>
     </p:extLst>
   </p:cSld>
@@ -1717,6 +1829,13 @@
           </p:nvPr>
         </p:nvSpPr>
         <p:spPr/>
+        <p:txBody>
+          <a:bodyPr/>
+          <a:lstStyle/>
+          <a:p>
+            <a:endParaRPr lang="en-US"/>
+          </a:p>
+        </p:txBody>
       </p:sp>
       <p:sp>
         <p:nvSpPr>
@@ -1754,7 +1873,7 @@
           <a:p>
             <a:fld id="{F7021451-1387-4CA6-816F-3879F97B5CBC}" type="slidenum">
               <a:rPr lang="en-US"/>
-              <a:t>11</a:t>
+              <a:t>9</a:t>
             </a:fld>
             <a:endParaRPr lang="en-US"/>
           </a:p>
@@ -1800,7 +1919,21 @@
             <p:ph type="sldImg"/>
           </p:nvPr>
         </p:nvSpPr>
-        <p:spPr/>
+        <p:spPr>
+          <a:xfrm>
+            <a:off x="-228600" y="1524000"/>
+            <a:ext cx="7315200" cy="4114800"/>
+          </a:xfrm>
+          <a:prstGeom prst="rect">
+            <a:avLst/>
+          </a:prstGeom>
+          <a:noFill/>
+          <a:ln w="12700">
+            <a:solidFill>
+              <a:prstClr val="black"/>
+            </a:solidFill>
+          </a:ln>
+        </p:spPr>
       </p:sp>
       <p:sp>
         <p:nvSpPr>
@@ -1812,521 +1945,27 @@
             <p:ph type="body" idx="1"/>
           </p:nvPr>
         </p:nvSpPr>
-        <p:spPr/>
+        <p:spPr>
+          <a:xfrm>
+            <a:off x="685800" y="5867400"/>
+            <a:ext cx="5486400" cy="4800600"/>
+          </a:xfrm>
+          <a:prstGeom prst="rect">
+            <a:avLst/>
+          </a:prstGeom>
+        </p:spPr>
         <p:txBody>
           <a:bodyPr/>
           <a:lstStyle/>
           <a:p>
-            <a:r>
-              <a:rPr lang="en-US" sz="1200" b="1" i="0" kern="1200" dirty="0">
-                <a:solidFill>
-                  <a:schemeClr val="tx1"/>
-                </a:solidFill>
-                <a:effectLst/>
-                <a:latin typeface="+mn-lt"/>
-                <a:ea typeface="+mn-ea"/>
-                <a:cs typeface="+mn-cs"/>
-              </a:rPr>
-              <a:t>What the slide says:</a:t>
-            </a:r>
-            <a:r>
-              <a:rPr lang="en-US" sz="1200" b="0" i="0" kern="1200" dirty="0">
-                <a:solidFill>
-                  <a:schemeClr val="tx1"/>
-                </a:solidFill>
-                <a:effectLst/>
-                <a:latin typeface="+mn-lt"/>
-                <a:ea typeface="+mn-ea"/>
-                <a:cs typeface="+mn-cs"/>
-              </a:rPr>
-              <a:t> ETS (exponential smoothing) doesn't use predictors. It carries a small hidden state — a </a:t>
-            </a:r>
-            <a:r>
-              <a:rPr lang="en-US" sz="1200" b="1" i="0" kern="1200" dirty="0">
-                <a:solidFill>
-                  <a:schemeClr val="tx1"/>
-                </a:solidFill>
-                <a:effectLst/>
-                <a:latin typeface="+mn-lt"/>
-                <a:ea typeface="+mn-ea"/>
-                <a:cs typeface="+mn-cs"/>
-              </a:rPr>
-              <a:t>level</a:t>
-            </a:r>
-            <a:r>
-              <a:rPr lang="en-US" sz="1200" b="0" i="0" kern="1200" dirty="0">
-                <a:solidFill>
-                  <a:schemeClr val="tx1"/>
-                </a:solidFill>
-                <a:effectLst/>
-                <a:latin typeface="+mn-lt"/>
-                <a:ea typeface="+mn-ea"/>
-                <a:cs typeface="+mn-cs"/>
-              </a:rPr>
-              <a:t> and a </a:t>
-            </a:r>
-            <a:r>
-              <a:rPr lang="en-US" sz="1200" b="1" i="0" kern="1200" dirty="0">
-                <a:solidFill>
-                  <a:schemeClr val="tx1"/>
-                </a:solidFill>
-                <a:effectLst/>
-                <a:latin typeface="+mn-lt"/>
-                <a:ea typeface="+mn-ea"/>
-                <a:cs typeface="+mn-cs"/>
-              </a:rPr>
-              <a:t>trend</a:t>
-            </a:r>
-            <a:r>
-              <a:rPr lang="en-US" sz="1200" b="0" i="0" kern="1200" dirty="0">
-                <a:solidFill>
-                  <a:schemeClr val="tx1"/>
-                </a:solidFill>
-                <a:effectLst/>
-                <a:latin typeface="+mn-lt"/>
-                <a:ea typeface="+mn-ea"/>
-                <a:cs typeface="+mn-cs"/>
-              </a:rPr>
-              <a:t> — and each year's actual value nudges that state. Forecasting is just the same loop run forward with nothing to nudge it.</a:t>
-            </a:r>
-          </a:p>
-          <a:p>
-            <a:r>
-              <a:rPr lang="en-US" sz="1200" b="1" i="0" kern="1200" dirty="0">
-                <a:solidFill>
-                  <a:schemeClr val="tx1"/>
-                </a:solidFill>
-                <a:effectLst/>
-                <a:latin typeface="+mn-lt"/>
-                <a:ea typeface="+mn-ea"/>
-                <a:cs typeface="+mn-cs"/>
-              </a:rPr>
-              <a:t>Worked example</a:t>
-            </a:r>
-            <a:r>
-              <a:rPr lang="en-US" sz="1200" b="0" i="0" kern="1200" dirty="0">
-                <a:solidFill>
-                  <a:schemeClr val="tx1"/>
-                </a:solidFill>
-                <a:effectLst/>
-                <a:latin typeface="+mn-lt"/>
-                <a:ea typeface="+mn-ea"/>
-                <a:cs typeface="+mn-cs"/>
-              </a:rPr>
-              <a:t> — national CO₂, </a:t>
-            </a:r>
-            <a:r>
-              <a:rPr lang="el-GR" sz="1200" b="0" i="0" kern="1200" dirty="0">
-                <a:solidFill>
-                  <a:schemeClr val="tx1"/>
-                </a:solidFill>
-                <a:effectLst/>
-                <a:latin typeface="+mn-lt"/>
-                <a:ea typeface="+mn-ea"/>
-                <a:cs typeface="+mn-cs"/>
-              </a:rPr>
-              <a:t>α = 0.6, β* = 0.2, φ = 0.9.</a:t>
-            </a:r>
-          </a:p>
-          <a:p>
-            <a:r>
-              <a:rPr lang="en-US" sz="1200" b="0" i="1" kern="1200" dirty="0">
-                <a:solidFill>
-                  <a:schemeClr val="tx1"/>
-                </a:solidFill>
-                <a:effectLst/>
-                <a:latin typeface="+mn-lt"/>
-                <a:ea typeface="+mn-ea"/>
-                <a:cs typeface="+mn-cs"/>
-              </a:rPr>
-              <a:t>Prior state, end of 2016:</a:t>
-            </a:r>
-            <a:r>
-              <a:rPr lang="en-US" sz="1200" b="0" i="0" kern="1200" dirty="0">
-                <a:solidFill>
-                  <a:schemeClr val="tx1"/>
-                </a:solidFill>
-                <a:effectLst/>
-                <a:latin typeface="+mn-lt"/>
-                <a:ea typeface="+mn-ea"/>
-                <a:cs typeface="+mn-cs"/>
-              </a:rPr>
-              <a:t> level = 500 Mt, trend = +10 Mt/yr.</a:t>
-            </a:r>
-          </a:p>
-          <a:p>
-            <a:r>
-              <a:rPr lang="en-US" sz="1200" b="1" i="0" kern="1200" dirty="0">
-                <a:solidFill>
-                  <a:schemeClr val="tx1"/>
-                </a:solidFill>
-                <a:effectLst/>
-                <a:latin typeface="+mn-lt"/>
-                <a:ea typeface="+mn-ea"/>
-                <a:cs typeface="+mn-cs"/>
-              </a:rPr>
-              <a:t>Expectation for 2017</a:t>
-            </a:r>
-            <a:r>
-              <a:rPr lang="en-US" sz="1200" b="0" i="0" kern="1200" dirty="0">
-                <a:solidFill>
-                  <a:schemeClr val="tx1"/>
-                </a:solidFill>
-                <a:effectLst/>
-                <a:latin typeface="+mn-lt"/>
-                <a:ea typeface="+mn-ea"/>
-                <a:cs typeface="+mn-cs"/>
-              </a:rPr>
-              <a:t> = level + </a:t>
-            </a:r>
-            <a:r>
-              <a:rPr lang="el-GR" sz="1200" b="0" i="0" kern="1200" dirty="0">
-                <a:solidFill>
-                  <a:schemeClr val="tx1"/>
-                </a:solidFill>
-                <a:effectLst/>
-                <a:latin typeface="+mn-lt"/>
-                <a:ea typeface="+mn-ea"/>
-                <a:cs typeface="+mn-cs"/>
-              </a:rPr>
-              <a:t>φ·</a:t>
-            </a:r>
-            <a:r>
-              <a:rPr lang="en-US" sz="1200" b="0" i="0" kern="1200" dirty="0">
-                <a:solidFill>
-                  <a:schemeClr val="tx1"/>
-                </a:solidFill>
-                <a:effectLst/>
-                <a:latin typeface="+mn-lt"/>
-                <a:ea typeface="+mn-ea"/>
-                <a:cs typeface="+mn-cs"/>
-              </a:rPr>
-              <a:t>trend = 500 + 0.9(10) = </a:t>
-            </a:r>
-            <a:r>
-              <a:rPr lang="en-US" sz="1200" b="1" i="0" kern="1200" dirty="0">
-                <a:solidFill>
-                  <a:schemeClr val="tx1"/>
-                </a:solidFill>
-                <a:effectLst/>
-                <a:latin typeface="+mn-lt"/>
-                <a:ea typeface="+mn-ea"/>
-                <a:cs typeface="+mn-cs"/>
-              </a:rPr>
-              <a:t>509 Mt</a:t>
-            </a:r>
-            <a:endParaRPr lang="en-US" sz="1200" b="0" i="0" kern="1200" dirty="0">
-              <a:solidFill>
-                <a:schemeClr val="tx1"/>
-              </a:solidFill>
-              <a:effectLst/>
-              <a:latin typeface="+mn-lt"/>
-              <a:ea typeface="+mn-ea"/>
-              <a:cs typeface="+mn-cs"/>
-            </a:endParaRPr>
-          </a:p>
-          <a:p>
-            <a:r>
-              <a:rPr lang="en-US" sz="1200" b="1" i="0" kern="1200" dirty="0">
-                <a:solidFill>
-                  <a:schemeClr val="tx1"/>
-                </a:solidFill>
-                <a:effectLst/>
-                <a:latin typeface="+mn-lt"/>
-                <a:ea typeface="+mn-ea"/>
-                <a:cs typeface="+mn-cs"/>
-              </a:rPr>
-              <a:t>New observation:</a:t>
-            </a:r>
-            <a:r>
-              <a:rPr lang="en-US" sz="1200" b="0" i="0" kern="1200" dirty="0">
-                <a:solidFill>
-                  <a:schemeClr val="tx1"/>
-                </a:solidFill>
-                <a:effectLst/>
-                <a:latin typeface="+mn-lt"/>
-                <a:ea typeface="+mn-ea"/>
-                <a:cs typeface="+mn-cs"/>
-              </a:rPr>
-              <a:t> actual 2017 = </a:t>
-            </a:r>
-            <a:r>
-              <a:rPr lang="en-US" sz="1200" b="1" i="0" kern="1200" dirty="0">
-                <a:solidFill>
-                  <a:schemeClr val="tx1"/>
-                </a:solidFill>
-                <a:effectLst/>
-                <a:latin typeface="+mn-lt"/>
-                <a:ea typeface="+mn-ea"/>
-                <a:cs typeface="+mn-cs"/>
-              </a:rPr>
-              <a:t>505 Mt</a:t>
-            </a:r>
-            <a:r>
-              <a:rPr lang="en-US" sz="1200" b="0" i="0" kern="1200" dirty="0">
-                <a:solidFill>
-                  <a:schemeClr val="tx1"/>
-                </a:solidFill>
-                <a:effectLst/>
-                <a:latin typeface="+mn-lt"/>
-                <a:ea typeface="+mn-ea"/>
-                <a:cs typeface="+mn-cs"/>
-              </a:rPr>
-              <a:t> → error of −4</a:t>
-            </a:r>
-          </a:p>
-          <a:p>
-            <a:r>
-              <a:rPr lang="en-US" sz="1200" b="1" i="0" kern="1200" dirty="0">
-                <a:solidFill>
-                  <a:schemeClr val="tx1"/>
-                </a:solidFill>
-                <a:effectLst/>
-                <a:latin typeface="+mn-lt"/>
-                <a:ea typeface="+mn-ea"/>
-                <a:cs typeface="+mn-cs"/>
-              </a:rPr>
-              <a:t>Update level:</a:t>
-            </a:r>
-            <a:r>
-              <a:rPr lang="en-US" sz="1200" b="0" i="0" kern="1200" dirty="0">
-                <a:solidFill>
-                  <a:schemeClr val="tx1"/>
-                </a:solidFill>
-                <a:effectLst/>
-                <a:latin typeface="+mn-lt"/>
-                <a:ea typeface="+mn-ea"/>
-                <a:cs typeface="+mn-cs"/>
-              </a:rPr>
-              <a:t> 0.6(505) + 0.4(509) = </a:t>
-            </a:r>
-            <a:r>
-              <a:rPr lang="en-US" sz="1200" b="1" i="0" kern="1200" dirty="0">
-                <a:solidFill>
-                  <a:schemeClr val="tx1"/>
-                </a:solidFill>
-                <a:effectLst/>
-                <a:latin typeface="+mn-lt"/>
-                <a:ea typeface="+mn-ea"/>
-                <a:cs typeface="+mn-cs"/>
-              </a:rPr>
-              <a:t>506.6</a:t>
-            </a:r>
-            <a:r>
-              <a:rPr lang="en-US" sz="1200" b="0" i="0" kern="1200" dirty="0">
-                <a:solidFill>
-                  <a:schemeClr val="tx1"/>
-                </a:solidFill>
-                <a:effectLst/>
-                <a:latin typeface="+mn-lt"/>
-                <a:ea typeface="+mn-ea"/>
-                <a:cs typeface="+mn-cs"/>
-              </a:rPr>
-              <a:t> — pulled toward the actual, but only 60% of the way</a:t>
-            </a:r>
-          </a:p>
-          <a:p>
-            <a:r>
-              <a:rPr lang="en-US" sz="1200" b="1" i="0" kern="1200" dirty="0">
-                <a:solidFill>
-                  <a:schemeClr val="tx1"/>
-                </a:solidFill>
-                <a:effectLst/>
-                <a:latin typeface="+mn-lt"/>
-                <a:ea typeface="+mn-ea"/>
-                <a:cs typeface="+mn-cs"/>
-              </a:rPr>
-              <a:t>Update trend:</a:t>
-            </a:r>
-            <a:r>
-              <a:rPr lang="en-US" sz="1200" b="0" i="0" kern="1200" dirty="0">
-                <a:solidFill>
-                  <a:schemeClr val="tx1"/>
-                </a:solidFill>
-                <a:effectLst/>
-                <a:latin typeface="+mn-lt"/>
-                <a:ea typeface="+mn-ea"/>
-                <a:cs typeface="+mn-cs"/>
-              </a:rPr>
-              <a:t> 0.2(506.6 − 500) + 0.8(0.9 × 10) = 1.32 + 7.20 = </a:t>
-            </a:r>
-            <a:r>
-              <a:rPr lang="en-US" sz="1200" b="1" i="0" kern="1200" dirty="0">
-                <a:solidFill>
-                  <a:schemeClr val="tx1"/>
-                </a:solidFill>
-                <a:effectLst/>
-                <a:latin typeface="+mn-lt"/>
-                <a:ea typeface="+mn-ea"/>
-                <a:cs typeface="+mn-cs"/>
-              </a:rPr>
-              <a:t>8.52</a:t>
-            </a:r>
-            <a:r>
-              <a:rPr lang="en-US" sz="1200" b="0" i="0" kern="1200" dirty="0">
-                <a:solidFill>
-                  <a:schemeClr val="tx1"/>
-                </a:solidFill>
-                <a:effectLst/>
-                <a:latin typeface="+mn-lt"/>
-                <a:ea typeface="+mn-ea"/>
-                <a:cs typeface="+mn-cs"/>
-              </a:rPr>
-              <a:t> — the trend cools from 10 to 8.5 because growth undershot</a:t>
-            </a:r>
-          </a:p>
-          <a:p>
-            <a:r>
-              <a:rPr lang="en-US" sz="1200" b="0" i="0" kern="1200" dirty="0">
-                <a:solidFill>
-                  <a:schemeClr val="tx1"/>
-                </a:solidFill>
-                <a:effectLst/>
-                <a:latin typeface="+mn-lt"/>
-                <a:ea typeface="+mn-ea"/>
-                <a:cs typeface="+mn-cs"/>
-              </a:rPr>
-              <a:t>That's one turn of the loop, and it repeats for every year 1990 → 2018.</a:t>
-            </a:r>
-          </a:p>
-          <a:p>
-            <a:r>
-              <a:rPr lang="en-US" sz="1200" b="1" i="0" kern="1200" dirty="0">
-                <a:solidFill>
-                  <a:schemeClr val="tx1"/>
-                </a:solidFill>
-                <a:effectLst/>
-                <a:latin typeface="+mn-lt"/>
-                <a:ea typeface="+mn-ea"/>
-                <a:cs typeface="+mn-cs"/>
-              </a:rPr>
-              <a:t>Then the forecast box:</a:t>
-            </a:r>
-            <a:r>
-              <a:rPr lang="en-US" sz="1200" b="0" i="0" kern="1200" dirty="0">
-                <a:solidFill>
-                  <a:schemeClr val="tx1"/>
-                </a:solidFill>
-                <a:effectLst/>
-                <a:latin typeface="+mn-lt"/>
-                <a:ea typeface="+mn-ea"/>
-                <a:cs typeface="+mn-cs"/>
-              </a:rPr>
-              <a:t> past 2018 there are no more actuals, so steps 1–4 collapse into step 1 alone. The state freezes and only the damped trend propagates:</a:t>
-            </a:r>
-          </a:p>
-          <a:p>
-            <a:r>
-              <a:rPr lang="en-US" sz="1200" b="0" i="0" kern="1200" dirty="0">
-                <a:solidFill>
-                  <a:schemeClr val="tx1"/>
-                </a:solidFill>
-                <a:effectLst/>
-                <a:latin typeface="+mn-lt"/>
-                <a:ea typeface="+mn-ea"/>
-                <a:cs typeface="+mn-cs"/>
-              </a:rPr>
-              <a:t>2019: 506.6 + 0.9(8.52) = 514.3</a:t>
-            </a:r>
-          </a:p>
-          <a:p>
-            <a:r>
-              <a:rPr lang="en-US" sz="1200" b="0" i="0" kern="1200" dirty="0">
-                <a:solidFill>
-                  <a:schemeClr val="tx1"/>
-                </a:solidFill>
-                <a:effectLst/>
-                <a:latin typeface="+mn-lt"/>
-                <a:ea typeface="+mn-ea"/>
-                <a:cs typeface="+mn-cs"/>
-              </a:rPr>
-              <a:t>2020: 506.6 + (0.9 + 0.81)(8.52) = 521.2</a:t>
-            </a:r>
-          </a:p>
-          <a:p>
-            <a:r>
-              <a:rPr lang="en-US" sz="1200" b="0" i="0" kern="1200" dirty="0">
-                <a:solidFill>
-                  <a:schemeClr val="tx1"/>
-                </a:solidFill>
-                <a:effectLst/>
-                <a:latin typeface="+mn-lt"/>
-                <a:ea typeface="+mn-ea"/>
-                <a:cs typeface="+mn-cs"/>
-              </a:rPr>
-              <a:t>2021: 506.6 + (0.9 + 0.81 + 0.729)(8.52) = 527.4</a:t>
-            </a:r>
-          </a:p>
-          <a:p>
-            <a:r>
-              <a:rPr lang="en-US" sz="1200" b="0" i="0" kern="1200" dirty="0">
-                <a:solidFill>
-                  <a:schemeClr val="tx1"/>
-                </a:solidFill>
-                <a:effectLst/>
-                <a:latin typeface="+mn-lt"/>
-                <a:ea typeface="+mn-ea"/>
-                <a:cs typeface="+mn-cs"/>
-              </a:rPr>
-              <a:t>Increments shrink each year (+7.7, +6.9, +6.2) and the curve flattens toward a ceiling of about 583 Mt. That's what </a:t>
-            </a:r>
-            <a:r>
-              <a:rPr lang="el-GR" sz="1200" b="0" i="0" kern="1200" dirty="0">
-                <a:solidFill>
-                  <a:schemeClr val="tx1"/>
-                </a:solidFill>
-                <a:effectLst/>
-                <a:latin typeface="+mn-lt"/>
-                <a:ea typeface="+mn-ea"/>
-                <a:cs typeface="+mn-cs"/>
-              </a:rPr>
-              <a:t>φ </a:t>
-            </a:r>
-            <a:r>
-              <a:rPr lang="en-US" sz="1200" b="0" i="0" kern="1200" dirty="0">
-                <a:solidFill>
-                  <a:schemeClr val="tx1"/>
-                </a:solidFill>
-                <a:effectLst/>
-                <a:latin typeface="+mn-lt"/>
-                <a:ea typeface="+mn-ea"/>
-                <a:cs typeface="+mn-cs"/>
-              </a:rPr>
-              <a:t>buys you — a straight-line trend extrapolated 30 years out would be absurd; the damping makes the projection level off.</a:t>
-            </a:r>
-          </a:p>
-          <a:p>
             <a:endParaRPr lang="en-US" dirty="0"/>
-          </a:p>
-        </p:txBody>
-      </p:sp>
-      <p:sp>
-        <p:nvSpPr>
-          <p:cNvPr id="4" name="Slide Number Placeholder 3"/>
-          <p:cNvSpPr>
-            <a:spLocks noGrp="1"/>
-          </p:cNvSpPr>
-          <p:nvPr>
-            <p:ph type="sldNum" sz="quarter" idx="10"/>
-          </p:nvPr>
-        </p:nvSpPr>
-        <p:spPr/>
-        <p:txBody>
-          <a:bodyPr/>
-          <a:lstStyle/>
-          <a:p>
-            <a:fld id="{F7021451-1387-4CA6-816F-3879F97B5CBC}" type="slidenum">
-              <a:rPr lang="en-US"/>
-              <a:t>13</a:t>
-            </a:fld>
-            <a:endParaRPr lang="en-US"/>
           </a:p>
         </p:txBody>
       </p:sp>
     </p:spTree>
     <p:extLst>
       <p:ext uri="{BB962C8B-B14F-4D97-AF65-F5344CB8AC3E}">
-        <p14:creationId xmlns:p14="http://schemas.microsoft.com/office/powerpoint/2010/main" val="1024086991"/>
+        <p14:creationId xmlns:p14="http://schemas.microsoft.com/office/powerpoint/2010/main" val="3052531948"/>
       </p:ext>
     </p:extLst>
   </p:cSld>
@@ -2364,6 +2003,13 @@
           </p:nvPr>
         </p:nvSpPr>
         <p:spPr/>
+        <p:txBody>
+          <a:bodyPr/>
+          <a:lstStyle/>
+          <a:p>
+            <a:endParaRPr lang="en-US"/>
+          </a:p>
+        </p:txBody>
       </p:sp>
       <p:sp>
         <p:nvSpPr>
@@ -2401,7 +2047,716 @@
           <a:p>
             <a:fld id="{F7021451-1387-4CA6-816F-3879F97B5CBC}" type="slidenum">
               <a:rPr lang="en-US"/>
+              <a:t>13</a:t>
+            </a:fld>
+            <a:endParaRPr lang="en-US"/>
+          </a:p>
+        </p:txBody>
+      </p:sp>
+    </p:spTree>
+    <p:extLst>
+      <p:ext uri="{BB962C8B-B14F-4D97-AF65-F5344CB8AC3E}">
+        <p14:creationId xmlns:p14="http://schemas.microsoft.com/office/powerpoint/2010/main" val="1024086991"/>
+      </p:ext>
+    </p:extLst>
+  </p:cSld>
+  <p:clrMapOvr>
+    <a:masterClrMapping/>
+  </p:clrMapOvr>
+</p:notes>
+</file>
+
+<file path=ppt/notesSlides/notesSlide8.xml><?xml version="1.0" encoding="utf-8"?>
+<p:notes xmlns:a="http://schemas.openxmlformats.org/drawingml/2006/main" xmlns:r="http://schemas.openxmlformats.org/officeDocument/2006/relationships" xmlns:p="http://schemas.openxmlformats.org/presentationml/2006/main">
+  <p:cSld>
+    <p:spTree>
+      <p:nvGrpSpPr>
+        <p:cNvPr id="1" name=""/>
+        <p:cNvGrpSpPr/>
+        <p:nvPr/>
+      </p:nvGrpSpPr>
+      <p:grpSpPr>
+        <a:xfrm>
+          <a:off x="0" y="0"/>
+          <a:ext cx="0" cy="0"/>
+          <a:chOff x="0" y="0"/>
+          <a:chExt cx="0" cy="0"/>
+        </a:xfrm>
+      </p:grpSpPr>
+      <p:sp>
+        <p:nvSpPr>
+          <p:cNvPr id="2" name="Slide Image Placeholder 1"/>
+          <p:cNvSpPr>
+            <a:spLocks noGrp="1" noRot="1" noChangeAspect="1"/>
+          </p:cNvSpPr>
+          <p:nvPr>
+            <p:ph type="sldImg"/>
+          </p:nvPr>
+        </p:nvSpPr>
+        <p:spPr/>
+        <p:txBody>
+          <a:bodyPr/>
+          <a:lstStyle/>
+          <a:p>
+            <a:endParaRPr lang="en-US"/>
+          </a:p>
+        </p:txBody>
+      </p:sp>
+      <p:sp>
+        <p:nvSpPr>
+          <p:cNvPr id="3" name="Notes Placeholder 2"/>
+          <p:cNvSpPr>
+            <a:spLocks noGrp="1"/>
+          </p:cNvSpPr>
+          <p:nvPr>
+            <p:ph type="body" idx="1"/>
+          </p:nvPr>
+        </p:nvSpPr>
+        <p:spPr/>
+        <p:txBody>
+          <a:bodyPr/>
+          <a:lstStyle/>
+          <a:p>
+            <a:r>
+              <a:rPr lang="en-US" sz="1200" b="1" i="0" kern="1200" dirty="0">
+                <a:solidFill>
+                  <a:schemeClr val="tx1"/>
+                </a:solidFill>
+                <a:effectLst/>
+                <a:latin typeface="+mn-lt"/>
+                <a:ea typeface="+mn-ea"/>
+                <a:cs typeface="+mn-cs"/>
+              </a:rPr>
+              <a:t>What the slide says:</a:t>
+            </a:r>
+            <a:r>
+              <a:rPr lang="en-US" sz="1200" b="0" i="0" kern="1200" dirty="0">
+                <a:solidFill>
+                  <a:schemeClr val="tx1"/>
+                </a:solidFill>
+                <a:effectLst/>
+                <a:latin typeface="+mn-lt"/>
+                <a:ea typeface="+mn-ea"/>
+                <a:cs typeface="+mn-cs"/>
+              </a:rPr>
+              <a:t> ETS (exponential smoothing) doesn't use predictors. It carries a small hidden state – a </a:t>
+            </a:r>
+            <a:r>
+              <a:rPr lang="en-US" sz="1200" b="1" i="0" kern="1200" dirty="0">
+                <a:solidFill>
+                  <a:schemeClr val="tx1"/>
+                </a:solidFill>
+                <a:effectLst/>
+                <a:latin typeface="+mn-lt"/>
+                <a:ea typeface="+mn-ea"/>
+                <a:cs typeface="+mn-cs"/>
+              </a:rPr>
+              <a:t>level</a:t>
+            </a:r>
+            <a:r>
+              <a:rPr lang="en-US" sz="1200" b="0" i="0" kern="1200" dirty="0">
+                <a:solidFill>
+                  <a:schemeClr val="tx1"/>
+                </a:solidFill>
+                <a:effectLst/>
+                <a:latin typeface="+mn-lt"/>
+                <a:ea typeface="+mn-ea"/>
+                <a:cs typeface="+mn-cs"/>
+              </a:rPr>
+              <a:t> and a </a:t>
+            </a:r>
+            <a:r>
+              <a:rPr lang="en-US" sz="1200" b="1" i="0" kern="1200" dirty="0">
+                <a:solidFill>
+                  <a:schemeClr val="tx1"/>
+                </a:solidFill>
+                <a:effectLst/>
+                <a:latin typeface="+mn-lt"/>
+                <a:ea typeface="+mn-ea"/>
+                <a:cs typeface="+mn-cs"/>
+              </a:rPr>
+              <a:t>trend</a:t>
+            </a:r>
+            <a:r>
+              <a:rPr lang="en-US" sz="1200" b="0" i="0" kern="1200" dirty="0">
+                <a:solidFill>
+                  <a:schemeClr val="tx1"/>
+                </a:solidFill>
+                <a:effectLst/>
+                <a:latin typeface="+mn-lt"/>
+                <a:ea typeface="+mn-ea"/>
+                <a:cs typeface="+mn-cs"/>
+              </a:rPr>
+              <a:t> - and each year's actual value nudges that state. Forecasting is just the same loop run forward with nothing to nudge it.</a:t>
+            </a:r>
+          </a:p>
+          <a:p>
+            <a:r>
+              <a:rPr lang="en-US" sz="1200" b="1" i="0" kern="1200" dirty="0">
+                <a:solidFill>
+                  <a:schemeClr val="tx1"/>
+                </a:solidFill>
+                <a:effectLst/>
+                <a:latin typeface="+mn-lt"/>
+                <a:ea typeface="+mn-ea"/>
+                <a:cs typeface="+mn-cs"/>
+              </a:rPr>
+              <a:t>Worked example</a:t>
+            </a:r>
+            <a:r>
+              <a:rPr lang="en-US" sz="1200" b="0" i="0" kern="1200" dirty="0">
+                <a:solidFill>
+                  <a:schemeClr val="tx1"/>
+                </a:solidFill>
+                <a:effectLst/>
+                <a:latin typeface="+mn-lt"/>
+                <a:ea typeface="+mn-ea"/>
+                <a:cs typeface="+mn-cs"/>
+              </a:rPr>
+              <a:t> - national CO₂, </a:t>
+            </a:r>
+            <a:r>
+              <a:rPr lang="el-GR" sz="1200" b="0" i="0" kern="1200" dirty="0">
+                <a:solidFill>
+                  <a:schemeClr val="tx1"/>
+                </a:solidFill>
+                <a:effectLst/>
+                <a:latin typeface="+mn-lt"/>
+                <a:ea typeface="+mn-ea"/>
+                <a:cs typeface="+mn-cs"/>
+              </a:rPr>
+              <a:t>α = 0.6, β* = 0.2, φ = 0.9.</a:t>
+            </a:r>
+          </a:p>
+          <a:p>
+            <a:r>
+              <a:rPr lang="en-US" sz="1200" b="0" i="1" kern="1200" dirty="0">
+                <a:solidFill>
+                  <a:schemeClr val="tx1"/>
+                </a:solidFill>
+                <a:effectLst/>
+                <a:latin typeface="+mn-lt"/>
+                <a:ea typeface="+mn-ea"/>
+                <a:cs typeface="+mn-cs"/>
+              </a:rPr>
+              <a:t>Prior state, end of 2016:</a:t>
+            </a:r>
+            <a:r>
+              <a:rPr lang="en-US" sz="1200" b="0" i="0" kern="1200" dirty="0">
+                <a:solidFill>
+                  <a:schemeClr val="tx1"/>
+                </a:solidFill>
+                <a:effectLst/>
+                <a:latin typeface="+mn-lt"/>
+                <a:ea typeface="+mn-ea"/>
+                <a:cs typeface="+mn-cs"/>
+              </a:rPr>
+              <a:t> level = 500 Mt, trend = +10 Mt/yr.</a:t>
+            </a:r>
+          </a:p>
+          <a:p>
+            <a:r>
+              <a:rPr lang="en-US" sz="1200" b="1" i="0" kern="1200" dirty="0">
+                <a:solidFill>
+                  <a:schemeClr val="tx1"/>
+                </a:solidFill>
+                <a:effectLst/>
+                <a:latin typeface="+mn-lt"/>
+                <a:ea typeface="+mn-ea"/>
+                <a:cs typeface="+mn-cs"/>
+              </a:rPr>
+              <a:t>Expectation for 2017</a:t>
+            </a:r>
+            <a:r>
+              <a:rPr lang="en-US" sz="1200" b="0" i="0" kern="1200" dirty="0">
+                <a:solidFill>
+                  <a:schemeClr val="tx1"/>
+                </a:solidFill>
+                <a:effectLst/>
+                <a:latin typeface="+mn-lt"/>
+                <a:ea typeface="+mn-ea"/>
+                <a:cs typeface="+mn-cs"/>
+              </a:rPr>
+              <a:t> = level + </a:t>
+            </a:r>
+            <a:r>
+              <a:rPr lang="el-GR" sz="1200" b="0" i="0" kern="1200" dirty="0">
+                <a:solidFill>
+                  <a:schemeClr val="tx1"/>
+                </a:solidFill>
+                <a:effectLst/>
+                <a:latin typeface="+mn-lt"/>
+                <a:ea typeface="+mn-ea"/>
+                <a:cs typeface="+mn-cs"/>
+              </a:rPr>
+              <a:t>φ·</a:t>
+            </a:r>
+            <a:r>
+              <a:rPr lang="en-US" sz="1200" b="0" i="0" kern="1200" dirty="0">
+                <a:solidFill>
+                  <a:schemeClr val="tx1"/>
+                </a:solidFill>
+                <a:effectLst/>
+                <a:latin typeface="+mn-lt"/>
+                <a:ea typeface="+mn-ea"/>
+                <a:cs typeface="+mn-cs"/>
+              </a:rPr>
+              <a:t>trend = 500 + 0.9(10) = </a:t>
+            </a:r>
+            <a:r>
+              <a:rPr lang="en-US" sz="1200" b="1" i="0" kern="1200" dirty="0">
+                <a:solidFill>
+                  <a:schemeClr val="tx1"/>
+                </a:solidFill>
+                <a:effectLst/>
+                <a:latin typeface="+mn-lt"/>
+                <a:ea typeface="+mn-ea"/>
+                <a:cs typeface="+mn-cs"/>
+              </a:rPr>
+              <a:t>509 Mt</a:t>
+            </a:r>
+            <a:endParaRPr lang="en-US" sz="1200" b="0" i="0" kern="1200" dirty="0">
+              <a:solidFill>
+                <a:schemeClr val="tx1"/>
+              </a:solidFill>
+              <a:effectLst/>
+              <a:latin typeface="+mn-lt"/>
+              <a:ea typeface="+mn-ea"/>
+              <a:cs typeface="+mn-cs"/>
+            </a:endParaRPr>
+          </a:p>
+          <a:p>
+            <a:r>
+              <a:rPr lang="en-US" sz="1200" b="1" i="0" kern="1200" dirty="0">
+                <a:solidFill>
+                  <a:schemeClr val="tx1"/>
+                </a:solidFill>
+                <a:effectLst/>
+                <a:latin typeface="+mn-lt"/>
+                <a:ea typeface="+mn-ea"/>
+                <a:cs typeface="+mn-cs"/>
+              </a:rPr>
+              <a:t>New observation:</a:t>
+            </a:r>
+            <a:r>
+              <a:rPr lang="en-US" sz="1200" b="0" i="0" kern="1200" dirty="0">
+                <a:solidFill>
+                  <a:schemeClr val="tx1"/>
+                </a:solidFill>
+                <a:effectLst/>
+                <a:latin typeface="+mn-lt"/>
+                <a:ea typeface="+mn-ea"/>
+                <a:cs typeface="+mn-cs"/>
+              </a:rPr>
+              <a:t> actual 2017 = </a:t>
+            </a:r>
+            <a:r>
+              <a:rPr lang="en-US" sz="1200" b="1" i="0" kern="1200" dirty="0">
+                <a:solidFill>
+                  <a:schemeClr val="tx1"/>
+                </a:solidFill>
+                <a:effectLst/>
+                <a:latin typeface="+mn-lt"/>
+                <a:ea typeface="+mn-ea"/>
+                <a:cs typeface="+mn-cs"/>
+              </a:rPr>
+              <a:t>505 Mt</a:t>
+            </a:r>
+            <a:r>
+              <a:rPr lang="en-US" sz="1200" b="0" i="0" kern="1200" dirty="0">
+                <a:solidFill>
+                  <a:schemeClr val="tx1"/>
+                </a:solidFill>
+                <a:effectLst/>
+                <a:latin typeface="+mn-lt"/>
+                <a:ea typeface="+mn-ea"/>
+                <a:cs typeface="+mn-cs"/>
+              </a:rPr>
+              <a:t> → error of −4</a:t>
+            </a:r>
+          </a:p>
+          <a:p>
+            <a:r>
+              <a:rPr lang="en-US" sz="1200" b="1" i="0" kern="1200" dirty="0">
+                <a:solidFill>
+                  <a:schemeClr val="tx1"/>
+                </a:solidFill>
+                <a:effectLst/>
+                <a:latin typeface="+mn-lt"/>
+                <a:ea typeface="+mn-ea"/>
+                <a:cs typeface="+mn-cs"/>
+              </a:rPr>
+              <a:t>Update level:</a:t>
+            </a:r>
+            <a:r>
+              <a:rPr lang="en-US" sz="1200" b="0" i="0" kern="1200" dirty="0">
+                <a:solidFill>
+                  <a:schemeClr val="tx1"/>
+                </a:solidFill>
+                <a:effectLst/>
+                <a:latin typeface="+mn-lt"/>
+                <a:ea typeface="+mn-ea"/>
+                <a:cs typeface="+mn-cs"/>
+              </a:rPr>
+              <a:t> 0.6(505) + 0.4(509) = </a:t>
+            </a:r>
+            <a:r>
+              <a:rPr lang="en-US" sz="1200" b="1" i="0" kern="1200">
+                <a:solidFill>
+                  <a:schemeClr val="tx1"/>
+                </a:solidFill>
+                <a:effectLst/>
+                <a:latin typeface="+mn-lt"/>
+                <a:ea typeface="+mn-ea"/>
+                <a:cs typeface="+mn-cs"/>
+              </a:rPr>
+              <a:t>506.6</a:t>
+            </a:r>
+            <a:r>
+              <a:rPr lang="en-US" sz="1200" b="0" i="0" kern="1200">
+                <a:solidFill>
+                  <a:schemeClr val="tx1"/>
+                </a:solidFill>
+                <a:effectLst/>
+                <a:latin typeface="+mn-lt"/>
+                <a:ea typeface="+mn-ea"/>
+                <a:cs typeface="+mn-cs"/>
+              </a:rPr>
+              <a:t> – </a:t>
+            </a:r>
+            <a:r>
+              <a:rPr lang="en-US" sz="1200" b="0" i="0" kern="1200" dirty="0">
+                <a:solidFill>
+                  <a:schemeClr val="tx1"/>
+                </a:solidFill>
+                <a:effectLst/>
+                <a:latin typeface="+mn-lt"/>
+                <a:ea typeface="+mn-ea"/>
+                <a:cs typeface="+mn-cs"/>
+              </a:rPr>
+              <a:t>pulled toward the actual, but only 60% of the way</a:t>
+            </a:r>
+          </a:p>
+          <a:p>
+            <a:r>
+              <a:rPr lang="en-US" sz="1200" b="1" i="0" kern="1200" dirty="0">
+                <a:solidFill>
+                  <a:schemeClr val="tx1"/>
+                </a:solidFill>
+                <a:effectLst/>
+                <a:latin typeface="+mn-lt"/>
+                <a:ea typeface="+mn-ea"/>
+                <a:cs typeface="+mn-cs"/>
+              </a:rPr>
+              <a:t>Update trend:</a:t>
+            </a:r>
+            <a:r>
+              <a:rPr lang="en-US" sz="1200" b="0" i="0" kern="1200" dirty="0">
+                <a:solidFill>
+                  <a:schemeClr val="tx1"/>
+                </a:solidFill>
+                <a:effectLst/>
+                <a:latin typeface="+mn-lt"/>
+                <a:ea typeface="+mn-ea"/>
+                <a:cs typeface="+mn-cs"/>
+              </a:rPr>
+              <a:t> 0.2(506.6 − 500) + 0.8(0.9 × 10) = 1.32 + 7.20 = </a:t>
+            </a:r>
+            <a:r>
+              <a:rPr lang="en-US" sz="1200" b="1" i="0" kern="1200">
+                <a:solidFill>
+                  <a:schemeClr val="tx1"/>
+                </a:solidFill>
+                <a:effectLst/>
+                <a:latin typeface="+mn-lt"/>
+                <a:ea typeface="+mn-ea"/>
+                <a:cs typeface="+mn-cs"/>
+              </a:rPr>
+              <a:t>8.52</a:t>
+            </a:r>
+            <a:r>
+              <a:rPr lang="en-US" sz="1200" b="0" i="0" kern="1200">
+                <a:solidFill>
+                  <a:schemeClr val="tx1"/>
+                </a:solidFill>
+                <a:effectLst/>
+                <a:latin typeface="+mn-lt"/>
+                <a:ea typeface="+mn-ea"/>
+                <a:cs typeface="+mn-cs"/>
+              </a:rPr>
+              <a:t> – </a:t>
+            </a:r>
+            <a:r>
+              <a:rPr lang="en-US" sz="1200" b="0" i="0" kern="1200" dirty="0">
+                <a:solidFill>
+                  <a:schemeClr val="tx1"/>
+                </a:solidFill>
+                <a:effectLst/>
+                <a:latin typeface="+mn-lt"/>
+                <a:ea typeface="+mn-ea"/>
+                <a:cs typeface="+mn-cs"/>
+              </a:rPr>
+              <a:t>the trend cools from 10 to 8.5 because growth undershot</a:t>
+            </a:r>
+          </a:p>
+          <a:p>
+            <a:r>
+              <a:rPr lang="en-US" sz="1200" b="0" i="0" kern="1200" dirty="0">
+                <a:solidFill>
+                  <a:schemeClr val="tx1"/>
+                </a:solidFill>
+                <a:effectLst/>
+                <a:latin typeface="+mn-lt"/>
+                <a:ea typeface="+mn-ea"/>
+                <a:cs typeface="+mn-cs"/>
+              </a:rPr>
+              <a:t>That's one turn of the loop, and it repeats for every year 1990 → 2018.</a:t>
+            </a:r>
+          </a:p>
+          <a:p>
+            <a:r>
+              <a:rPr lang="en-US" sz="1200" b="1" i="0" kern="1200" dirty="0">
+                <a:solidFill>
+                  <a:schemeClr val="tx1"/>
+                </a:solidFill>
+                <a:effectLst/>
+                <a:latin typeface="+mn-lt"/>
+                <a:ea typeface="+mn-ea"/>
+                <a:cs typeface="+mn-cs"/>
+              </a:rPr>
+              <a:t>Then the forecast box:</a:t>
+            </a:r>
+            <a:r>
+              <a:rPr lang="en-US" sz="1200" b="0" i="0" kern="1200" dirty="0">
+                <a:solidFill>
+                  <a:schemeClr val="tx1"/>
+                </a:solidFill>
+                <a:effectLst/>
+                <a:latin typeface="+mn-lt"/>
+                <a:ea typeface="+mn-ea"/>
+                <a:cs typeface="+mn-cs"/>
+              </a:rPr>
+              <a:t> past 2018 there are no more actuals, so steps 1–4 collapse into step 1 alone. The state freezes and only the damped trend propagates:</a:t>
+            </a:r>
+          </a:p>
+          <a:p>
+            <a:r>
+              <a:rPr lang="en-US" sz="1200" b="0" i="0" kern="1200" dirty="0">
+                <a:solidFill>
+                  <a:schemeClr val="tx1"/>
+                </a:solidFill>
+                <a:effectLst/>
+                <a:latin typeface="+mn-lt"/>
+                <a:ea typeface="+mn-ea"/>
+                <a:cs typeface="+mn-cs"/>
+              </a:rPr>
+              <a:t>2019: 506.6 + 0.9(8.52) = 514.3</a:t>
+            </a:r>
+          </a:p>
+          <a:p>
+            <a:r>
+              <a:rPr lang="en-US" sz="1200" b="0" i="0" kern="1200" dirty="0">
+                <a:solidFill>
+                  <a:schemeClr val="tx1"/>
+                </a:solidFill>
+                <a:effectLst/>
+                <a:latin typeface="+mn-lt"/>
+                <a:ea typeface="+mn-ea"/>
+                <a:cs typeface="+mn-cs"/>
+              </a:rPr>
+              <a:t>2020: 506.6 + (0.9 + 0.81)(8.52) = 521.2</a:t>
+            </a:r>
+          </a:p>
+          <a:p>
+            <a:r>
+              <a:rPr lang="en-US" sz="1200" b="0" i="0" kern="1200" dirty="0">
+                <a:solidFill>
+                  <a:schemeClr val="tx1"/>
+                </a:solidFill>
+                <a:effectLst/>
+                <a:latin typeface="+mn-lt"/>
+                <a:ea typeface="+mn-ea"/>
+                <a:cs typeface="+mn-cs"/>
+              </a:rPr>
+              <a:t>2021: 506.6 + (0.9 + 0.81 + 0.729)(8.52) = 527.4</a:t>
+            </a:r>
+          </a:p>
+          <a:p>
+            <a:r>
+              <a:rPr lang="en-US" sz="1200" b="0" i="0" kern="1200" dirty="0">
+                <a:solidFill>
+                  <a:schemeClr val="tx1"/>
+                </a:solidFill>
+                <a:effectLst/>
+                <a:latin typeface="+mn-lt"/>
+                <a:ea typeface="+mn-ea"/>
+                <a:cs typeface="+mn-cs"/>
+              </a:rPr>
+              <a:t>Increments shrink each year (+7.7, +6.9, +6.2) and the curve flattens toward a ceiling of about 583 Mt. That's what </a:t>
+            </a:r>
+            <a:r>
+              <a:rPr lang="el-GR" sz="1200" b="0" i="0" kern="1200" dirty="0">
+                <a:solidFill>
+                  <a:schemeClr val="tx1"/>
+                </a:solidFill>
+                <a:effectLst/>
+                <a:latin typeface="+mn-lt"/>
+                <a:ea typeface="+mn-ea"/>
+                <a:cs typeface="+mn-cs"/>
+              </a:rPr>
+              <a:t>φ </a:t>
+            </a:r>
+            <a:r>
+              <a:rPr lang="en-US" sz="1200" b="0" i="0" kern="1200" dirty="0">
+                <a:solidFill>
+                  <a:schemeClr val="tx1"/>
+                </a:solidFill>
+                <a:effectLst/>
+                <a:latin typeface="+mn-lt"/>
+                <a:ea typeface="+mn-ea"/>
+                <a:cs typeface="+mn-cs"/>
+              </a:rPr>
+              <a:t>buys </a:t>
+            </a:r>
+            <a:r>
+              <a:rPr lang="en-US" sz="1200" b="0" i="0" kern="1200">
+                <a:solidFill>
+                  <a:schemeClr val="tx1"/>
+                </a:solidFill>
+                <a:effectLst/>
+                <a:latin typeface="+mn-lt"/>
+                <a:ea typeface="+mn-ea"/>
+                <a:cs typeface="+mn-cs"/>
+              </a:rPr>
+              <a:t>you – </a:t>
+            </a:r>
+            <a:r>
+              <a:rPr lang="en-US" sz="1200" b="0" i="0" kern="1200" dirty="0">
+                <a:solidFill>
+                  <a:schemeClr val="tx1"/>
+                </a:solidFill>
+                <a:effectLst/>
+                <a:latin typeface="+mn-lt"/>
+                <a:ea typeface="+mn-ea"/>
+                <a:cs typeface="+mn-cs"/>
+              </a:rPr>
+              <a:t>a straight-line trend extrapolated 30 years out would be absurd; the damping makes the projection level off.</a:t>
+            </a:r>
+          </a:p>
+          <a:p>
+            <a:endParaRPr lang="en-US" dirty="0"/>
+          </a:p>
+        </p:txBody>
+      </p:sp>
+      <p:sp>
+        <p:nvSpPr>
+          <p:cNvPr id="4" name="Slide Number Placeholder 3"/>
+          <p:cNvSpPr>
+            <a:spLocks noGrp="1"/>
+          </p:cNvSpPr>
+          <p:nvPr>
+            <p:ph type="sldNum" sz="quarter" idx="10"/>
+          </p:nvPr>
+        </p:nvSpPr>
+        <p:spPr/>
+        <p:txBody>
+          <a:bodyPr/>
+          <a:lstStyle/>
+          <a:p>
+            <a:fld id="{F7021451-1387-4CA6-816F-3879F97B5CBC}" type="slidenum">
+              <a:rPr lang="en-US"/>
               <a:t>15</a:t>
+            </a:fld>
+            <a:endParaRPr lang="en-US"/>
+          </a:p>
+        </p:txBody>
+      </p:sp>
+    </p:spTree>
+    <p:extLst>
+      <p:ext uri="{BB962C8B-B14F-4D97-AF65-F5344CB8AC3E}">
+        <p14:creationId xmlns:p14="http://schemas.microsoft.com/office/powerpoint/2010/main" val="1024086991"/>
+      </p:ext>
+    </p:extLst>
+  </p:cSld>
+  <p:clrMapOvr>
+    <a:masterClrMapping/>
+  </p:clrMapOvr>
+</p:notes>
+</file>
+
+<file path=ppt/notesSlides/notesSlide9.xml><?xml version="1.0" encoding="utf-8"?>
+<p:notes xmlns:a="http://schemas.openxmlformats.org/drawingml/2006/main" xmlns:r="http://schemas.openxmlformats.org/officeDocument/2006/relationships" xmlns:p="http://schemas.openxmlformats.org/presentationml/2006/main">
+  <p:cSld>
+    <p:spTree>
+      <p:nvGrpSpPr>
+        <p:cNvPr id="1" name=""/>
+        <p:cNvGrpSpPr/>
+        <p:nvPr/>
+      </p:nvGrpSpPr>
+      <p:grpSpPr>
+        <a:xfrm>
+          <a:off x="0" y="0"/>
+          <a:ext cx="0" cy="0"/>
+          <a:chOff x="0" y="0"/>
+          <a:chExt cx="0" cy="0"/>
+        </a:xfrm>
+      </p:grpSpPr>
+      <p:sp>
+        <p:nvSpPr>
+          <p:cNvPr id="2" name="Slide Image Placeholder 1"/>
+          <p:cNvSpPr>
+            <a:spLocks noGrp="1" noRot="1" noChangeAspect="1"/>
+          </p:cNvSpPr>
+          <p:nvPr>
+            <p:ph type="sldImg"/>
+          </p:nvPr>
+        </p:nvSpPr>
+        <p:spPr/>
+        <p:txBody>
+          <a:bodyPr/>
+          <a:lstStyle/>
+          <a:p>
+            <a:endParaRPr lang="en-US"/>
+          </a:p>
+        </p:txBody>
+      </p:sp>
+      <p:sp>
+        <p:nvSpPr>
+          <p:cNvPr id="3" name="Notes Placeholder 2"/>
+          <p:cNvSpPr>
+            <a:spLocks noGrp="1"/>
+          </p:cNvSpPr>
+          <p:nvPr>
+            <p:ph type="body" idx="1"/>
+          </p:nvPr>
+        </p:nvSpPr>
+        <p:spPr/>
+        <p:txBody>
+          <a:bodyPr/>
+          <a:lstStyle/>
+          <a:p>
+            <a:endParaRPr lang="en-US" dirty="0"/>
+          </a:p>
+        </p:txBody>
+      </p:sp>
+      <p:sp>
+        <p:nvSpPr>
+          <p:cNvPr id="4" name="Slide Number Placeholder 3"/>
+          <p:cNvSpPr>
+            <a:spLocks noGrp="1"/>
+          </p:cNvSpPr>
+          <p:nvPr>
+            <p:ph type="sldNum" sz="quarter" idx="10"/>
+          </p:nvPr>
+        </p:nvSpPr>
+        <p:spPr/>
+        <p:txBody>
+          <a:bodyPr/>
+          <a:lstStyle/>
+          <a:p>
+            <a:fld id="{F7021451-1387-4CA6-816F-3879F97B5CBC}" type="slidenum">
+              <a:rPr lang="en-US"/>
+              <a:t>17</a:t>
             </a:fld>
             <a:endParaRPr lang="en-US"/>
           </a:p>
@@ -2829,7 +3184,7 @@
                 <a:ea typeface="Arial" pitchFamily="34" charset="-122"/>
                 <a:cs typeface="Arial" pitchFamily="34" charset="-120"/>
               </a:rPr>
-              <a:t>Final Presentation –Review and Q&amp;A</a:t>
+              <a:t>Final Presentation – Review and Q&amp;A</a:t>
             </a:r>
             <a:endParaRPr lang="en-US" sz="1800" dirty="0"/>
           </a:p>
@@ -3009,7 +3364,7 @@
                 <a:ea typeface="Arial" pitchFamily="34" charset="-122"/>
                 <a:cs typeface="Arial"/>
               </a:rPr>
-              <a:t>Page 1 of 17</a:t>
+              <a:t>Page 1 of 19</a:t>
             </a:r>
             <a:endParaRPr lang="en-US" sz="900" dirty="0">
               <a:solidFill>
@@ -3030,6 +3385,468 @@
 </file>
 
 <file path=ppt/slides/slide10.xml><?xml version="1.0" encoding="utf-8"?>
+<p:sld xmlns:a="http://schemas.openxmlformats.org/drawingml/2006/main" xmlns:r="http://schemas.openxmlformats.org/officeDocument/2006/relationships" xmlns:p="http://schemas.openxmlformats.org/presentationml/2006/main">
+  <p:cSld name="Slide 3">
+    <p:bg>
+      <p:bgPr>
+        <a:solidFill>
+          <a:srgbClr val="FFFFFF"/>
+        </a:solidFill>
+        <a:effectLst/>
+      </p:bgPr>
+    </p:bg>
+    <p:spTree>
+      <p:nvGrpSpPr>
+        <p:cNvPr id="1" name=""/>
+        <p:cNvGrpSpPr/>
+        <p:nvPr/>
+      </p:nvGrpSpPr>
+      <p:grpSpPr>
+        <a:xfrm>
+          <a:off x="0" y="0"/>
+          <a:ext cx="0" cy="0"/>
+          <a:chOff x="0" y="0"/>
+          <a:chExt cx="0" cy="0"/>
+        </a:xfrm>
+      </p:grpSpPr>
+      <p:sp>
+        <p:nvSpPr>
+          <p:cNvPr id="2" name="Text 0"/>
+          <p:cNvSpPr/>
+          <p:nvPr/>
+        </p:nvSpPr>
+        <p:spPr>
+          <a:xfrm>
+            <a:off x="640080" y="411480"/>
+            <a:ext cx="10911535" cy="320040"/>
+          </a:xfrm>
+          <a:prstGeom prst="rect">
+            <a:avLst/>
+          </a:prstGeom>
+          <a:noFill/>
+          <a:ln/>
+        </p:spPr>
+        <p:txBody>
+          <a:bodyPr wrap="square" lIns="0" tIns="0" rIns="0" bIns="0" rtlCol="0" anchor="ctr"/>
+          <a:lstStyle/>
+          <a:p>
+            <a:pPr marL="0" indent="0">
+              <a:buNone/>
+            </a:pPr>
+            <a:r>
+              <a:rPr lang="en-US" sz="1200" b="1" kern="0" spc="150" dirty="0">
+                <a:solidFill>
+                  <a:srgbClr val="00B8D9"/>
+                </a:solidFill>
+                <a:latin typeface="Arial" pitchFamily="34" charset="0"/>
+                <a:ea typeface="Arial" pitchFamily="34" charset="-122"/>
+                <a:cs typeface="Arial" pitchFamily="34" charset="-120"/>
+              </a:rPr>
+              <a:t>WEEK 3  ·  REVIEW</a:t>
+            </a:r>
+            <a:endParaRPr lang="en-US" sz="1200" dirty="0"/>
+          </a:p>
+        </p:txBody>
+      </p:sp>
+      <p:sp>
+        <p:nvSpPr>
+          <p:cNvPr id="3" name="Text 1"/>
+          <p:cNvSpPr/>
+          <p:nvPr/>
+        </p:nvSpPr>
+        <p:spPr>
+          <a:xfrm>
+            <a:off x="640080" y="868680"/>
+            <a:ext cx="10911535" cy="1280160"/>
+          </a:xfrm>
+          <a:prstGeom prst="rect">
+            <a:avLst/>
+          </a:prstGeom>
+          <a:noFill/>
+          <a:ln/>
+        </p:spPr>
+        <p:txBody>
+          <a:bodyPr wrap="square" lIns="0" tIns="0" rIns="0" bIns="0" rtlCol="0" anchor="t"/>
+          <a:lstStyle/>
+          <a:p>
+            <a:pPr marL="0" indent="0" algn="l">
+              <a:lnSpc>
+                <a:spcPct val="112000"/>
+              </a:lnSpc>
+              <a:buNone/>
+            </a:pPr>
+            <a:r>
+              <a:rPr lang="en-US" sz="2700" b="1" dirty="0">
+                <a:solidFill>
+                  <a:srgbClr val="213541"/>
+                </a:solidFill>
+                <a:latin typeface="Arial" pitchFamily="34" charset="0"/>
+                <a:ea typeface="Arial" pitchFamily="34" charset="-122"/>
+                <a:cs typeface="Arial" pitchFamily="34" charset="-120"/>
+              </a:rPr>
+              <a:t>Key Lessons – Regression Models</a:t>
+            </a:r>
+            <a:endParaRPr lang="en-US" sz="2700" dirty="0"/>
+          </a:p>
+        </p:txBody>
+      </p:sp>
+      <p:sp>
+        <p:nvSpPr>
+          <p:cNvPr id="4" name="Text 2"/>
+          <p:cNvSpPr/>
+          <p:nvPr/>
+        </p:nvSpPr>
+        <p:spPr>
+          <a:xfrm>
+            <a:off x="640080" y="2194560"/>
+            <a:ext cx="10911535" cy="274320"/>
+          </a:xfrm>
+          <a:prstGeom prst="rect">
+            <a:avLst/>
+          </a:prstGeom>
+          <a:noFill/>
+          <a:ln/>
+        </p:spPr>
+        <p:txBody>
+          <a:bodyPr wrap="square" lIns="0" tIns="0" rIns="0" bIns="0" rtlCol="0" anchor="ctr"/>
+          <a:lstStyle/>
+          <a:p>
+            <a:pPr marL="0" indent="0">
+              <a:buNone/>
+            </a:pPr>
+            <a:r>
+              <a:rPr lang="en-US" sz="1100" i="1" dirty="0">
+                <a:solidFill>
+                  <a:srgbClr val="8A98A3"/>
+                </a:solidFill>
+                <a:latin typeface="Arial" pitchFamily="34" charset="0"/>
+                <a:ea typeface="Arial" pitchFamily="34" charset="-122"/>
+                <a:cs typeface="Arial" pitchFamily="34" charset="-120"/>
+              </a:rPr>
+              <a:t>Source: Regression Models curriculum doc</a:t>
+            </a:r>
+            <a:endParaRPr lang="en-US" sz="1100" dirty="0"/>
+          </a:p>
+        </p:txBody>
+      </p:sp>
+      <p:sp>
+        <p:nvSpPr>
+          <p:cNvPr id="5" name="AnswerBox"/>
+          <p:cNvSpPr/>
+          <p:nvPr/>
+        </p:nvSpPr>
+        <p:spPr>
+          <a:xfrm>
+            <a:off x="640080" y="2606040"/>
+            <a:ext cx="10911535" cy="3474720"/>
+          </a:xfrm>
+          <a:prstGeom prst="roundRect">
+            <a:avLst>
+              <a:gd name="adj" fmla="val 2105"/>
+            </a:avLst>
+          </a:prstGeom>
+          <a:solidFill>
+            <a:srgbClr val="EAF9FB"/>
+          </a:solidFill>
+          <a:ln/>
+        </p:spPr>
+        <p:txBody>
+          <a:bodyPr wrap="square" lIns="320040" tIns="320040" rIns="320040" bIns="320040" rtlCol="0" anchor="t"/>
+          <a:lstStyle/>
+          <a:p>
+            <a:pPr marL="228600" indent="-228600" algn="l">
+              <a:lnSpc>
+                <a:spcPct val="110000"/>
+              </a:lnSpc>
+              <a:spcAft>
+                <a:spcPts val="600"/>
+              </a:spcAft>
+              <a:buFont typeface="Arial"/>
+              <a:buChar char="•"/>
+            </a:pPr>
+            <a:r>
+              <a:rPr lang="en-US" sz="1300" b="1" dirty="0">
+                <a:solidFill>
+                  <a:srgbClr val="213541"/>
+                </a:solidFill>
+                <a:latin typeface="Arial" pitchFamily="34" charset="0"/>
+                <a:ea typeface="Arial" pitchFamily="34" charset="-122"/>
+                <a:cs typeface="Arial" pitchFamily="34" charset="-120"/>
+              </a:rPr>
+              <a:t>The naive baseline is a floor, not a competitor.</a:t>
+            </a:r>
+            <a:r>
+              <a:rPr lang="en-US" sz="1300" dirty="0">
+                <a:solidFill>
+                  <a:srgbClr val="213541"/>
+                </a:solidFill>
+                <a:latin typeface="Arial" pitchFamily="34" charset="0"/>
+                <a:ea typeface="Arial" pitchFamily="34" charset="-122"/>
+                <a:cs typeface="Arial" pitchFamily="34" charset="-120"/>
+              </a:rPr>
+              <a:t> Any real model that can't beat “repeat last year's value” isn't adding value – always report it alongside every other model.</a:t>
+            </a:r>
+            <a:endParaRPr lang="en-US" sz="1300" dirty="0"/>
+          </a:p>
+          <a:p>
+            <a:pPr marL="228600" indent="-228600" algn="l">
+              <a:lnSpc>
+                <a:spcPct val="110000"/>
+              </a:lnSpc>
+              <a:spcAft>
+                <a:spcPts val="600"/>
+              </a:spcAft>
+              <a:buFont typeface="Arial"/>
+              <a:buChar char="•"/>
+            </a:pPr>
+            <a:r>
+              <a:rPr lang="en-US" sz="1300" b="1" dirty="0">
+                <a:solidFill>
+                  <a:srgbClr val="213541"/>
+                </a:solidFill>
+                <a:latin typeface="Arial" pitchFamily="34" charset="0"/>
+                <a:ea typeface="Arial" pitchFamily="34" charset="-122"/>
+                <a:cs typeface="Arial" pitchFamily="34" charset="-120"/>
+              </a:rPr>
+              <a:t>Model complexity must match data availability.</a:t>
+            </a:r>
+            <a:r>
+              <a:rPr lang="en-US" sz="1300" dirty="0">
+                <a:solidFill>
+                  <a:srgbClr val="213541"/>
+                </a:solidFill>
+                <a:latin typeface="Arial" pitchFamily="34" charset="0"/>
+                <a:ea typeface="Arial" pitchFamily="34" charset="-122"/>
+                <a:cs typeface="Arial" pitchFamily="34" charset="-120"/>
+              </a:rPr>
+              <a:t> This is the bias-variance trade-off in practice – a 100-tree Random Forest on 25 rows/country memorizes noise and can lose to the baseline.</a:t>
+            </a:r>
+            <a:endParaRPr lang="en-US" sz="1300" dirty="0"/>
+          </a:p>
+          <a:p>
+            <a:pPr marL="228600" indent="-228600" algn="l">
+              <a:lnSpc>
+                <a:spcPct val="110000"/>
+              </a:lnSpc>
+              <a:spcAft>
+                <a:spcPts val="600"/>
+              </a:spcAft>
+              <a:buFont typeface="Arial"/>
+              <a:buChar char="•"/>
+            </a:pPr>
+            <a:r>
+              <a:rPr lang="en-US" sz="1300" b="1" dirty="0">
+                <a:solidFill>
+                  <a:srgbClr val="213541"/>
+                </a:solidFill>
+                <a:latin typeface="Arial" pitchFamily="34" charset="0"/>
+                <a:ea typeface="Arial" pitchFamily="34" charset="-122"/>
+                <a:cs typeface="Arial" pitchFamily="34" charset="-120"/>
+              </a:rPr>
+              <a:t>Pooling is the fix when segments are individually too small.</a:t>
+            </a:r>
+            <a:r>
+              <a:rPr lang="en-US" sz="1300" dirty="0">
+                <a:solidFill>
+                  <a:srgbClr val="213541"/>
+                </a:solidFill>
+                <a:latin typeface="Arial" pitchFamily="34" charset="0"/>
+                <a:ea typeface="Arial" pitchFamily="34" charset="-122"/>
+                <a:cs typeface="Arial" pitchFamily="34" charset="-120"/>
+              </a:rPr>
+              <a:t> Combine countries into one training set and add a categorical country feature so the model can still tell them apart.</a:t>
+            </a:r>
+            <a:endParaRPr lang="en-US" sz="1300" dirty="0"/>
+          </a:p>
+          <a:p>
+            <a:pPr marL="228600" indent="-228600" algn="l">
+              <a:lnSpc>
+                <a:spcPct val="110000"/>
+              </a:lnSpc>
+              <a:spcAft>
+                <a:spcPts val="600"/>
+              </a:spcAft>
+              <a:buFont typeface="Arial"/>
+              <a:buChar char="•"/>
+            </a:pPr>
+            <a:r>
+              <a:rPr lang="en-US" sz="1300" b="1" dirty="0">
+                <a:solidFill>
+                  <a:srgbClr val="213541"/>
+                </a:solidFill>
+                <a:latin typeface="Arial" pitchFamily="34" charset="0"/>
+                <a:ea typeface="Arial" pitchFamily="34" charset="-122"/>
+                <a:cs typeface="Arial" pitchFamily="34" charset="-120"/>
+              </a:rPr>
+              <a:t>Time-series data needs a chronological split, never a random shuffle.</a:t>
+            </a:r>
+            <a:r>
+              <a:rPr lang="en-US" sz="1300" dirty="0">
+                <a:solidFill>
+                  <a:srgbClr val="213541"/>
+                </a:solidFill>
+                <a:latin typeface="Arial" pitchFamily="34" charset="0"/>
+                <a:ea typeface="Arial" pitchFamily="34" charset="-122"/>
+                <a:cs typeface="Arial" pitchFamily="34" charset="-120"/>
+              </a:rPr>
+              <a:t> Use TimeSeriesSplit for cross-validation – a shuffled split leaks future information into training.</a:t>
+            </a:r>
+            <a:endParaRPr lang="en-US" sz="1300" dirty="0"/>
+          </a:p>
+          <a:p>
+            <a:pPr marL="228600" indent="-228600" algn="l">
+              <a:lnSpc>
+                <a:spcPct val="110000"/>
+              </a:lnSpc>
+              <a:spcAft>
+                <a:spcPts val="600"/>
+              </a:spcAft>
+              <a:buFont typeface="Arial"/>
+              <a:buChar char="•"/>
+            </a:pPr>
+            <a:r>
+              <a:rPr lang="en-US" sz="1300" b="1" dirty="0">
+                <a:solidFill>
+                  <a:srgbClr val="213541"/>
+                </a:solidFill>
+                <a:latin typeface="Arial" pitchFamily="34" charset="0"/>
+                <a:ea typeface="Arial" pitchFamily="34" charset="-122"/>
+                <a:cs typeface="Arial" pitchFamily="34" charset="-120"/>
+              </a:rPr>
+              <a:t>Linear Regression extrapolates without limit.</a:t>
+            </a:r>
+            <a:r>
+              <a:rPr lang="en-US" sz="1300" dirty="0">
+                <a:solidFill>
+                  <a:srgbClr val="213541"/>
+                </a:solidFill>
+                <a:latin typeface="Arial" pitchFamily="34" charset="0"/>
+                <a:ea typeface="Arial" pitchFamily="34" charset="-122"/>
+                <a:cs typeface="Arial" pitchFamily="34" charset="-120"/>
+              </a:rPr>
+              <a:t> It can predict past zero for a quantity that can't go negative – a real risk once predictions feed back into a recursive multi-step forecast.</a:t>
+            </a:r>
+            <a:endParaRPr lang="en-US" sz="1300" dirty="0"/>
+          </a:p>
+        </p:txBody>
+      </p:sp>
+      <p:pic>
+        <p:nvPicPr>
+          <p:cNvPr id="6" name="Image 0" descr="logo_small.png"/>
+          <p:cNvPicPr>
+            <a:picLocks noChangeAspect="1"/>
+          </p:cNvPicPr>
+          <p:nvPr/>
+        </p:nvPicPr>
+        <p:blipFill>
+          <a:blip r:embed="rId3"/>
+          <a:stretch>
+            <a:fillRect/>
+          </a:stretch>
+        </p:blipFill>
+        <p:spPr>
+          <a:xfrm>
+            <a:off x="457200" y="6291072"/>
+            <a:ext cx="292608" cy="292608"/>
+          </a:xfrm>
+          <a:prstGeom prst="rect">
+            <a:avLst/>
+          </a:prstGeom>
+        </p:spPr>
+      </p:pic>
+      <p:sp>
+        <p:nvSpPr>
+          <p:cNvPr id="7" name="Text 4"/>
+          <p:cNvSpPr/>
+          <p:nvPr/>
+        </p:nvSpPr>
+        <p:spPr>
+          <a:xfrm>
+            <a:off x="822960" y="6291072"/>
+            <a:ext cx="1371600" cy="292608"/>
+          </a:xfrm>
+          <a:prstGeom prst="rect">
+            <a:avLst/>
+          </a:prstGeom>
+          <a:noFill/>
+          <a:ln/>
+        </p:spPr>
+        <p:txBody>
+          <a:bodyPr wrap="square" lIns="0" tIns="0" rIns="0" bIns="0" rtlCol="0" anchor="ctr"/>
+          <a:lstStyle/>
+          <a:p>
+            <a:pPr marL="0" indent="0">
+              <a:buNone/>
+            </a:pPr>
+            <a:r>
+              <a:rPr lang="en-US" sz="900" b="1" kern="0" spc="200" dirty="0">
+                <a:solidFill>
+                  <a:srgbClr val="213541"/>
+                </a:solidFill>
+                <a:latin typeface="Arial" pitchFamily="34" charset="0"/>
+                <a:ea typeface="Arial" pitchFamily="34" charset="-122"/>
+                <a:cs typeface="Arial" pitchFamily="34" charset="-120"/>
+              </a:rPr>
+              <a:t>SYENA</a:t>
+            </a:r>
+            <a:endParaRPr lang="en-US" sz="900" dirty="0"/>
+          </a:p>
+        </p:txBody>
+      </p:sp>
+      <p:sp>
+        <p:nvSpPr>
+          <p:cNvPr id="8" name="Text 5"/>
+          <p:cNvSpPr/>
+          <p:nvPr/>
+        </p:nvSpPr>
+        <p:spPr>
+          <a:xfrm>
+            <a:off x="9753600" y="6291072"/>
+            <a:ext cx="1981200" cy="292608"/>
+          </a:xfrm>
+          <a:prstGeom prst="rect">
+            <a:avLst/>
+          </a:prstGeom>
+          <a:noFill/>
+          <a:ln/>
+        </p:spPr>
+        <p:txBody>
+          <a:bodyPr wrap="square" lIns="0" tIns="0" rIns="0" bIns="0" rtlCol="0" anchor="ctr"/>
+          <a:lstStyle/>
+          <a:p>
+            <a:pPr marL="0" indent="0" algn="r">
+              <a:buNone/>
+            </a:pPr>
+            <a:r>
+              <a:rPr lang="en-US" sz="900">
+                <a:solidFill>
+                  <a:srgbClr val="8A98A3"/>
+                </a:solidFill>
+                <a:latin typeface="Arial"/>
+                <a:ea typeface="Arial" pitchFamily="34" charset="-122"/>
+                <a:cs typeface="Arial"/>
+              </a:rPr>
+              <a:t>Page 10 of 19</a:t>
+            </a:r>
+            <a:endParaRPr lang="en-US" sz="900" dirty="0">
+              <a:solidFill>
+                <a:srgbClr val="8A98A3"/>
+              </a:solidFill>
+              <a:latin typeface="Arial"/>
+              <a:cs typeface="Arial"/>
+            </a:endParaRPr>
+          </a:p>
+        </p:txBody>
+      </p:sp>
+    </p:spTree>
+  </p:cSld>
+  <p:clrMapOvr>
+    <a:masterClrMapping/>
+  </p:clrMapOvr>
+</p:sld>
+</file>
+
+<file path=ppt/slides/slide11.xml><?xml version="1.0" encoding="utf-8"?>
 <p:sld xmlns:a="http://schemas.openxmlformats.org/drawingml/2006/main" xmlns:r="http://schemas.openxmlformats.org/officeDocument/2006/relationships" xmlns:p="http://schemas.openxmlformats.org/presentationml/2006/main">
   <p:cSld>
     <p:bg>
@@ -3063,7 +3880,7 @@
         <p:spPr>
           <a:xfrm>
             <a:off x="640080" y="411480"/>
-            <a:ext cx="10911535" cy="320040"/>
+            <a:ext cx="10911535" cy="400000"/>
           </a:xfrm>
           <a:prstGeom prst="rect">
             <a:avLst/>
@@ -3087,7 +3904,7 @@
                 <a:ea typeface="Arial" pitchFamily="34" charset="-122"/>
                 <a:cs typeface="Arial" pitchFamily="34" charset="-120"/>
               </a:rPr>
-              <a:t>WEEK 3  ·  Q&amp;A SUMMARY  ·  7 QUESTIONS</a:t>
+              <a:t>WEEK 3  ·  DIAGRAM</a:t>
             </a:r>
             <a:endParaRPr lang="en-US" sz="1200" dirty="0"/>
           </a:p>
@@ -3101,7 +3918,7 @@
         </p:nvSpPr>
         <p:spPr>
           <a:xfrm>
-            <a:off x="640080" y="822960"/>
+            <a:off x="640080" y="777240"/>
             <a:ext cx="10911535" cy="460080"/>
           </a:xfrm>
           <a:prstGeom prst="rect">
@@ -3126,7 +3943,7 @@
                 <a:ea typeface="Arial" pitchFamily="34" charset="-122"/>
                 <a:cs typeface="Arial" pitchFamily="34" charset="-120"/>
               </a:rPr>
-              <a:t>Q&amp;A Summary – Regression Models</a:t>
+              <a:t>How Linear Regression and Random Forest Structurally Differ</a:t>
             </a:r>
             <a:endParaRPr lang="en-US" sz="2200" dirty="0"/>
           </a:p>
@@ -3134,14 +3951,14 @@
       </p:sp>
       <p:sp>
         <p:nvSpPr>
-          <p:cNvPr id="4" name="Text 2"/>
-          <p:cNvSpPr/>
-          <p:nvPr/>
-        </p:nvSpPr>
-        <p:spPr>
-          <a:xfrm>
-            <a:off x="640080" y="1341120"/>
-            <a:ext cx="10911535" cy="274320"/>
+          <p:cNvPr id="4" name="FlowLabel"/>
+          <p:cNvSpPr/>
+          <p:nvPr/>
+        </p:nvSpPr>
+        <p:spPr>
+          <a:xfrm>
+            <a:off x="640080" y="1500000"/>
+            <a:ext cx="10911535" cy="228600"/>
           </a:xfrm>
           <a:prstGeom prst="rect">
             <a:avLst/>
@@ -3157,347 +3974,329 @@
               <a:buNone/>
             </a:pPr>
             <a:r>
-              <a:rPr lang="en-US" sz="1100" i="1" dirty="0">
-                <a:solidFill>
-                  <a:srgbClr val="8A98A3"/>
-                </a:solidFill>
-                <a:latin typeface="Arial" pitchFamily="34" charset="0"/>
-                <a:ea typeface="Arial" pitchFamily="34" charset="-122"/>
-                <a:cs typeface="Arial" pitchFamily="34" charset="-120"/>
-              </a:rPr>
-              <a:t>All questions are shown now — press → or click to reveal each answer in turn.</a:t>
-            </a:r>
-            <a:endParaRPr lang="en-US" sz="1100" dirty="0"/>
-          </a:p>
-        </p:txBody>
-      </p:sp>
-      <p:sp>
-        <p:nvSpPr>
-          <p:cNvPr id="9" name="HeaderQ"/>
-          <p:cNvSpPr/>
-          <p:nvPr/>
-        </p:nvSpPr>
-        <p:spPr>
-          <a:xfrm>
-            <a:off x="640080" y="1706880"/>
-            <a:ext cx="3962400" cy="265680"/>
-          </a:xfrm>
-          <a:prstGeom prst="rect">
-            <a:avLst/>
-          </a:prstGeom>
-          <a:noFill/>
-          <a:ln/>
-        </p:spPr>
-        <p:txBody>
-          <a:bodyPr wrap="square" lIns="0" tIns="0" rIns="0" bIns="0" rtlCol="0" anchor="ctr"/>
-          <a:lstStyle/>
-          <a:p>
-            <a:pPr marL="0" indent="0">
-              <a:buNone/>
-            </a:pPr>
-            <a:r>
-              <a:rPr lang="en-US" sz="1000" b="1" kern="0" spc="100" dirty="0">
-                <a:solidFill>
-                  <a:srgbClr val="8A98A3"/>
-                </a:solidFill>
-                <a:latin typeface="Arial" pitchFamily="34" charset="0"/>
-              </a:rPr>
-              <a:t>QUESTION</a:t>
-            </a:r>
-            <a:endParaRPr lang="en-US" sz="1000" dirty="0"/>
-          </a:p>
-        </p:txBody>
-      </p:sp>
-      <p:sp>
-        <p:nvSpPr>
-          <p:cNvPr id="10" name="HeaderA"/>
-          <p:cNvSpPr/>
-          <p:nvPr/>
-        </p:nvSpPr>
-        <p:spPr>
-          <a:xfrm>
-            <a:off x="4739640" y="1706880"/>
-            <a:ext cx="6811975" cy="265680"/>
-          </a:xfrm>
-          <a:prstGeom prst="rect">
-            <a:avLst/>
-          </a:prstGeom>
-          <a:noFill/>
-          <a:ln/>
-        </p:spPr>
-        <p:txBody>
-          <a:bodyPr wrap="square" lIns="0" tIns="0" rIns="0" bIns="0" rtlCol="0" anchor="ctr"/>
-          <a:lstStyle/>
-          <a:p>
-            <a:pPr marL="0" indent="0">
-              <a:buNone/>
-            </a:pPr>
-            <a:r>
-              <a:rPr lang="en-US" sz="1000" b="1" kern="0" spc="100" dirty="0">
-                <a:solidFill>
-                  <a:srgbClr val="8A98A3"/>
-                </a:solidFill>
-                <a:latin typeface="Arial" pitchFamily="34" charset="0"/>
-              </a:rPr>
-              <a:t>ANSWER  (click to reveal)</a:t>
-            </a:r>
-            <a:endParaRPr lang="en-US" sz="1000" dirty="0"/>
-          </a:p>
-        </p:txBody>
-      </p:sp>
-      <p:cxnSp>
-        <p:nvCxnSpPr>
-          <p:cNvPr id="11" name="Divider0"/>
-          <p:cNvCxnSpPr/>
-          <p:nvPr/>
-        </p:nvCxnSpPr>
-        <p:spPr>
-          <a:xfrm>
-            <a:off x="640080" y="1995420"/>
-            <a:ext cx="10911535" cy="0"/>
-          </a:xfrm>
-          <a:prstGeom prst="line">
-            <a:avLst/>
-          </a:prstGeom>
-          <a:ln w="9525">
-            <a:solidFill>
-              <a:srgbClr val="E1E7EA"/>
-            </a:solidFill>
-          </a:ln>
-        </p:spPr>
-      </p:cxnSp>
-      <p:sp>
-        <p:nvSpPr>
-          <p:cNvPr id="12" name="Row1Question"/>
-          <p:cNvSpPr/>
-          <p:nvPr/>
-        </p:nvSpPr>
-        <p:spPr>
-          <a:xfrm>
-            <a:off x="640080" y="2018280"/>
-            <a:ext cx="3962400" cy="590804"/>
-          </a:xfrm>
-          <a:prstGeom prst="rect">
-            <a:avLst/>
-          </a:prstGeom>
-          <a:noFill/>
-          <a:ln/>
-        </p:spPr>
-        <p:txBody>
-          <a:bodyPr wrap="square" lIns="0" tIns="45720" rIns="91440" bIns="45720" rtlCol="0" anchor="t"/>
-          <a:lstStyle/>
-          <a:p>
-            <a:pPr marL="0" indent="0" algn="l">
-              <a:lnSpc>
-                <a:spcPct val="112000"/>
-              </a:lnSpc>
-              <a:buNone/>
-            </a:pPr>
-            <a:r>
-              <a:rPr lang="en-US" sz="1100" b="1" dirty="0">
-                <a:solidFill>
-                  <a:srgbClr val="213541"/>
-                </a:solidFill>
-                <a:latin typeface="Arial" pitchFamily="34" charset="0"/>
-                <a:ea typeface="Arial" pitchFamily="34" charset="-122"/>
-                <a:cs typeface="Arial" pitchFamily="34" charset="-120"/>
-              </a:rPr>
-              <a:t>Why split train/test by time, not randomly?</a:t>
-            </a:r>
-            <a:endParaRPr lang="en-US" sz="1100" dirty="0"/>
-          </a:p>
-        </p:txBody>
-      </p:sp>
-      <p:sp>
-        <p:nvSpPr>
-          <p:cNvPr id="13" name="Row1Answer"/>
-          <p:cNvSpPr/>
-          <p:nvPr/>
-        </p:nvSpPr>
-        <p:spPr>
-          <a:xfrm>
-            <a:off x="4739640" y="2048760"/>
-            <a:ext cx="6811975" cy="529844"/>
+              <a:rPr lang="en-US" sz="1250" b="1" dirty="0">
+                <a:solidFill>
+                  <a:srgbClr val="00B8D9"/>
+                </a:solidFill>
+                <a:latin typeface="Arial" pitchFamily="34" charset="0"/>
+              </a:rPr>
+              <a:t>LINEAR REGRESSION</a:t>
+            </a:r>
+            <a:r>
+              <a:rPr lang="en-US" sz="1250" b="1" dirty="0">
+                <a:solidFill>
+                  <a:srgbClr val="213541"/>
+                </a:solidFill>
+                <a:latin typeface="Arial" pitchFamily="34" charset="0"/>
+              </a:rPr>
+              <a:t>  – fit independently for each of the 10 countries</a:t>
+            </a:r>
+            <a:endParaRPr lang="en-US" sz="1250" dirty="0"/>
+          </a:p>
+        </p:txBody>
+      </p:sp>
+      <p:sp>
+        <p:nvSpPr>
+          <p:cNvPr id="5" name="Box"/>
+          <p:cNvSpPr/>
+          <p:nvPr/>
+        </p:nvSpPr>
+        <p:spPr>
+          <a:xfrm>
+            <a:off x="640080" y="1808600"/>
+            <a:ext cx="3203845" cy="950000"/>
           </a:xfrm>
           <a:prstGeom prst="roundRect">
             <a:avLst>
-              <a:gd name="adj" fmla="val 8000"/>
+              <a:gd name="adj" fmla="val 6667"/>
             </a:avLst>
           </a:prstGeom>
           <a:solidFill>
             <a:srgbClr val="EAF9FB"/>
           </a:solidFill>
-          <a:ln>
-            <a:noFill/>
-          </a:ln>
-        </p:spPr>
-        <p:txBody>
-          <a:bodyPr wrap="square" lIns="137160" tIns="45720" rIns="137160" bIns="45720" rtlCol="0" anchor="t"/>
-          <a:lstStyle/>
-          <a:p>
-            <a:pPr marL="0" indent="0" algn="l">
-              <a:lnSpc>
-                <a:spcPct val="112000"/>
-              </a:lnSpc>
-              <a:buNone/>
-            </a:pPr>
-            <a:r>
-              <a:rPr lang="en-US" sz="1100" dirty="0">
-                <a:solidFill>
-                  <a:srgbClr val="213541"/>
-                </a:solidFill>
-                <a:latin typeface="Arial" pitchFamily="34" charset="0"/>
-                <a:ea typeface="Arial" pitchFamily="34" charset="-122"/>
-                <a:cs typeface="Arial" pitchFamily="34" charset="-120"/>
-              </a:rPr>
-              <a:t>A random split would leak future years into training — evaluation must mimic real deployment, past-only.</a:t>
-            </a:r>
-            <a:endParaRPr lang="en-US" sz="1100" dirty="0"/>
-          </a:p>
-        </p:txBody>
-      </p:sp>
-      <p:cxnSp>
-        <p:nvCxnSpPr>
-          <p:cNvPr id="14" name="Divider1"/>
-          <p:cNvCxnSpPr/>
-          <p:nvPr/>
-        </p:nvCxnSpPr>
-        <p:spPr>
-          <a:xfrm>
-            <a:off x="640080" y="2609084"/>
-            <a:ext cx="10911535" cy="0"/>
-          </a:xfrm>
-          <a:prstGeom prst="line">
-            <a:avLst/>
-          </a:prstGeom>
-          <a:ln w="9525">
+          <a:ln w="12700">
             <a:solidFill>
-              <a:srgbClr val="E1E7EA"/>
+              <a:srgbClr val="00B8D9"/>
             </a:solidFill>
           </a:ln>
         </p:spPr>
-      </p:cxnSp>
-      <p:sp>
-        <p:nvSpPr>
-          <p:cNvPr id="15" name="Row2Question"/>
-          <p:cNvSpPr/>
-          <p:nvPr/>
-        </p:nvSpPr>
-        <p:spPr>
-          <a:xfrm>
-            <a:off x="640080" y="2609084"/>
-            <a:ext cx="3962400" cy="590804"/>
-          </a:xfrm>
-          <a:prstGeom prst="rect">
+        <p:txBody>
+          <a:bodyPr wrap="square" lIns="45720" tIns="45720" rIns="45720" bIns="45720" rtlCol="0" anchor="ctr"/>
+          <a:lstStyle/>
+          <a:p>
+            <a:pPr marL="0" indent="0" algn="ctr">
+              <a:buNone/>
+            </a:pPr>
+            <a:r>
+              <a:rPr lang="en-US" sz="1300" b="1" dirty="0">
+                <a:solidFill>
+                  <a:srgbClr val="213541"/>
+                </a:solidFill>
+                <a:latin typeface="Arial" pitchFamily="34" charset="0"/>
+                <a:ea typeface="Arial" pitchFamily="34" charset="-122"/>
+                <a:cs typeface="Arial" pitchFamily="34" charset="-120"/>
+              </a:rPr>
+              <a:t>Engineered Features</a:t>
+            </a:r>
+            <a:endParaRPr lang="en-US" sz="1300" dirty="0"/>
+          </a:p>
+          <a:p>
+            <a:pPr marL="0" indent="0" algn="ctr">
+              <a:buNone/>
+            </a:pPr>
+            <a:r>
+              <a:rPr lang="en-US" sz="1050" b="0" i="1" dirty="0">
+                <a:solidFill>
+                  <a:srgbClr val="5B6B77"/>
+                </a:solidFill>
+                <a:latin typeface="Arial" pitchFamily="34" charset="0"/>
+                <a:ea typeface="Arial" pitchFamily="34" charset="-122"/>
+                <a:cs typeface="Arial" pitchFamily="34" charset="-120"/>
+              </a:rPr>
+              <a:t>6 columns · ~25 rows per country</a:t>
+            </a:r>
+            <a:endParaRPr lang="en-US" sz="1050" dirty="0"/>
+          </a:p>
+        </p:txBody>
+      </p:sp>
+      <p:sp>
+        <p:nvSpPr>
+          <p:cNvPr id="6" name="Arrow"/>
+          <p:cNvSpPr/>
+          <p:nvPr/>
+        </p:nvSpPr>
+        <p:spPr>
+          <a:xfrm>
+            <a:off x="3843925" y="2283600"/>
+            <a:ext cx="650000" cy="0"/>
+          </a:xfrm>
+          <a:prstGeom prst="line">
             <a:avLst/>
           </a:prstGeom>
           <a:noFill/>
-          <a:ln/>
-        </p:spPr>
-        <p:txBody>
-          <a:bodyPr wrap="square" lIns="0" tIns="45720" rIns="91440" bIns="45720" rtlCol="0" anchor="t"/>
-          <a:lstStyle/>
-          <a:p>
-            <a:pPr marL="0" indent="0" algn="l">
-              <a:lnSpc>
-                <a:spcPct val="112000"/>
-              </a:lnSpc>
-              <a:buNone/>
-            </a:pPr>
-            <a:r>
-              <a:rPr lang="en-US" sz="1100" b="1" dirty="0">
-                <a:solidFill>
-                  <a:srgbClr val="213541"/>
-                </a:solidFill>
-                <a:latin typeface="Arial" pitchFamily="34" charset="0"/>
-                <a:ea typeface="Arial" pitchFamily="34" charset="-122"/>
-                <a:cs typeface="Arial" pitchFamily="34" charset="-120"/>
-              </a:rPr>
-              <a:t>Why test on 2019–2023 specifically?</a:t>
-            </a:r>
-            <a:endParaRPr lang="en-US" sz="1100" dirty="0"/>
-          </a:p>
-        </p:txBody>
-      </p:sp>
-      <p:sp>
-        <p:nvSpPr>
-          <p:cNvPr id="16" name="Row2Answer"/>
-          <p:cNvSpPr/>
-          <p:nvPr/>
-        </p:nvSpPr>
-        <p:spPr>
-          <a:xfrm>
-            <a:off x="4739640" y="2639564"/>
-            <a:ext cx="6811975" cy="529844"/>
+          <a:ln w="22225">
+            <a:solidFill>
+              <a:srgbClr val="213541"/>
+            </a:solidFill>
+            <a:prstDash val="solid"/>
+            <a:tailEnd type="triangle"/>
+          </a:ln>
+        </p:spPr>
+        <p:txBody>
+          <a:bodyPr/>
+          <a:lstStyle/>
+          <a:p>
+            <a:endParaRPr lang="en-US"/>
+          </a:p>
+        </p:txBody>
+      </p:sp>
+      <p:sp>
+        <p:nvSpPr>
+          <p:cNvPr id="7" name="Box"/>
+          <p:cNvSpPr/>
+          <p:nvPr/>
+        </p:nvSpPr>
+        <p:spPr>
+          <a:xfrm>
+            <a:off x="4493925" y="1808600"/>
+            <a:ext cx="3203845" cy="950000"/>
           </a:xfrm>
           <a:prstGeom prst="roundRect">
             <a:avLst>
-              <a:gd name="adj" fmla="val 8000"/>
+              <a:gd name="adj" fmla="val 6667"/>
+            </a:avLst>
+          </a:prstGeom>
+          <a:solidFill>
+            <a:srgbClr val="213541"/>
+          </a:solidFill>
+          <a:ln/>
+        </p:spPr>
+        <p:txBody>
+          <a:bodyPr wrap="square" lIns="45720" tIns="45720" rIns="45720" bIns="45720" rtlCol="0" anchor="ctr"/>
+          <a:lstStyle/>
+          <a:p>
+            <a:pPr marL="0" indent="0" algn="ctr">
+              <a:buNone/>
+            </a:pPr>
+            <a:r>
+              <a:rPr lang="en-US" sz="1300" b="1" dirty="0">
+                <a:solidFill>
+                  <a:srgbClr val="FFFFFF"/>
+                </a:solidFill>
+                <a:latin typeface="Arial" pitchFamily="34" charset="0"/>
+                <a:ea typeface="Arial" pitchFamily="34" charset="-122"/>
+                <a:cs typeface="Arial" pitchFamily="34" charset="-120"/>
+              </a:rPr>
+              <a:t>Ordinary Least Squares</a:t>
+            </a:r>
+            <a:endParaRPr lang="en-US" sz="1300" dirty="0"/>
+          </a:p>
+          <a:p>
+            <a:pPr marL="0" indent="0" algn="ctr">
+              <a:buNone/>
+            </a:pPr>
+            <a:r>
+              <a:rPr lang="en-US" sz="1100" b="0" dirty="0">
+                <a:solidFill>
+                  <a:srgbClr val="FFFFFF"/>
+                </a:solidFill>
+                <a:latin typeface="Arial" pitchFamily="34" charset="0"/>
+                <a:ea typeface="Arial" pitchFamily="34" charset="-122"/>
+                <a:cs typeface="Arial" pitchFamily="34" charset="-120"/>
+              </a:rPr>
+              <a:t>β₀ + β₁x₁ + … + β₆x₆</a:t>
+            </a:r>
+            <a:endParaRPr lang="en-US" sz="1100" dirty="0"/>
+          </a:p>
+        </p:txBody>
+      </p:sp>
+      <p:sp>
+        <p:nvSpPr>
+          <p:cNvPr id="8" name="Arrow"/>
+          <p:cNvSpPr/>
+          <p:nvPr/>
+        </p:nvSpPr>
+        <p:spPr>
+          <a:xfrm>
+            <a:off x="7697770" y="2283600"/>
+            <a:ext cx="650000" cy="0"/>
+          </a:xfrm>
+          <a:prstGeom prst="line">
+            <a:avLst/>
+          </a:prstGeom>
+          <a:noFill/>
+          <a:ln w="22225">
+            <a:solidFill>
+              <a:srgbClr val="213541"/>
+            </a:solidFill>
+            <a:prstDash val="solid"/>
+            <a:tailEnd type="triangle"/>
+          </a:ln>
+        </p:spPr>
+        <p:txBody>
+          <a:bodyPr/>
+          <a:lstStyle/>
+          <a:p>
+            <a:endParaRPr lang="en-US"/>
+          </a:p>
+        </p:txBody>
+      </p:sp>
+      <p:sp>
+        <p:nvSpPr>
+          <p:cNvPr id="9" name="Box"/>
+          <p:cNvSpPr/>
+          <p:nvPr/>
+        </p:nvSpPr>
+        <p:spPr>
+          <a:xfrm>
+            <a:off x="8347770" y="1808600"/>
+            <a:ext cx="3203845" cy="950000"/>
+          </a:xfrm>
+          <a:prstGeom prst="roundRect">
+            <a:avLst>
+              <a:gd name="adj" fmla="val 6667"/>
             </a:avLst>
           </a:prstGeom>
           <a:solidFill>
             <a:srgbClr val="EAF9FB"/>
           </a:solidFill>
-          <a:ln>
-            <a:noFill/>
+          <a:ln w="12700">
+            <a:solidFill>
+              <a:srgbClr val="00B8D9"/>
+            </a:solidFill>
           </a:ln>
         </p:spPr>
         <p:txBody>
-          <a:bodyPr wrap="square" lIns="137160" tIns="45720" rIns="137160" bIns="45720" rtlCol="0" anchor="t"/>
+          <a:bodyPr wrap="square" lIns="45720" tIns="45720" rIns="45720" bIns="45720" rtlCol="0" anchor="ctr"/>
+          <a:lstStyle/>
+          <a:p>
+            <a:pPr marL="0" indent="0" algn="ctr">
+              <a:buNone/>
+            </a:pPr>
+            <a:r>
+              <a:rPr lang="en-US" sz="1300" b="1" dirty="0">
+                <a:solidFill>
+                  <a:srgbClr val="213541"/>
+                </a:solidFill>
+                <a:latin typeface="Arial" pitchFamily="34" charset="0"/>
+                <a:ea typeface="Arial" pitchFamily="34" charset="-122"/>
+                <a:cs typeface="Arial" pitchFamily="34" charset="-120"/>
+              </a:rPr>
+              <a:t>Prediction</a:t>
+            </a:r>
+            <a:endParaRPr lang="en-US" sz="1300" dirty="0"/>
+          </a:p>
+          <a:p>
+            <a:pPr marL="0" indent="0" algn="ctr">
+              <a:buNone/>
+            </a:pPr>
+            <a:r>
+              <a:rPr lang="en-US" sz="1050" b="0" i="1" dirty="0">
+                <a:solidFill>
+                  <a:srgbClr val="5B6B77"/>
+                </a:solidFill>
+                <a:latin typeface="Arial" pitchFamily="34" charset="0"/>
+                <a:ea typeface="Arial" pitchFamily="34" charset="-122"/>
+                <a:cs typeface="Arial" pitchFamily="34" charset="-120"/>
+              </a:rPr>
+              <a:t>next year's CO₂, per country</a:t>
+            </a:r>
+            <a:endParaRPr lang="en-US" sz="1050" dirty="0"/>
+          </a:p>
+        </p:txBody>
+      </p:sp>
+      <p:sp>
+        <p:nvSpPr>
+          <p:cNvPr id="10" name="Note"/>
+          <p:cNvSpPr/>
+          <p:nvPr/>
+        </p:nvSpPr>
+        <p:spPr>
+          <a:xfrm>
+            <a:off x="640080" y="2838600"/>
+            <a:ext cx="10911535" cy="400000"/>
+          </a:xfrm>
+          <a:prstGeom prst="rect">
+            <a:avLst/>
+          </a:prstGeom>
+          <a:noFill/>
+          <a:ln/>
+        </p:spPr>
+        <p:txBody>
+          <a:bodyPr wrap="square" lIns="0" tIns="0" rIns="0" bIns="0" rtlCol="0" anchor="t"/>
           <a:lstStyle/>
           <a:p>
             <a:pPr marL="0" indent="0" algn="l">
               <a:lnSpc>
-                <a:spcPct val="112000"/>
+                <a:spcPct val="118000"/>
               </a:lnSpc>
               <a:buNone/>
             </a:pPr>
             <a:r>
-              <a:rPr lang="en-US" sz="1100" dirty="0">
-                <a:solidFill>
-                  <a:srgbClr val="213541"/>
-                </a:solidFill>
-                <a:latin typeface="Arial" pitchFamily="34" charset="0"/>
-                <a:ea typeface="Arial" pitchFamily="34" charset="-122"/>
-                <a:cs typeface="Arial" pitchFamily="34" charset="-120"/>
-              </a:rPr>
-              <a:t>It includes the 2020 COVID dip and recovery — a genuine stress test, not just a window of “normal” years.</a:t>
-            </a:r>
-            <a:endParaRPr lang="en-US" sz="1100" dirty="0"/>
-          </a:p>
-        </p:txBody>
-      </p:sp>
-      <p:cxnSp>
-        <p:nvCxnSpPr>
-          <p:cNvPr id="17" name="Divider2"/>
-          <p:cNvCxnSpPr/>
-          <p:nvPr/>
-        </p:nvCxnSpPr>
-        <p:spPr>
-          <a:xfrm>
-            <a:off x="640080" y="3199888"/>
-            <a:ext cx="10911535" cy="0"/>
-          </a:xfrm>
-          <a:prstGeom prst="line">
-            <a:avLst/>
-          </a:prstGeom>
-          <a:ln w="9525">
-            <a:solidFill>
-              <a:srgbClr val="E1E7EA"/>
-            </a:solidFill>
-          </a:ln>
-        </p:spPr>
-      </p:cxnSp>
-      <p:sp>
-        <p:nvSpPr>
-          <p:cNvPr id="18" name="Row3Question"/>
-          <p:cNvSpPr/>
-          <p:nvPr/>
-        </p:nvSpPr>
-        <p:spPr>
-          <a:xfrm>
-            <a:off x="640080" y="3199888"/>
-            <a:ext cx="3962400" cy="590804"/>
+              <a:rPr lang="en-US" sz="1150" i="1" dirty="0">
+                <a:solidFill>
+                  <a:srgbClr val="5B6B77"/>
+                </a:solidFill>
+                <a:latin typeface="Arial" pitchFamily="34" charset="0"/>
+                <a:ea typeface="Arial" pitchFamily="34" charset="-122"/>
+                <a:cs typeface="Arial" pitchFamily="34" charset="-120"/>
+              </a:rPr>
+              <a:t>Coefficients are directly interpretable – but the fit can extrapolate without bound past the training range.</a:t>
+            </a:r>
+            <a:endParaRPr lang="en-US" sz="1150" dirty="0"/>
+          </a:p>
+        </p:txBody>
+      </p:sp>
+      <p:sp>
+        <p:nvSpPr>
+          <p:cNvPr id="11" name="FlowLabel"/>
+          <p:cNvSpPr/>
+          <p:nvPr/>
+        </p:nvSpPr>
+        <p:spPr>
+          <a:xfrm>
+            <a:off x="640080" y="3418640"/>
+            <a:ext cx="10911535" cy="228600"/>
           </a:xfrm>
           <a:prstGeom prst="rect">
             <a:avLst/>
@@ -3506,525 +4305,329 @@
           <a:ln/>
         </p:spPr>
         <p:txBody>
-          <a:bodyPr wrap="square" lIns="0" tIns="45720" rIns="91440" bIns="45720" rtlCol="0" anchor="t"/>
-          <a:lstStyle/>
-          <a:p>
-            <a:pPr marL="0" indent="0" algn="l">
-              <a:lnSpc>
-                <a:spcPct val="112000"/>
-              </a:lnSpc>
-              <a:buNone/>
-            </a:pPr>
-            <a:r>
-              <a:rPr lang="en-US" sz="1100" b="1" dirty="0">
-                <a:solidFill>
-                  <a:srgbClr val="213541"/>
-                </a:solidFill>
-                <a:latin typeface="Arial" pitchFamily="34" charset="0"/>
-                <a:ea typeface="Arial" pitchFamily="34" charset="-122"/>
-                <a:cs typeface="Arial" pitchFamily="34" charset="-120"/>
-              </a:rPr>
-              <a:t>Why bother with a naive baseline model?</a:t>
-            </a:r>
-            <a:endParaRPr lang="en-US" sz="1100" dirty="0"/>
-          </a:p>
-        </p:txBody>
-      </p:sp>
-      <p:sp>
-        <p:nvSpPr>
-          <p:cNvPr id="19" name="Row3Answer"/>
-          <p:cNvSpPr/>
-          <p:nvPr/>
-        </p:nvSpPr>
-        <p:spPr>
-          <a:xfrm>
-            <a:off x="4739640" y="3230368"/>
-            <a:ext cx="6811975" cy="529844"/>
+          <a:bodyPr wrap="square" lIns="0" tIns="0" rIns="0" bIns="0" rtlCol="0" anchor="ctr"/>
+          <a:lstStyle/>
+          <a:p>
+            <a:pPr marL="0" indent="0">
+              <a:buNone/>
+            </a:pPr>
+            <a:r>
+              <a:rPr lang="en-US" sz="1250" b="1" dirty="0">
+                <a:solidFill>
+                  <a:srgbClr val="00B8D9"/>
+                </a:solidFill>
+                <a:latin typeface="Arial" pitchFamily="34" charset="0"/>
+              </a:rPr>
+              <a:t>RANDOM FOREST</a:t>
+            </a:r>
+            <a:r>
+              <a:rPr lang="en-US" sz="1250" b="1" dirty="0">
+                <a:solidFill>
+                  <a:srgbClr val="213541"/>
+                </a:solidFill>
+                <a:latin typeface="Arial" pitchFamily="34" charset="0"/>
+              </a:rPr>
+              <a:t>  – pooled across all 10 countries into one shared forest</a:t>
+            </a:r>
+            <a:endParaRPr lang="en-US" sz="1250" dirty="0"/>
+          </a:p>
+        </p:txBody>
+      </p:sp>
+      <p:sp>
+        <p:nvSpPr>
+          <p:cNvPr id="12" name="Box"/>
+          <p:cNvSpPr/>
+          <p:nvPr/>
+        </p:nvSpPr>
+        <p:spPr>
+          <a:xfrm>
+            <a:off x="640080" y="3727240"/>
+            <a:ext cx="3203845" cy="950000"/>
           </a:xfrm>
           <a:prstGeom prst="roundRect">
             <a:avLst>
-              <a:gd name="adj" fmla="val 8000"/>
+              <a:gd name="adj" fmla="val 6667"/>
             </a:avLst>
           </a:prstGeom>
           <a:solidFill>
             <a:srgbClr val="EAF9FB"/>
           </a:solidFill>
-          <a:ln>
-            <a:noFill/>
-          </a:ln>
-        </p:spPr>
-        <p:txBody>
-          <a:bodyPr wrap="square" lIns="137160" tIns="45720" rIns="137160" bIns="45720" rtlCol="0" anchor="t"/>
-          <a:lstStyle/>
-          <a:p>
-            <a:pPr marL="0" indent="0" algn="l">
-              <a:lnSpc>
-                <a:spcPct val="112000"/>
-              </a:lnSpc>
-              <a:buNone/>
-            </a:pPr>
-            <a:r>
-              <a:rPr lang="en-US" sz="1100" dirty="0">
-                <a:solidFill>
-                  <a:srgbClr val="213541"/>
-                </a:solidFill>
-                <a:latin typeface="Arial" pitchFamily="34" charset="0"/>
-                <a:ea typeface="Arial" pitchFamily="34" charset="-122"/>
-                <a:cs typeface="Arial" pitchFamily="34" charset="-120"/>
-              </a:rPr>
-              <a:t>It's a floor — any real model that can't beat “repeat last year's value” isn't adding value.</a:t>
-            </a:r>
-            <a:endParaRPr lang="en-US" sz="1100" dirty="0"/>
-          </a:p>
-        </p:txBody>
-      </p:sp>
-      <p:cxnSp>
-        <p:nvCxnSpPr>
-          <p:cNvPr id="20" name="Divider3"/>
-          <p:cNvCxnSpPr/>
-          <p:nvPr/>
-        </p:nvCxnSpPr>
-        <p:spPr>
-          <a:xfrm>
-            <a:off x="640080" y="3790692"/>
-            <a:ext cx="10911535" cy="0"/>
-          </a:xfrm>
-          <a:prstGeom prst="line">
-            <a:avLst/>
-          </a:prstGeom>
-          <a:ln w="9525">
+          <a:ln w="12700">
             <a:solidFill>
-              <a:srgbClr val="E1E7EA"/>
+              <a:srgbClr val="00B8D9"/>
             </a:solidFill>
           </a:ln>
         </p:spPr>
-      </p:cxnSp>
-      <p:sp>
-        <p:nvSpPr>
-          <p:cNvPr id="21" name="Row4Question"/>
-          <p:cNvSpPr/>
-          <p:nvPr/>
-        </p:nvSpPr>
-        <p:spPr>
-          <a:xfrm>
-            <a:off x="640080" y="3790692"/>
-            <a:ext cx="3962400" cy="590804"/>
-          </a:xfrm>
-          <a:prstGeom prst="rect">
+        <p:txBody>
+          <a:bodyPr wrap="square" lIns="45720" tIns="45720" rIns="45720" bIns="45720" rtlCol="0" anchor="ctr"/>
+          <a:lstStyle/>
+          <a:p>
+            <a:pPr marL="0" indent="0" algn="ctr">
+              <a:buNone/>
+            </a:pPr>
+            <a:r>
+              <a:rPr lang="en-US" sz="1300" b="1" dirty="0">
+                <a:solidFill>
+                  <a:srgbClr val="213541"/>
+                </a:solidFill>
+                <a:latin typeface="Arial" pitchFamily="34" charset="0"/>
+                <a:ea typeface="Arial" pitchFamily="34" charset="-122"/>
+                <a:cs typeface="Arial" pitchFamily="34" charset="-120"/>
+              </a:rPr>
+              <a:t>Pooled Features</a:t>
+            </a:r>
+            <a:endParaRPr lang="en-US" sz="1300" dirty="0"/>
+          </a:p>
+          <a:p>
+            <a:pPr marL="0" indent="0" algn="ctr">
+              <a:buNone/>
+            </a:pPr>
+            <a:r>
+              <a:rPr lang="en-US" sz="1050" b="0" i="1" dirty="0">
+                <a:solidFill>
+                  <a:srgbClr val="5B6B77"/>
+                </a:solidFill>
+                <a:latin typeface="Arial" pitchFamily="34" charset="0"/>
+                <a:ea typeface="Arial" pitchFamily="34" charset="-122"/>
+                <a:cs typeface="Arial" pitchFamily="34" charset="-120"/>
+              </a:rPr>
+              <a:t>+ country_encoded · ~250 rows total</a:t>
+            </a:r>
+            <a:endParaRPr lang="en-US" sz="1050" dirty="0"/>
+          </a:p>
+        </p:txBody>
+      </p:sp>
+      <p:sp>
+        <p:nvSpPr>
+          <p:cNvPr id="13" name="Arrow"/>
+          <p:cNvSpPr/>
+          <p:nvPr/>
+        </p:nvSpPr>
+        <p:spPr>
+          <a:xfrm>
+            <a:off x="3843925" y="4202240"/>
+            <a:ext cx="650000" cy="0"/>
+          </a:xfrm>
+          <a:prstGeom prst="line">
             <a:avLst/>
           </a:prstGeom>
           <a:noFill/>
-          <a:ln/>
-        </p:spPr>
-        <p:txBody>
-          <a:bodyPr wrap="square" lIns="0" tIns="45720" rIns="91440" bIns="45720" rtlCol="0" anchor="t"/>
-          <a:lstStyle/>
-          <a:p>
-            <a:pPr marL="0" indent="0" algn="l">
-              <a:lnSpc>
-                <a:spcPct val="112000"/>
-              </a:lnSpc>
-              <a:buNone/>
-            </a:pPr>
-            <a:r>
-              <a:rPr lang="en-US" sz="1100" b="1" dirty="0">
-                <a:solidFill>
-                  <a:srgbClr val="213541"/>
-                </a:solidFill>
-                <a:latin typeface="Arial" pitchFamily="34" charset="0"/>
-                <a:ea typeface="Arial" pitchFamily="34" charset="-122"/>
-                <a:cs typeface="Arial" pitchFamily="34" charset="-120"/>
-              </a:rPr>
-              <a:t>Which model won the 10-country comparison?</a:t>
-            </a:r>
-            <a:endParaRPr lang="en-US" sz="1100" dirty="0"/>
-          </a:p>
-        </p:txBody>
-      </p:sp>
-      <p:sp>
-        <p:nvSpPr>
-          <p:cNvPr id="22" name="Row4Answer"/>
-          <p:cNvSpPr/>
-          <p:nvPr/>
-        </p:nvSpPr>
-        <p:spPr>
-          <a:xfrm>
-            <a:off x="4739640" y="3821172"/>
-            <a:ext cx="6811975" cy="529844"/>
+          <a:ln w="22225">
+            <a:solidFill>
+              <a:srgbClr val="213541"/>
+            </a:solidFill>
+            <a:prstDash val="solid"/>
+            <a:tailEnd type="triangle"/>
+          </a:ln>
+        </p:spPr>
+        <p:txBody>
+          <a:bodyPr/>
+          <a:lstStyle/>
+          <a:p>
+            <a:endParaRPr lang="en-US"/>
+          </a:p>
+        </p:txBody>
+      </p:sp>
+      <p:sp>
+        <p:nvSpPr>
+          <p:cNvPr id="14" name="Box"/>
+          <p:cNvSpPr/>
+          <p:nvPr/>
+        </p:nvSpPr>
+        <p:spPr>
+          <a:xfrm>
+            <a:off x="4493925" y="3727240"/>
+            <a:ext cx="3203845" cy="950000"/>
           </a:xfrm>
           <a:prstGeom prst="roundRect">
             <a:avLst>
-              <a:gd name="adj" fmla="val 8000"/>
+              <a:gd name="adj" fmla="val 6667"/>
+            </a:avLst>
+          </a:prstGeom>
+          <a:solidFill>
+            <a:srgbClr val="213541"/>
+          </a:solidFill>
+          <a:ln/>
+        </p:spPr>
+        <p:txBody>
+          <a:bodyPr wrap="square" lIns="45720" tIns="45720" rIns="45720" bIns="45720" rtlCol="0" anchor="ctr"/>
+          <a:lstStyle/>
+          <a:p>
+            <a:pPr marL="0" indent="0" algn="ctr">
+              <a:buNone/>
+            </a:pPr>
+            <a:r>
+              <a:rPr lang="en-US" sz="1300" b="1" dirty="0">
+                <a:solidFill>
+                  <a:srgbClr val="FFFFFF"/>
+                </a:solidFill>
+                <a:latin typeface="Arial" pitchFamily="34" charset="0"/>
+                <a:ea typeface="Arial" pitchFamily="34" charset="-122"/>
+                <a:cs typeface="Arial" pitchFamily="34" charset="-120"/>
+              </a:rPr>
+              <a:t>100 Trees</a:t>
+            </a:r>
+            <a:endParaRPr lang="en-US" sz="1300" dirty="0"/>
+          </a:p>
+          <a:p>
+            <a:pPr marL="0" indent="0" algn="ctr">
+              <a:buNone/>
+            </a:pPr>
+            <a:r>
+              <a:rPr lang="en-US" sz="1100" b="0" dirty="0">
+                <a:solidFill>
+                  <a:srgbClr val="FFFFFF"/>
+                </a:solidFill>
+                <a:latin typeface="Arial" pitchFamily="34" charset="0"/>
+                <a:ea typeface="Arial" pitchFamily="34" charset="-122"/>
+                <a:cs typeface="Arial" pitchFamily="34" charset="-120"/>
+              </a:rPr>
+              <a:t>bagging + random feature subsets</a:t>
+            </a:r>
+            <a:endParaRPr lang="en-US" sz="1100" dirty="0"/>
+          </a:p>
+        </p:txBody>
+      </p:sp>
+      <p:sp>
+        <p:nvSpPr>
+          <p:cNvPr id="15" name="Arrow"/>
+          <p:cNvSpPr/>
+          <p:nvPr/>
+        </p:nvSpPr>
+        <p:spPr>
+          <a:xfrm>
+            <a:off x="7697770" y="4202240"/>
+            <a:ext cx="650000" cy="0"/>
+          </a:xfrm>
+          <a:prstGeom prst="line">
+            <a:avLst/>
+          </a:prstGeom>
+          <a:noFill/>
+          <a:ln w="22225">
+            <a:solidFill>
+              <a:srgbClr val="213541"/>
+            </a:solidFill>
+            <a:prstDash val="solid"/>
+            <a:tailEnd type="triangle"/>
+          </a:ln>
+        </p:spPr>
+        <p:txBody>
+          <a:bodyPr/>
+          <a:lstStyle/>
+          <a:p>
+            <a:endParaRPr lang="en-US"/>
+          </a:p>
+        </p:txBody>
+      </p:sp>
+      <p:sp>
+        <p:nvSpPr>
+          <p:cNvPr id="16" name="Box"/>
+          <p:cNvSpPr/>
+          <p:nvPr/>
+        </p:nvSpPr>
+        <p:spPr>
+          <a:xfrm>
+            <a:off x="8347770" y="3727240"/>
+            <a:ext cx="3203845" cy="950000"/>
+          </a:xfrm>
+          <a:prstGeom prst="roundRect">
+            <a:avLst>
+              <a:gd name="adj" fmla="val 6667"/>
             </a:avLst>
           </a:prstGeom>
           <a:solidFill>
             <a:srgbClr val="EAF9FB"/>
           </a:solidFill>
-          <a:ln>
-            <a:noFill/>
+          <a:ln w="12700">
+            <a:solidFill>
+              <a:srgbClr val="00B8D9"/>
+            </a:solidFill>
           </a:ln>
         </p:spPr>
         <p:txBody>
-          <a:bodyPr wrap="square" lIns="137160" tIns="45720" rIns="137160" bIns="45720" rtlCol="0" anchor="t"/>
+          <a:bodyPr wrap="square" lIns="45720" tIns="45720" rIns="45720" bIns="45720" rtlCol="0" anchor="ctr"/>
+          <a:lstStyle/>
+          <a:p>
+            <a:pPr marL="0" indent="0" algn="ctr">
+              <a:buNone/>
+            </a:pPr>
+            <a:r>
+              <a:rPr lang="en-US" sz="1300" b="1" dirty="0">
+                <a:solidFill>
+                  <a:srgbClr val="213541"/>
+                </a:solidFill>
+                <a:latin typeface="Arial" pitchFamily="34" charset="0"/>
+                <a:ea typeface="Arial" pitchFamily="34" charset="-122"/>
+                <a:cs typeface="Arial" pitchFamily="34" charset="-120"/>
+              </a:rPr>
+              <a:t>Prediction</a:t>
+            </a:r>
+            <a:endParaRPr lang="en-US" sz="1300" dirty="0"/>
+          </a:p>
+          <a:p>
+            <a:pPr marL="0" indent="0" algn="ctr">
+              <a:buNone/>
+            </a:pPr>
+            <a:r>
+              <a:rPr lang="en-US" sz="1050" b="0" i="1" dirty="0">
+                <a:solidFill>
+                  <a:srgbClr val="5B6B77"/>
+                </a:solidFill>
+                <a:latin typeface="Arial" pitchFamily="34" charset="0"/>
+                <a:ea typeface="Arial" pitchFamily="34" charset="-122"/>
+                <a:cs typeface="Arial" pitchFamily="34" charset="-120"/>
+              </a:rPr>
+              <a:t>averaged across all trees</a:t>
+            </a:r>
+            <a:endParaRPr lang="en-US" sz="1050" dirty="0"/>
+          </a:p>
+        </p:txBody>
+      </p:sp>
+      <p:sp>
+        <p:nvSpPr>
+          <p:cNvPr id="17" name="Note"/>
+          <p:cNvSpPr/>
+          <p:nvPr/>
+        </p:nvSpPr>
+        <p:spPr>
+          <a:xfrm>
+            <a:off x="640080" y="4757240"/>
+            <a:ext cx="10911535" cy="400000"/>
+          </a:xfrm>
+          <a:prstGeom prst="rect">
+            <a:avLst/>
+          </a:prstGeom>
+          <a:noFill/>
+          <a:ln/>
+        </p:spPr>
+        <p:txBody>
+          <a:bodyPr wrap="square" lIns="0" tIns="0" rIns="0" bIns="0" rtlCol="0" anchor="t"/>
           <a:lstStyle/>
           <a:p>
             <a:pPr marL="0" indent="0" algn="l">
               <a:lnSpc>
-                <a:spcPct val="112000"/>
+                <a:spcPct val="118000"/>
               </a:lnSpc>
               <a:buNone/>
             </a:pPr>
             <a:r>
-              <a:rPr lang="en-US" sz="1100" dirty="0">
-                <a:solidFill>
-                  <a:srgbClr val="213541"/>
-                </a:solidFill>
-                <a:latin typeface="Arial" pitchFamily="34" charset="0"/>
-                <a:ea typeface="Arial" pitchFamily="34" charset="-122"/>
-                <a:cs typeface="Arial" pitchFamily="34" charset="-120"/>
-              </a:rPr>
-              <a:t>No single model wins across all 10 — each country's trend differs; the exercise is about methodology, not a leaderboard.</a:t>
-            </a:r>
-            <a:endParaRPr lang="en-US" sz="1100" dirty="0"/>
-          </a:p>
-        </p:txBody>
-      </p:sp>
-      <p:cxnSp>
-        <p:nvCxnSpPr>
-          <p:cNvPr id="23" name="Divider4"/>
-          <p:cNvCxnSpPr/>
-          <p:nvPr/>
-        </p:nvCxnSpPr>
-        <p:spPr>
-          <a:xfrm>
-            <a:off x="640080" y="4381496"/>
-            <a:ext cx="10911535" cy="0"/>
-          </a:xfrm>
-          <a:prstGeom prst="line">
-            <a:avLst/>
-          </a:prstGeom>
-          <a:ln w="9525">
-            <a:solidFill>
-              <a:srgbClr val="E1E7EA"/>
-            </a:solidFill>
-          </a:ln>
-        </p:spPr>
-      </p:cxnSp>
-      <p:sp>
-        <p:nvSpPr>
-          <p:cNvPr id="24" name="Row5Question"/>
-          <p:cNvSpPr/>
-          <p:nvPr/>
-        </p:nvSpPr>
-        <p:spPr>
-          <a:xfrm>
-            <a:off x="640080" y="4381496"/>
-            <a:ext cx="3962400" cy="590804"/>
-          </a:xfrm>
-          <a:prstGeom prst="rect">
-            <a:avLst/>
-          </a:prstGeom>
-          <a:noFill/>
-          <a:ln/>
-        </p:spPr>
-        <p:txBody>
-          <a:bodyPr wrap="square" lIns="0" tIns="45720" rIns="91440" bIns="45720" rtlCol="0" anchor="t"/>
-          <a:lstStyle/>
-          <a:p>
-            <a:pPr marL="0" indent="0" algn="l">
-              <a:lnSpc>
-                <a:spcPct val="112000"/>
-              </a:lnSpc>
-              <a:buNone/>
-            </a:pPr>
-            <a:r>
-              <a:rPr lang="en-US" sz="1100" b="1" dirty="0">
-                <a:solidFill>
-                  <a:srgbClr val="213541"/>
-                </a:solidFill>
-                <a:latin typeface="Arial" pitchFamily="34" charset="0"/>
-                <a:ea typeface="Arial" pitchFamily="34" charset="-122"/>
-                <a:cs typeface="Arial" pitchFamily="34" charset="-120"/>
-              </a:rPr>
-              <a:t>Why is Linear Regression per-country but Random Forest pooled?</a:t>
-            </a:r>
-            <a:endParaRPr lang="en-US" sz="1100" dirty="0"/>
-          </a:p>
-        </p:txBody>
-      </p:sp>
-      <p:sp>
-        <p:nvSpPr>
-          <p:cNvPr id="25" name="Row5Answer"/>
-          <p:cNvSpPr/>
-          <p:nvPr/>
-        </p:nvSpPr>
-        <p:spPr>
-          <a:xfrm>
-            <a:off x="4739640" y="4411976"/>
-            <a:ext cx="6811975" cy="529844"/>
-          </a:xfrm>
-          <a:prstGeom prst="roundRect">
-            <a:avLst>
-              <a:gd name="adj" fmla="val 8000"/>
-            </a:avLst>
-          </a:prstGeom>
-          <a:solidFill>
-            <a:srgbClr val="EAF9FB"/>
-          </a:solidFill>
-          <a:ln>
-            <a:noFill/>
-          </a:ln>
-        </p:spPr>
-        <p:txBody>
-          <a:bodyPr wrap="square" lIns="137160" tIns="45720" rIns="137160" bIns="45720" rtlCol="0" anchor="t"/>
-          <a:lstStyle/>
-          <a:p>
-            <a:pPr marL="0" indent="0" algn="l">
-              <a:lnSpc>
-                <a:spcPct val="112000"/>
-              </a:lnSpc>
-              <a:buNone/>
-            </a:pPr>
-            <a:r>
-              <a:rPr lang="en-US" sz="1100" dirty="0">
-                <a:solidFill>
-                  <a:srgbClr val="213541"/>
-                </a:solidFill>
-                <a:latin typeface="Arial" pitchFamily="34" charset="0"/>
-                <a:ea typeface="Arial" pitchFamily="34" charset="-122"/>
-                <a:cs typeface="Arial" pitchFamily="34" charset="-120"/>
-              </a:rPr>
-              <a:t>~25 rows/country is enough for a 6-feature linear fit but nowhere near enough for a 100-tree ensemble.</a:t>
-            </a:r>
-            <a:endParaRPr lang="en-US" sz="1100" dirty="0"/>
-          </a:p>
-        </p:txBody>
-      </p:sp>
-      <p:cxnSp>
-        <p:nvCxnSpPr>
-          <p:cNvPr id="26" name="Divider5"/>
-          <p:cNvCxnSpPr/>
-          <p:nvPr/>
-        </p:nvCxnSpPr>
-        <p:spPr>
-          <a:xfrm>
-            <a:off x="640080" y="4972300"/>
-            <a:ext cx="10911535" cy="0"/>
-          </a:xfrm>
-          <a:prstGeom prst="line">
-            <a:avLst/>
-          </a:prstGeom>
-          <a:ln w="9525">
-            <a:solidFill>
-              <a:srgbClr val="E1E7EA"/>
-            </a:solidFill>
-          </a:ln>
-        </p:spPr>
-      </p:cxnSp>
-      <p:sp>
-        <p:nvSpPr>
-          <p:cNvPr id="27" name="Row6Question"/>
-          <p:cNvSpPr/>
-          <p:nvPr/>
-        </p:nvSpPr>
-        <p:spPr>
-          <a:xfrm>
-            <a:off x="640080" y="4972300"/>
-            <a:ext cx="3962400" cy="590804"/>
-          </a:xfrm>
-          <a:prstGeom prst="rect">
-            <a:avLst/>
-          </a:prstGeom>
-          <a:noFill/>
-          <a:ln/>
-        </p:spPr>
-        <p:txBody>
-          <a:bodyPr wrap="square" lIns="0" tIns="45720" rIns="91440" bIns="45720" rtlCol="0" anchor="t"/>
-          <a:lstStyle/>
-          <a:p>
-            <a:pPr marL="0" indent="0" algn="l">
-              <a:lnSpc>
-                <a:spcPct val="112000"/>
-              </a:lnSpc>
-              <a:buNone/>
-            </a:pPr>
-            <a:r>
-              <a:rPr lang="en-US" sz="1100" b="1" dirty="0">
-                <a:solidFill>
-                  <a:srgbClr val="213541"/>
-                </a:solidFill>
-                <a:latin typeface="Arial" pitchFamily="34" charset="0"/>
-                <a:ea typeface="Arial" pitchFamily="34" charset="-122"/>
-                <a:cs typeface="Arial" pitchFamily="34" charset="-120"/>
-              </a:rPr>
-              <a:t>What happens training RF per country on ~25 rows?</a:t>
-            </a:r>
-            <a:endParaRPr lang="en-US" sz="1100" dirty="0"/>
-          </a:p>
-        </p:txBody>
-      </p:sp>
-      <p:sp>
-        <p:nvSpPr>
-          <p:cNvPr id="28" name="Row6Answer"/>
-          <p:cNvSpPr/>
-          <p:nvPr/>
-        </p:nvSpPr>
-        <p:spPr>
-          <a:xfrm>
-            <a:off x="4739640" y="5002780"/>
-            <a:ext cx="6811975" cy="529844"/>
-          </a:xfrm>
-          <a:prstGeom prst="roundRect">
-            <a:avLst>
-              <a:gd name="adj" fmla="val 8000"/>
-            </a:avLst>
-          </a:prstGeom>
-          <a:solidFill>
-            <a:srgbClr val="EAF9FB"/>
-          </a:solidFill>
-          <a:ln>
-            <a:noFill/>
-          </a:ln>
-        </p:spPr>
-        <p:txBody>
-          <a:bodyPr wrap="square" lIns="137160" tIns="45720" rIns="137160" bIns="45720" rtlCol="0" anchor="t"/>
-          <a:lstStyle/>
-          <a:p>
-            <a:pPr marL="0" indent="0" algn="l">
-              <a:lnSpc>
-                <a:spcPct val="112000"/>
-              </a:lnSpc>
-              <a:buNone/>
-            </a:pPr>
-            <a:r>
-              <a:rPr lang="en-US" sz="1100" dirty="0">
-                <a:solidFill>
-                  <a:srgbClr val="213541"/>
-                </a:solidFill>
-                <a:latin typeface="Arial" pitchFamily="34" charset="0"/>
-                <a:ea typeface="Arial" pitchFamily="34" charset="-122"/>
-                <a:cs typeface="Arial" pitchFamily="34" charset="-120"/>
-              </a:rPr>
-              <a:t>It underperforms the naive baseline for most countries — memorizes noise instead of a generalizable pattern.</a:t>
-            </a:r>
-            <a:endParaRPr lang="en-US" sz="1100" dirty="0"/>
-          </a:p>
-        </p:txBody>
-      </p:sp>
-      <p:cxnSp>
-        <p:nvCxnSpPr>
-          <p:cNvPr id="29" name="Divider6"/>
-          <p:cNvCxnSpPr/>
-          <p:nvPr/>
-        </p:nvCxnSpPr>
-        <p:spPr>
-          <a:xfrm>
-            <a:off x="640080" y="5563104"/>
-            <a:ext cx="10911535" cy="0"/>
-          </a:xfrm>
-          <a:prstGeom prst="line">
-            <a:avLst/>
-          </a:prstGeom>
-          <a:ln w="9525">
-            <a:solidFill>
-              <a:srgbClr val="E1E7EA"/>
-            </a:solidFill>
-          </a:ln>
-        </p:spPr>
-      </p:cxnSp>
-      <p:sp>
-        <p:nvSpPr>
-          <p:cNvPr id="30" name="Row7Question"/>
-          <p:cNvSpPr/>
-          <p:nvPr/>
-        </p:nvSpPr>
-        <p:spPr>
-          <a:xfrm>
-            <a:off x="640080" y="5563104"/>
-            <a:ext cx="3962400" cy="590804"/>
-          </a:xfrm>
-          <a:prstGeom prst="rect">
-            <a:avLst/>
-          </a:prstGeom>
-          <a:noFill/>
-          <a:ln/>
-        </p:spPr>
-        <p:txBody>
-          <a:bodyPr wrap="square" lIns="0" tIns="45720" rIns="91440" bIns="45720" rtlCol="0" anchor="t"/>
-          <a:lstStyle/>
-          <a:p>
-            <a:pPr marL="0" indent="0" algn="l">
-              <a:lnSpc>
-                <a:spcPct val="112000"/>
-              </a:lnSpc>
-              <a:buNone/>
-            </a:pPr>
-            <a:r>
-              <a:rPr lang="en-US" sz="1100" b="1" dirty="0">
-                <a:solidFill>
-                  <a:srgbClr val="213541"/>
-                </a:solidFill>
-                <a:latin typeface="Arial" pitchFamily="34" charset="0"/>
-                <a:ea typeface="Arial" pitchFamily="34" charset="-122"/>
-                <a:cs typeface="Arial" pitchFamily="34" charset="-120"/>
-              </a:rPr>
-              <a:t>Does pooling RF across all 10 countries fix that?</a:t>
-            </a:r>
-            <a:endParaRPr lang="en-US" sz="1100" dirty="0"/>
-          </a:p>
-        </p:txBody>
-      </p:sp>
-      <p:sp>
-        <p:nvSpPr>
-          <p:cNvPr id="31" name="Row7Answer"/>
-          <p:cNvSpPr/>
-          <p:nvPr/>
-        </p:nvSpPr>
-        <p:spPr>
-          <a:xfrm>
-            <a:off x="4739640" y="5593584"/>
-            <a:ext cx="6811975" cy="529844"/>
-          </a:xfrm>
-          <a:prstGeom prst="roundRect">
-            <a:avLst>
-              <a:gd name="adj" fmla="val 8000"/>
-            </a:avLst>
-          </a:prstGeom>
-          <a:solidFill>
-            <a:srgbClr val="EAF9FB"/>
-          </a:solidFill>
-          <a:ln>
-            <a:noFill/>
-          </a:ln>
-        </p:spPr>
-        <p:txBody>
-          <a:bodyPr wrap="square" lIns="137160" tIns="45720" rIns="137160" bIns="45720" rtlCol="0" anchor="t"/>
-          <a:lstStyle/>
-          <a:p>
-            <a:pPr marL="0" indent="0" algn="l">
-              <a:lnSpc>
-                <a:spcPct val="112000"/>
-              </a:lnSpc>
-              <a:buNone/>
-            </a:pPr>
-            <a:r>
-              <a:rPr lang="en-US" sz="1100" dirty="0">
-                <a:solidFill>
-                  <a:srgbClr val="213541"/>
-                </a:solidFill>
-                <a:latin typeface="Arial" pitchFamily="34" charset="0"/>
-                <a:ea typeface="Arial" pitchFamily="34" charset="-122"/>
-                <a:cs typeface="Arial" pitchFamily="34" charset="-120"/>
-              </a:rPr>
-              <a:t>Only partly — it still trails on several countries, since mixing very different trajectories costs country-specific structure.</a:t>
-            </a:r>
-            <a:endParaRPr lang="en-US" sz="1100" dirty="0"/>
+              <a:rPr lang="en-US" sz="1150" i="1" dirty="0">
+                <a:solidFill>
+                  <a:srgbClr val="5B6B77"/>
+                </a:solidFill>
+                <a:latin typeface="Arial" pitchFamily="34" charset="0"/>
+                <a:ea typeface="Arial" pitchFamily="34" charset="-122"/>
+                <a:cs typeface="Arial" pitchFamily="34" charset="-120"/>
+              </a:rPr>
+              <a:t>Predictions are bounded by the training range – this is why pooled Random Forest, not Linear Regression, drives the Week 3 recursive forecast.</a:t>
+            </a:r>
+            <a:endParaRPr lang="en-US" sz="1150" dirty="0"/>
           </a:p>
         </p:txBody>
       </p:sp>
       <p:pic>
         <p:nvPicPr>
-          <p:cNvPr id="6" name="Image 0" descr="logo_small.png"/>
+          <p:cNvPr id="18" name="Image 0" descr="logo_small.png"/>
           <p:cNvPicPr>
             <a:picLocks noChangeAspect="1"/>
           </p:cNvPicPr>
@@ -4048,7 +4651,7 @@
       </p:pic>
       <p:sp>
         <p:nvSpPr>
-          <p:cNvPr id="7" name="Text 4"/>
+          <p:cNvPr id="19" name="Text 16"/>
           <p:cNvSpPr/>
           <p:nvPr/>
         </p:nvSpPr>
@@ -4087,7 +4690,7 @@
       </p:sp>
       <p:sp>
         <p:nvSpPr>
-          <p:cNvPr id="8" name="Text 5"/>
+          <p:cNvPr id="20" name="Text 17"/>
           <p:cNvSpPr/>
           <p:nvPr/>
         </p:nvSpPr>
@@ -4118,7 +4721,1114 @@
                 <a:ea typeface="Arial" pitchFamily="34" charset="-122"/>
                 <a:cs typeface="Arial"/>
               </a:rPr>
-              <a:t>Page 10 of 17</a:t>
+              <a:t>Page 11 of 19</a:t>
+            </a:r>
+            <a:endParaRPr lang="en-US" sz="900" dirty="0">
+              <a:solidFill>
+                <a:srgbClr val="8A98A3"/>
+              </a:solidFill>
+              <a:latin typeface="Arial"/>
+              <a:cs typeface="Arial"/>
+            </a:endParaRPr>
+          </a:p>
+        </p:txBody>
+      </p:sp>
+    </p:spTree>
+  </p:cSld>
+  <p:clrMapOvr>
+    <a:masterClrMapping/>
+  </p:clrMapOvr>
+</p:sld>
+</file>
+
+<file path=ppt/slides/slide12.xml><?xml version="1.0" encoding="utf-8"?>
+<p:sld xmlns:a="http://schemas.openxmlformats.org/drawingml/2006/main" xmlns:r="http://schemas.openxmlformats.org/officeDocument/2006/relationships" xmlns:p="http://schemas.openxmlformats.org/presentationml/2006/main">
+  <p:cSld>
+    <p:bg>
+      <p:bgPr>
+        <a:solidFill>
+          <a:srgbClr val="FFFFFF"/>
+        </a:solidFill>
+        <a:effectLst/>
+      </p:bgPr>
+    </p:bg>
+    <p:spTree>
+      <p:nvGrpSpPr>
+        <p:cNvPr id="1" name=""/>
+        <p:cNvGrpSpPr/>
+        <p:nvPr/>
+      </p:nvGrpSpPr>
+      <p:grpSpPr>
+        <a:xfrm>
+          <a:off x="0" y="0"/>
+          <a:ext cx="0" cy="0"/>
+          <a:chOff x="0" y="0"/>
+          <a:chExt cx="0" cy="0"/>
+        </a:xfrm>
+      </p:grpSpPr>
+      <p:sp>
+        <p:nvSpPr>
+          <p:cNvPr id="2" name="Text 0"/>
+          <p:cNvSpPr/>
+          <p:nvPr/>
+        </p:nvSpPr>
+        <p:spPr>
+          <a:xfrm>
+            <a:off x="640080" y="411480"/>
+            <a:ext cx="10911535" cy="320040"/>
+          </a:xfrm>
+          <a:prstGeom prst="rect">
+            <a:avLst/>
+          </a:prstGeom>
+          <a:noFill/>
+          <a:ln/>
+        </p:spPr>
+        <p:txBody>
+          <a:bodyPr wrap="square" lIns="0" tIns="0" rIns="0" bIns="0" rtlCol="0" anchor="ctr"/>
+          <a:lstStyle/>
+          <a:p>
+            <a:pPr marL="0" indent="0">
+              <a:buNone/>
+            </a:pPr>
+            <a:r>
+              <a:rPr lang="en-US" sz="1200" b="1" kern="0" spc="150" dirty="0">
+                <a:solidFill>
+                  <a:srgbClr val="00B8D9"/>
+                </a:solidFill>
+                <a:latin typeface="Arial" pitchFamily="34" charset="0"/>
+                <a:ea typeface="Arial" pitchFamily="34" charset="-122"/>
+                <a:cs typeface="Arial" pitchFamily="34" charset="-120"/>
+              </a:rPr>
+              <a:t>WEEK 3  ·  Q&amp;A SUMMARY  ·  7 QUESTIONS</a:t>
+            </a:r>
+            <a:endParaRPr lang="en-US" sz="1200" dirty="0"/>
+          </a:p>
+        </p:txBody>
+      </p:sp>
+      <p:sp>
+        <p:nvSpPr>
+          <p:cNvPr id="3" name="Text 1"/>
+          <p:cNvSpPr/>
+          <p:nvPr/>
+        </p:nvSpPr>
+        <p:spPr>
+          <a:xfrm>
+            <a:off x="640080" y="822960"/>
+            <a:ext cx="10911535" cy="460080"/>
+          </a:xfrm>
+          <a:prstGeom prst="rect">
+            <a:avLst/>
+          </a:prstGeom>
+          <a:noFill/>
+          <a:ln/>
+        </p:spPr>
+        <p:txBody>
+          <a:bodyPr wrap="square" lIns="0" tIns="0" rIns="0" bIns="0" rtlCol="0" anchor="t"/>
+          <a:lstStyle/>
+          <a:p>
+            <a:pPr marL="0" indent="0" algn="l">
+              <a:buNone/>
+            </a:pPr>
+            <a:r>
+              <a:rPr lang="en-US" sz="2200" b="1" dirty="0">
+                <a:solidFill>
+                  <a:srgbClr val="213541"/>
+                </a:solidFill>
+                <a:latin typeface="Arial" pitchFamily="34" charset="0"/>
+                <a:ea typeface="Arial" pitchFamily="34" charset="-122"/>
+                <a:cs typeface="Arial" pitchFamily="34" charset="-120"/>
+              </a:rPr>
+              <a:t>Q&amp;A Summary – Regression Models</a:t>
+            </a:r>
+            <a:endParaRPr lang="en-US" sz="2200" dirty="0"/>
+          </a:p>
+        </p:txBody>
+      </p:sp>
+      <p:sp>
+        <p:nvSpPr>
+          <p:cNvPr id="4" name="Text 2"/>
+          <p:cNvSpPr/>
+          <p:nvPr/>
+        </p:nvSpPr>
+        <p:spPr>
+          <a:xfrm>
+            <a:off x="640080" y="1341120"/>
+            <a:ext cx="10911535" cy="274320"/>
+          </a:xfrm>
+          <a:prstGeom prst="rect">
+            <a:avLst/>
+          </a:prstGeom>
+          <a:noFill/>
+          <a:ln/>
+        </p:spPr>
+        <p:txBody>
+          <a:bodyPr wrap="square" lIns="0" tIns="0" rIns="0" bIns="0" rtlCol="0" anchor="ctr"/>
+          <a:lstStyle/>
+          <a:p>
+            <a:pPr marL="0" indent="0">
+              <a:buNone/>
+            </a:pPr>
+            <a:r>
+              <a:rPr lang="en-US" sz="1100" i="1" dirty="0">
+                <a:solidFill>
+                  <a:srgbClr val="8A98A3"/>
+                </a:solidFill>
+                <a:latin typeface="Arial" pitchFamily="34" charset="0"/>
+                <a:ea typeface="Arial" pitchFamily="34" charset="-122"/>
+                <a:cs typeface="Arial" pitchFamily="34" charset="-120"/>
+              </a:rPr>
+              <a:t>All questions are shown now – press → or click to reveal each answer in turn.</a:t>
+            </a:r>
+            <a:endParaRPr lang="en-US" sz="1100" dirty="0"/>
+          </a:p>
+        </p:txBody>
+      </p:sp>
+      <p:sp>
+        <p:nvSpPr>
+          <p:cNvPr id="9" name="HeaderQ"/>
+          <p:cNvSpPr/>
+          <p:nvPr/>
+        </p:nvSpPr>
+        <p:spPr>
+          <a:xfrm>
+            <a:off x="640080" y="1706880"/>
+            <a:ext cx="3962400" cy="265680"/>
+          </a:xfrm>
+          <a:prstGeom prst="rect">
+            <a:avLst/>
+          </a:prstGeom>
+          <a:noFill/>
+          <a:ln/>
+        </p:spPr>
+        <p:txBody>
+          <a:bodyPr wrap="square" lIns="0" tIns="0" rIns="0" bIns="0" rtlCol="0" anchor="ctr"/>
+          <a:lstStyle/>
+          <a:p>
+            <a:pPr marL="0" indent="0">
+              <a:buNone/>
+            </a:pPr>
+            <a:r>
+              <a:rPr lang="en-US" sz="1000" b="1" kern="0" spc="100" dirty="0">
+                <a:solidFill>
+                  <a:srgbClr val="8A98A3"/>
+                </a:solidFill>
+                <a:latin typeface="Arial" pitchFamily="34" charset="0"/>
+              </a:rPr>
+              <a:t>QUESTION</a:t>
+            </a:r>
+            <a:endParaRPr lang="en-US" sz="1000" dirty="0"/>
+          </a:p>
+        </p:txBody>
+      </p:sp>
+      <p:sp>
+        <p:nvSpPr>
+          <p:cNvPr id="10" name="HeaderA"/>
+          <p:cNvSpPr/>
+          <p:nvPr/>
+        </p:nvSpPr>
+        <p:spPr>
+          <a:xfrm>
+            <a:off x="4739640" y="1706880"/>
+            <a:ext cx="6811975" cy="265680"/>
+          </a:xfrm>
+          <a:prstGeom prst="rect">
+            <a:avLst/>
+          </a:prstGeom>
+          <a:noFill/>
+          <a:ln/>
+        </p:spPr>
+        <p:txBody>
+          <a:bodyPr wrap="square" lIns="0" tIns="0" rIns="0" bIns="0" rtlCol="0" anchor="ctr"/>
+          <a:lstStyle/>
+          <a:p>
+            <a:pPr marL="0" indent="0">
+              <a:buNone/>
+            </a:pPr>
+            <a:r>
+              <a:rPr lang="en-US" sz="1000" b="1" kern="0" spc="100" dirty="0">
+                <a:solidFill>
+                  <a:srgbClr val="8A98A3"/>
+                </a:solidFill>
+                <a:latin typeface="Arial" pitchFamily="34" charset="0"/>
+              </a:rPr>
+              <a:t>ANSWER  (click to reveal)</a:t>
+            </a:r>
+            <a:endParaRPr lang="en-US" sz="1000" dirty="0"/>
+          </a:p>
+        </p:txBody>
+      </p:sp>
+      <p:cxnSp>
+        <p:nvCxnSpPr>
+          <p:cNvPr id="11" name="Divider0"/>
+          <p:cNvCxnSpPr/>
+          <p:nvPr/>
+        </p:nvCxnSpPr>
+        <p:spPr>
+          <a:xfrm>
+            <a:off x="640080" y="1995420"/>
+            <a:ext cx="10911535" cy="0"/>
+          </a:xfrm>
+          <a:prstGeom prst="line">
+            <a:avLst/>
+          </a:prstGeom>
+          <a:ln w="9525">
+            <a:solidFill>
+              <a:srgbClr val="E1E7EA"/>
+            </a:solidFill>
+          </a:ln>
+        </p:spPr>
+      </p:cxnSp>
+      <p:sp>
+        <p:nvSpPr>
+          <p:cNvPr id="12" name="Row1Question"/>
+          <p:cNvSpPr/>
+          <p:nvPr/>
+        </p:nvSpPr>
+        <p:spPr>
+          <a:xfrm>
+            <a:off x="640080" y="2018280"/>
+            <a:ext cx="3962400" cy="590804"/>
+          </a:xfrm>
+          <a:prstGeom prst="rect">
+            <a:avLst/>
+          </a:prstGeom>
+          <a:noFill/>
+          <a:ln/>
+        </p:spPr>
+        <p:txBody>
+          <a:bodyPr wrap="square" lIns="0" tIns="45720" rIns="91440" bIns="45720" rtlCol="0" anchor="t"/>
+          <a:lstStyle/>
+          <a:p>
+            <a:pPr marL="0" indent="0" algn="l">
+              <a:lnSpc>
+                <a:spcPct val="112000"/>
+              </a:lnSpc>
+              <a:buNone/>
+            </a:pPr>
+            <a:r>
+              <a:rPr lang="en-US" sz="1100" b="1" dirty="0">
+                <a:solidFill>
+                  <a:srgbClr val="213541"/>
+                </a:solidFill>
+                <a:latin typeface="Arial" pitchFamily="34" charset="0"/>
+                <a:ea typeface="Arial" pitchFamily="34" charset="-122"/>
+                <a:cs typeface="Arial" pitchFamily="34" charset="-120"/>
+              </a:rPr>
+              <a:t>Why split train/test by time, not randomly?</a:t>
+            </a:r>
+            <a:endParaRPr lang="en-US" sz="1100" dirty="0"/>
+          </a:p>
+        </p:txBody>
+      </p:sp>
+      <p:sp>
+        <p:nvSpPr>
+          <p:cNvPr id="13" name="Row1Answer"/>
+          <p:cNvSpPr/>
+          <p:nvPr/>
+        </p:nvSpPr>
+        <p:spPr>
+          <a:xfrm>
+            <a:off x="4739640" y="2048760"/>
+            <a:ext cx="6811975" cy="529844"/>
+          </a:xfrm>
+          <a:prstGeom prst="roundRect">
+            <a:avLst>
+              <a:gd name="adj" fmla="val 8000"/>
+            </a:avLst>
+          </a:prstGeom>
+          <a:solidFill>
+            <a:srgbClr val="EAF9FB"/>
+          </a:solidFill>
+          <a:ln>
+            <a:noFill/>
+          </a:ln>
+        </p:spPr>
+        <p:txBody>
+          <a:bodyPr wrap="square" lIns="137160" tIns="45720" rIns="137160" bIns="45720" rtlCol="0" anchor="t"/>
+          <a:lstStyle/>
+          <a:p>
+            <a:pPr>
+              <a:lnSpc>
+                <a:spcPct val="112000"/>
+              </a:lnSpc>
+            </a:pPr>
+            <a:r>
+              <a:rPr lang="en-US" sz="1100" dirty="0">
+                <a:solidFill>
+                  <a:srgbClr val="213541"/>
+                </a:solidFill>
+                <a:latin typeface="Arial" pitchFamily="34" charset="0"/>
+                <a:ea typeface="Arial" pitchFamily="34" charset="-122"/>
+                <a:cs typeface="Arial" pitchFamily="34" charset="-120"/>
+              </a:rPr>
+              <a:t>A random split would leak future years into training (e.g., train on 2022, test on 2020), which produces an unrealistically optimistic evaluation. Real forecasting should only ever have access to the past.</a:t>
+            </a:r>
+            <a:endParaRPr lang="en-US" sz="1100" dirty="0"/>
+          </a:p>
+        </p:txBody>
+      </p:sp>
+      <p:cxnSp>
+        <p:nvCxnSpPr>
+          <p:cNvPr id="14" name="Divider1"/>
+          <p:cNvCxnSpPr/>
+          <p:nvPr/>
+        </p:nvCxnSpPr>
+        <p:spPr>
+          <a:xfrm>
+            <a:off x="640080" y="2609084"/>
+            <a:ext cx="10911535" cy="0"/>
+          </a:xfrm>
+          <a:prstGeom prst="line">
+            <a:avLst/>
+          </a:prstGeom>
+          <a:ln w="9525">
+            <a:solidFill>
+              <a:srgbClr val="E1E7EA"/>
+            </a:solidFill>
+          </a:ln>
+        </p:spPr>
+      </p:cxnSp>
+      <p:sp>
+        <p:nvSpPr>
+          <p:cNvPr id="15" name="Row2Question"/>
+          <p:cNvSpPr/>
+          <p:nvPr/>
+        </p:nvSpPr>
+        <p:spPr>
+          <a:xfrm>
+            <a:off x="640080" y="2609084"/>
+            <a:ext cx="3962400" cy="590804"/>
+          </a:xfrm>
+          <a:prstGeom prst="rect">
+            <a:avLst/>
+          </a:prstGeom>
+          <a:noFill/>
+          <a:ln/>
+        </p:spPr>
+        <p:txBody>
+          <a:bodyPr wrap="square" lIns="0" tIns="45720" rIns="91440" bIns="45720" rtlCol="0" anchor="t"/>
+          <a:lstStyle/>
+          <a:p>
+            <a:pPr marL="0" indent="0" algn="l">
+              <a:lnSpc>
+                <a:spcPct val="112000"/>
+              </a:lnSpc>
+              <a:buNone/>
+            </a:pPr>
+            <a:r>
+              <a:rPr lang="en-US" sz="1100" b="1" dirty="0">
+                <a:solidFill>
+                  <a:srgbClr val="213541"/>
+                </a:solidFill>
+                <a:latin typeface="Arial" pitchFamily="34" charset="0"/>
+                <a:ea typeface="Arial" pitchFamily="34" charset="-122"/>
+                <a:cs typeface="Arial" pitchFamily="34" charset="-120"/>
+              </a:rPr>
+              <a:t>Why test on 2019–2023 specifically?</a:t>
+            </a:r>
+            <a:endParaRPr lang="en-US" sz="1100" dirty="0"/>
+          </a:p>
+        </p:txBody>
+      </p:sp>
+      <p:sp>
+        <p:nvSpPr>
+          <p:cNvPr id="16" name="Row2Answer"/>
+          <p:cNvSpPr/>
+          <p:nvPr/>
+        </p:nvSpPr>
+        <p:spPr>
+          <a:xfrm>
+            <a:off x="4739640" y="2639564"/>
+            <a:ext cx="6811975" cy="529844"/>
+          </a:xfrm>
+          <a:prstGeom prst="roundRect">
+            <a:avLst>
+              <a:gd name="adj" fmla="val 8000"/>
+            </a:avLst>
+          </a:prstGeom>
+          <a:solidFill>
+            <a:srgbClr val="EAF9FB"/>
+          </a:solidFill>
+          <a:ln>
+            <a:noFill/>
+          </a:ln>
+        </p:spPr>
+        <p:txBody>
+          <a:bodyPr wrap="square" lIns="137160" tIns="45720" rIns="137160" bIns="45720" rtlCol="0" anchor="t"/>
+          <a:lstStyle/>
+          <a:p>
+            <a:pPr marL="0" indent="0" algn="l">
+              <a:lnSpc>
+                <a:spcPct val="112000"/>
+              </a:lnSpc>
+              <a:buNone/>
+            </a:pPr>
+            <a:r>
+              <a:rPr lang="en-US" sz="1100" dirty="0">
+                <a:solidFill>
+                  <a:srgbClr val="213541"/>
+                </a:solidFill>
+                <a:latin typeface="Arial" pitchFamily="34" charset="0"/>
+                <a:ea typeface="Arial" pitchFamily="34" charset="-122"/>
+                <a:cs typeface="Arial" pitchFamily="34" charset="-120"/>
+              </a:rPr>
+              <a:t>It includes the 2020 COVID dip and recovery – a genuine stress test, not just a window of “normal” years.</a:t>
+            </a:r>
+            <a:endParaRPr lang="en-US" sz="1100" dirty="0"/>
+          </a:p>
+        </p:txBody>
+      </p:sp>
+      <p:cxnSp>
+        <p:nvCxnSpPr>
+          <p:cNvPr id="17" name="Divider2"/>
+          <p:cNvCxnSpPr/>
+          <p:nvPr/>
+        </p:nvCxnSpPr>
+        <p:spPr>
+          <a:xfrm>
+            <a:off x="640080" y="3199888"/>
+            <a:ext cx="10911535" cy="0"/>
+          </a:xfrm>
+          <a:prstGeom prst="line">
+            <a:avLst/>
+          </a:prstGeom>
+          <a:ln w="9525">
+            <a:solidFill>
+              <a:srgbClr val="E1E7EA"/>
+            </a:solidFill>
+          </a:ln>
+        </p:spPr>
+      </p:cxnSp>
+      <p:sp>
+        <p:nvSpPr>
+          <p:cNvPr id="18" name="Row3Question"/>
+          <p:cNvSpPr/>
+          <p:nvPr/>
+        </p:nvSpPr>
+        <p:spPr>
+          <a:xfrm>
+            <a:off x="640080" y="3199888"/>
+            <a:ext cx="3962400" cy="590804"/>
+          </a:xfrm>
+          <a:prstGeom prst="rect">
+            <a:avLst/>
+          </a:prstGeom>
+          <a:noFill/>
+          <a:ln/>
+        </p:spPr>
+        <p:txBody>
+          <a:bodyPr wrap="square" lIns="0" tIns="45720" rIns="91440" bIns="45720" rtlCol="0" anchor="t"/>
+          <a:lstStyle/>
+          <a:p>
+            <a:pPr marL="0" indent="0" algn="l">
+              <a:lnSpc>
+                <a:spcPct val="112000"/>
+              </a:lnSpc>
+              <a:buNone/>
+            </a:pPr>
+            <a:r>
+              <a:rPr lang="en-US" sz="1100" b="1" dirty="0">
+                <a:solidFill>
+                  <a:srgbClr val="213541"/>
+                </a:solidFill>
+                <a:latin typeface="Arial" pitchFamily="34" charset="0"/>
+                <a:ea typeface="Arial" pitchFamily="34" charset="-122"/>
+                <a:cs typeface="Arial" pitchFamily="34" charset="-120"/>
+              </a:rPr>
+              <a:t>Why bother with a naive baseline model?</a:t>
+            </a:r>
+            <a:endParaRPr lang="en-US" sz="1100" dirty="0"/>
+          </a:p>
+        </p:txBody>
+      </p:sp>
+      <p:sp>
+        <p:nvSpPr>
+          <p:cNvPr id="19" name="Row3Answer"/>
+          <p:cNvSpPr/>
+          <p:nvPr/>
+        </p:nvSpPr>
+        <p:spPr>
+          <a:xfrm>
+            <a:off x="4739640" y="3230368"/>
+            <a:ext cx="6811975" cy="529844"/>
+          </a:xfrm>
+          <a:prstGeom prst="roundRect">
+            <a:avLst>
+              <a:gd name="adj" fmla="val 8000"/>
+            </a:avLst>
+          </a:prstGeom>
+          <a:solidFill>
+            <a:srgbClr val="EAF9FB"/>
+          </a:solidFill>
+          <a:ln>
+            <a:noFill/>
+          </a:ln>
+        </p:spPr>
+        <p:txBody>
+          <a:bodyPr wrap="square" lIns="137160" tIns="45720" rIns="137160" bIns="45720" rtlCol="0" anchor="t"/>
+          <a:lstStyle/>
+          <a:p>
+            <a:pPr marL="0" indent="0" algn="l">
+              <a:lnSpc>
+                <a:spcPct val="112000"/>
+              </a:lnSpc>
+              <a:buNone/>
+            </a:pPr>
+            <a:r>
+              <a:rPr lang="en-US" sz="1100" dirty="0">
+                <a:solidFill>
+                  <a:srgbClr val="213541"/>
+                </a:solidFill>
+                <a:latin typeface="Arial" pitchFamily="34" charset="0"/>
+                <a:ea typeface="Arial" pitchFamily="34" charset="-122"/>
+                <a:cs typeface="Arial" pitchFamily="34" charset="-120"/>
+              </a:rPr>
+              <a:t>It's a floor – any real model that can't beat “repeat last year's value” isn't adding value.</a:t>
+            </a:r>
+            <a:endParaRPr lang="en-US" sz="1100" dirty="0"/>
+          </a:p>
+        </p:txBody>
+      </p:sp>
+      <p:cxnSp>
+        <p:nvCxnSpPr>
+          <p:cNvPr id="20" name="Divider3"/>
+          <p:cNvCxnSpPr/>
+          <p:nvPr/>
+        </p:nvCxnSpPr>
+        <p:spPr>
+          <a:xfrm>
+            <a:off x="640080" y="3790692"/>
+            <a:ext cx="10911535" cy="0"/>
+          </a:xfrm>
+          <a:prstGeom prst="line">
+            <a:avLst/>
+          </a:prstGeom>
+          <a:ln w="9525">
+            <a:solidFill>
+              <a:srgbClr val="E1E7EA"/>
+            </a:solidFill>
+          </a:ln>
+        </p:spPr>
+      </p:cxnSp>
+      <p:sp>
+        <p:nvSpPr>
+          <p:cNvPr id="21" name="Row4Question"/>
+          <p:cNvSpPr/>
+          <p:nvPr/>
+        </p:nvSpPr>
+        <p:spPr>
+          <a:xfrm>
+            <a:off x="640080" y="3790692"/>
+            <a:ext cx="3962400" cy="590804"/>
+          </a:xfrm>
+          <a:prstGeom prst="rect">
+            <a:avLst/>
+          </a:prstGeom>
+          <a:noFill/>
+          <a:ln/>
+        </p:spPr>
+        <p:txBody>
+          <a:bodyPr wrap="square" lIns="0" tIns="45720" rIns="91440" bIns="45720" rtlCol="0" anchor="t"/>
+          <a:lstStyle/>
+          <a:p>
+            <a:pPr marL="0" indent="0" algn="l">
+              <a:lnSpc>
+                <a:spcPct val="112000"/>
+              </a:lnSpc>
+              <a:buNone/>
+            </a:pPr>
+            <a:r>
+              <a:rPr lang="en-US" sz="1100" b="1" dirty="0">
+                <a:solidFill>
+                  <a:srgbClr val="213541"/>
+                </a:solidFill>
+                <a:latin typeface="Arial" pitchFamily="34" charset="0"/>
+                <a:ea typeface="Arial" pitchFamily="34" charset="-122"/>
+                <a:cs typeface="Arial" pitchFamily="34" charset="-120"/>
+              </a:rPr>
+              <a:t>Which model won the 10-country comparison?</a:t>
+            </a:r>
+            <a:endParaRPr lang="en-US" sz="1100" dirty="0"/>
+          </a:p>
+        </p:txBody>
+      </p:sp>
+      <p:sp>
+        <p:nvSpPr>
+          <p:cNvPr id="22" name="Row4Answer"/>
+          <p:cNvSpPr/>
+          <p:nvPr/>
+        </p:nvSpPr>
+        <p:spPr>
+          <a:xfrm>
+            <a:off x="4739640" y="3821172"/>
+            <a:ext cx="6811975" cy="529844"/>
+          </a:xfrm>
+          <a:prstGeom prst="roundRect">
+            <a:avLst>
+              <a:gd name="adj" fmla="val 8000"/>
+            </a:avLst>
+          </a:prstGeom>
+          <a:solidFill>
+            <a:srgbClr val="EAF9FB"/>
+          </a:solidFill>
+          <a:ln>
+            <a:noFill/>
+          </a:ln>
+        </p:spPr>
+        <p:txBody>
+          <a:bodyPr wrap="square" lIns="137160" tIns="45720" rIns="137160" bIns="45720" rtlCol="0" anchor="t"/>
+          <a:lstStyle/>
+          <a:p>
+            <a:pPr marL="0" indent="0" algn="l">
+              <a:lnSpc>
+                <a:spcPct val="112000"/>
+              </a:lnSpc>
+              <a:buNone/>
+            </a:pPr>
+            <a:r>
+              <a:rPr lang="en-US" sz="1100" dirty="0">
+                <a:solidFill>
+                  <a:srgbClr val="213541"/>
+                </a:solidFill>
+                <a:latin typeface="Arial" pitchFamily="34" charset="0"/>
+                <a:ea typeface="Arial" pitchFamily="34" charset="-122"/>
+                <a:cs typeface="Arial" pitchFamily="34" charset="-120"/>
+              </a:rPr>
+              <a:t>No single model wins across all 10 – each country's trend differs; the exercise is about methodology, not a leaderboard.</a:t>
+            </a:r>
+            <a:endParaRPr lang="en-US" sz="1100" dirty="0"/>
+          </a:p>
+        </p:txBody>
+      </p:sp>
+      <p:cxnSp>
+        <p:nvCxnSpPr>
+          <p:cNvPr id="23" name="Divider4"/>
+          <p:cNvCxnSpPr/>
+          <p:nvPr/>
+        </p:nvCxnSpPr>
+        <p:spPr>
+          <a:xfrm>
+            <a:off x="640080" y="4381496"/>
+            <a:ext cx="10911535" cy="0"/>
+          </a:xfrm>
+          <a:prstGeom prst="line">
+            <a:avLst/>
+          </a:prstGeom>
+          <a:ln w="9525">
+            <a:solidFill>
+              <a:srgbClr val="E1E7EA"/>
+            </a:solidFill>
+          </a:ln>
+        </p:spPr>
+      </p:cxnSp>
+      <p:sp>
+        <p:nvSpPr>
+          <p:cNvPr id="24" name="Row5Question"/>
+          <p:cNvSpPr/>
+          <p:nvPr/>
+        </p:nvSpPr>
+        <p:spPr>
+          <a:xfrm>
+            <a:off x="640080" y="4381496"/>
+            <a:ext cx="3962400" cy="590804"/>
+          </a:xfrm>
+          <a:prstGeom prst="rect">
+            <a:avLst/>
+          </a:prstGeom>
+          <a:noFill/>
+          <a:ln/>
+        </p:spPr>
+        <p:txBody>
+          <a:bodyPr wrap="square" lIns="0" tIns="45720" rIns="91440" bIns="45720" rtlCol="0" anchor="t"/>
+          <a:lstStyle/>
+          <a:p>
+            <a:pPr marL="0" indent="0" algn="l">
+              <a:lnSpc>
+                <a:spcPct val="112000"/>
+              </a:lnSpc>
+              <a:buNone/>
+            </a:pPr>
+            <a:r>
+              <a:rPr lang="en-US" sz="1100" b="1" dirty="0">
+                <a:solidFill>
+                  <a:srgbClr val="213541"/>
+                </a:solidFill>
+                <a:latin typeface="Arial" pitchFamily="34" charset="0"/>
+                <a:ea typeface="Arial" pitchFamily="34" charset="-122"/>
+                <a:cs typeface="Arial" pitchFamily="34" charset="-120"/>
+              </a:rPr>
+              <a:t>Why is Linear Regression per-country but Random Forest pooled?</a:t>
+            </a:r>
+            <a:endParaRPr lang="en-US" sz="1100" dirty="0"/>
+          </a:p>
+        </p:txBody>
+      </p:sp>
+      <p:sp>
+        <p:nvSpPr>
+          <p:cNvPr id="25" name="Row5Answer"/>
+          <p:cNvSpPr/>
+          <p:nvPr/>
+        </p:nvSpPr>
+        <p:spPr>
+          <a:xfrm>
+            <a:off x="4739640" y="4411976"/>
+            <a:ext cx="6811975" cy="529844"/>
+          </a:xfrm>
+          <a:prstGeom prst="roundRect">
+            <a:avLst>
+              <a:gd name="adj" fmla="val 8000"/>
+            </a:avLst>
+          </a:prstGeom>
+          <a:solidFill>
+            <a:srgbClr val="EAF9FB"/>
+          </a:solidFill>
+          <a:ln>
+            <a:noFill/>
+          </a:ln>
+        </p:spPr>
+        <p:txBody>
+          <a:bodyPr wrap="square" lIns="137160" tIns="45720" rIns="137160" bIns="45720" rtlCol="0" anchor="t"/>
+          <a:lstStyle/>
+          <a:p>
+            <a:pPr marL="0" indent="0" algn="l">
+              <a:lnSpc>
+                <a:spcPct val="112000"/>
+              </a:lnSpc>
+              <a:buNone/>
+            </a:pPr>
+            <a:r>
+              <a:rPr lang="en-US" sz="1100" dirty="0">
+                <a:solidFill>
+                  <a:srgbClr val="213541"/>
+                </a:solidFill>
+                <a:latin typeface="Arial" pitchFamily="34" charset="0"/>
+                <a:ea typeface="Arial" pitchFamily="34" charset="-122"/>
+                <a:cs typeface="Arial" pitchFamily="34" charset="-120"/>
+              </a:rPr>
+              <a:t>~25 rows/country is enough for a 6-feature linear fit but nowhere near enough for a 100-tree ensemble.</a:t>
+            </a:r>
+            <a:endParaRPr lang="en-US" sz="1100" dirty="0"/>
+          </a:p>
+        </p:txBody>
+      </p:sp>
+      <p:cxnSp>
+        <p:nvCxnSpPr>
+          <p:cNvPr id="26" name="Divider5"/>
+          <p:cNvCxnSpPr/>
+          <p:nvPr/>
+        </p:nvCxnSpPr>
+        <p:spPr>
+          <a:xfrm>
+            <a:off x="640080" y="4972300"/>
+            <a:ext cx="10911535" cy="0"/>
+          </a:xfrm>
+          <a:prstGeom prst="line">
+            <a:avLst/>
+          </a:prstGeom>
+          <a:ln w="9525">
+            <a:solidFill>
+              <a:srgbClr val="E1E7EA"/>
+            </a:solidFill>
+          </a:ln>
+        </p:spPr>
+      </p:cxnSp>
+      <p:sp>
+        <p:nvSpPr>
+          <p:cNvPr id="27" name="Row6Question"/>
+          <p:cNvSpPr/>
+          <p:nvPr/>
+        </p:nvSpPr>
+        <p:spPr>
+          <a:xfrm>
+            <a:off x="640080" y="4972300"/>
+            <a:ext cx="3962400" cy="590804"/>
+          </a:xfrm>
+          <a:prstGeom prst="rect">
+            <a:avLst/>
+          </a:prstGeom>
+          <a:noFill/>
+          <a:ln/>
+        </p:spPr>
+        <p:txBody>
+          <a:bodyPr wrap="square" lIns="0" tIns="45720" rIns="91440" bIns="45720" rtlCol="0" anchor="t"/>
+          <a:lstStyle/>
+          <a:p>
+            <a:pPr marL="0" indent="0" algn="l">
+              <a:lnSpc>
+                <a:spcPct val="112000"/>
+              </a:lnSpc>
+              <a:buNone/>
+            </a:pPr>
+            <a:r>
+              <a:rPr lang="en-US" sz="1100" b="1" dirty="0">
+                <a:solidFill>
+                  <a:srgbClr val="213541"/>
+                </a:solidFill>
+                <a:latin typeface="Arial" pitchFamily="34" charset="0"/>
+                <a:ea typeface="Arial" pitchFamily="34" charset="-122"/>
+                <a:cs typeface="Arial" pitchFamily="34" charset="-120"/>
+              </a:rPr>
+              <a:t>What happens training RF per country on ~25 rows?</a:t>
+            </a:r>
+            <a:endParaRPr lang="en-US" sz="1100" dirty="0"/>
+          </a:p>
+        </p:txBody>
+      </p:sp>
+      <p:sp>
+        <p:nvSpPr>
+          <p:cNvPr id="28" name="Row6Answer"/>
+          <p:cNvSpPr/>
+          <p:nvPr/>
+        </p:nvSpPr>
+        <p:spPr>
+          <a:xfrm>
+            <a:off x="4739640" y="5002780"/>
+            <a:ext cx="6811975" cy="529844"/>
+          </a:xfrm>
+          <a:prstGeom prst="roundRect">
+            <a:avLst>
+              <a:gd name="adj" fmla="val 8000"/>
+            </a:avLst>
+          </a:prstGeom>
+          <a:solidFill>
+            <a:srgbClr val="EAF9FB"/>
+          </a:solidFill>
+          <a:ln>
+            <a:noFill/>
+          </a:ln>
+        </p:spPr>
+        <p:txBody>
+          <a:bodyPr wrap="square" lIns="137160" tIns="45720" rIns="137160" bIns="45720" rtlCol="0" anchor="t"/>
+          <a:lstStyle/>
+          <a:p>
+            <a:pPr>
+              <a:lnSpc>
+                <a:spcPct val="112000"/>
+              </a:lnSpc>
+            </a:pPr>
+            <a:r>
+              <a:rPr lang="en-US" sz="1100" dirty="0">
+                <a:solidFill>
+                  <a:srgbClr val="213541"/>
+                </a:solidFill>
+                <a:latin typeface="Arial" pitchFamily="34" charset="0"/>
+                <a:ea typeface="Arial" pitchFamily="34" charset="-122"/>
+                <a:cs typeface="Arial" pitchFamily="34" charset="-120"/>
+              </a:rPr>
+              <a:t>It underperforms the naive baseline for most countries - a 100-tree ensemble trained on 25 samples memorizes training noise completely and fails to generalize even one year out.</a:t>
+            </a:r>
+            <a:endParaRPr lang="en-US" sz="1100" dirty="0"/>
+          </a:p>
+        </p:txBody>
+      </p:sp>
+      <p:cxnSp>
+        <p:nvCxnSpPr>
+          <p:cNvPr id="29" name="Divider6"/>
+          <p:cNvCxnSpPr/>
+          <p:nvPr/>
+        </p:nvCxnSpPr>
+        <p:spPr>
+          <a:xfrm>
+            <a:off x="640080" y="5563104"/>
+            <a:ext cx="10911535" cy="0"/>
+          </a:xfrm>
+          <a:prstGeom prst="line">
+            <a:avLst/>
+          </a:prstGeom>
+          <a:ln w="9525">
+            <a:solidFill>
+              <a:srgbClr val="E1E7EA"/>
+            </a:solidFill>
+          </a:ln>
+        </p:spPr>
+      </p:cxnSp>
+      <p:sp>
+        <p:nvSpPr>
+          <p:cNvPr id="30" name="Row7Question"/>
+          <p:cNvSpPr/>
+          <p:nvPr/>
+        </p:nvSpPr>
+        <p:spPr>
+          <a:xfrm>
+            <a:off x="640080" y="5563104"/>
+            <a:ext cx="3962400" cy="590804"/>
+          </a:xfrm>
+          <a:prstGeom prst="rect">
+            <a:avLst/>
+          </a:prstGeom>
+          <a:noFill/>
+          <a:ln/>
+        </p:spPr>
+        <p:txBody>
+          <a:bodyPr wrap="square" lIns="0" tIns="45720" rIns="91440" bIns="45720" rtlCol="0" anchor="t"/>
+          <a:lstStyle/>
+          <a:p>
+            <a:pPr marL="0" indent="0" algn="l">
+              <a:lnSpc>
+                <a:spcPct val="112000"/>
+              </a:lnSpc>
+              <a:buNone/>
+            </a:pPr>
+            <a:r>
+              <a:rPr lang="en-US" sz="1100" b="1" dirty="0">
+                <a:solidFill>
+                  <a:srgbClr val="213541"/>
+                </a:solidFill>
+                <a:latin typeface="Arial" pitchFamily="34" charset="0"/>
+                <a:ea typeface="Arial" pitchFamily="34" charset="-122"/>
+                <a:cs typeface="Arial" pitchFamily="34" charset="-120"/>
+              </a:rPr>
+              <a:t>Does pooling RF across all 10 countries fix that?</a:t>
+            </a:r>
+            <a:endParaRPr lang="en-US" sz="1100" dirty="0"/>
+          </a:p>
+        </p:txBody>
+      </p:sp>
+      <p:sp>
+        <p:nvSpPr>
+          <p:cNvPr id="31" name="Row7Answer"/>
+          <p:cNvSpPr/>
+          <p:nvPr/>
+        </p:nvSpPr>
+        <p:spPr>
+          <a:xfrm>
+            <a:off x="4739640" y="5593584"/>
+            <a:ext cx="6811975" cy="529844"/>
+          </a:xfrm>
+          <a:prstGeom prst="roundRect">
+            <a:avLst>
+              <a:gd name="adj" fmla="val 8000"/>
+            </a:avLst>
+          </a:prstGeom>
+          <a:solidFill>
+            <a:srgbClr val="EAF9FB"/>
+          </a:solidFill>
+          <a:ln>
+            <a:noFill/>
+          </a:ln>
+        </p:spPr>
+        <p:txBody>
+          <a:bodyPr wrap="square" lIns="137160" tIns="45720" rIns="137160" bIns="45720" rtlCol="0" anchor="t"/>
+          <a:lstStyle/>
+          <a:p>
+            <a:pPr marL="0" indent="0" algn="l">
+              <a:lnSpc>
+                <a:spcPct val="112000"/>
+              </a:lnSpc>
+              <a:buNone/>
+            </a:pPr>
+            <a:r>
+              <a:rPr lang="en-US" sz="1100" dirty="0">
+                <a:solidFill>
+                  <a:srgbClr val="213541"/>
+                </a:solidFill>
+                <a:latin typeface="Arial" pitchFamily="34" charset="0"/>
+                <a:ea typeface="Arial" pitchFamily="34" charset="-122"/>
+                <a:cs typeface="Arial" pitchFamily="34" charset="-120"/>
+              </a:rPr>
+              <a:t>Only partly – it still trails on several countries, since pooling countries with very different trajectories (rapid growth vs sustained decline) costs the model some country-specific structure.</a:t>
+            </a:r>
+            <a:endParaRPr lang="en-US" sz="1100" dirty="0"/>
+          </a:p>
+        </p:txBody>
+      </p:sp>
+      <p:pic>
+        <p:nvPicPr>
+          <p:cNvPr id="6" name="Image 0" descr="logo_small.png"/>
+          <p:cNvPicPr>
+            <a:picLocks noChangeAspect="1"/>
+          </p:cNvPicPr>
+          <p:nvPr/>
+        </p:nvPicPr>
+        <p:blipFill>
+          <a:blip r:embed="rId2"/>
+          <a:stretch>
+            <a:fillRect/>
+          </a:stretch>
+        </p:blipFill>
+        <p:spPr>
+          <a:xfrm>
+            <a:off x="457200" y="6291072"/>
+            <a:ext cx="292608" cy="292608"/>
+          </a:xfrm>
+          <a:prstGeom prst="rect">
+            <a:avLst/>
+          </a:prstGeom>
+        </p:spPr>
+      </p:pic>
+      <p:sp>
+        <p:nvSpPr>
+          <p:cNvPr id="7" name="Text 4"/>
+          <p:cNvSpPr/>
+          <p:nvPr/>
+        </p:nvSpPr>
+        <p:spPr>
+          <a:xfrm>
+            <a:off x="822960" y="6291072"/>
+            <a:ext cx="1371600" cy="292608"/>
+          </a:xfrm>
+          <a:prstGeom prst="rect">
+            <a:avLst/>
+          </a:prstGeom>
+          <a:noFill/>
+          <a:ln/>
+        </p:spPr>
+        <p:txBody>
+          <a:bodyPr wrap="square" lIns="0" tIns="0" rIns="0" bIns="0" rtlCol="0" anchor="ctr"/>
+          <a:lstStyle/>
+          <a:p>
+            <a:pPr marL="0" indent="0">
+              <a:buNone/>
+            </a:pPr>
+            <a:r>
+              <a:rPr lang="en-US" sz="900" b="1" kern="0" spc="200" dirty="0">
+                <a:solidFill>
+                  <a:srgbClr val="213541"/>
+                </a:solidFill>
+                <a:latin typeface="Arial" pitchFamily="34" charset="0"/>
+                <a:ea typeface="Arial" pitchFamily="34" charset="-122"/>
+                <a:cs typeface="Arial" pitchFamily="34" charset="-120"/>
+              </a:rPr>
+              <a:t>SYENA</a:t>
+            </a:r>
+            <a:endParaRPr lang="en-US" sz="900" dirty="0"/>
+          </a:p>
+        </p:txBody>
+      </p:sp>
+      <p:sp>
+        <p:nvSpPr>
+          <p:cNvPr id="8" name="Text 5"/>
+          <p:cNvSpPr/>
+          <p:nvPr/>
+        </p:nvSpPr>
+        <p:spPr>
+          <a:xfrm>
+            <a:off x="9753600" y="6291072"/>
+            <a:ext cx="1981200" cy="292608"/>
+          </a:xfrm>
+          <a:prstGeom prst="rect">
+            <a:avLst/>
+          </a:prstGeom>
+          <a:noFill/>
+          <a:ln/>
+        </p:spPr>
+        <p:txBody>
+          <a:bodyPr wrap="square" lIns="0" tIns="0" rIns="0" bIns="0" rtlCol="0" anchor="ctr"/>
+          <a:lstStyle/>
+          <a:p>
+            <a:pPr marL="0" indent="0" algn="r">
+              <a:buNone/>
+            </a:pPr>
+            <a:r>
+              <a:rPr lang="en-US" sz="900">
+                <a:solidFill>
+                  <a:srgbClr val="8A98A3"/>
+                </a:solidFill>
+                <a:latin typeface="Arial"/>
+                <a:ea typeface="Arial" pitchFamily="34" charset="-122"/>
+                <a:cs typeface="Arial"/>
+              </a:rPr>
+              <a:t>Page 12 of 19</a:t>
             </a:r>
             <a:endParaRPr lang="en-US" sz="900" dirty="0">
               <a:solidFill>
@@ -4492,7 +6202,7 @@
 </p:sld>
 </file>
 
-<file path=ppt/slides/slide11.xml><?xml version="1.0" encoding="utf-8"?>
+<file path=ppt/slides/slide13.xml><?xml version="1.0" encoding="utf-8"?>
 <p:sld xmlns:a="http://schemas.openxmlformats.org/drawingml/2006/main" xmlns:r="http://schemas.openxmlformats.org/officeDocument/2006/relationships" xmlns:p="http://schemas.openxmlformats.org/presentationml/2006/main">
   <p:cSld name="Slide 27">
     <p:bg>
@@ -4616,9 +6326,7 @@
           <a:bodyPr wrap="square" lIns="0" tIns="0" rIns="0" bIns="0" rtlCol="0" anchor="ctr"/>
           <a:lstStyle/>
           <a:p>
-            <a:pPr marL="0" indent="0" algn="ctr">
-              <a:buNone/>
-            </a:pPr>
+            <a:pPr algn="ctr"/>
             <a:r>
               <a:rPr lang="en-US" sz="1400" dirty="0">
                 <a:solidFill>
@@ -4628,7 +6336,7 @@
                 <a:ea typeface="Arial" pitchFamily="34" charset="-122"/>
                 <a:cs typeface="Arial" pitchFamily="34" charset="-120"/>
               </a:rPr>
-              <a:t>5 Questions</a:t>
+              <a:t>Review &amp; Questions</a:t>
             </a:r>
             <a:endParaRPr lang="en-US" sz="1400" dirty="0"/>
           </a:p>
@@ -4730,7 +6438,7 @@
                 <a:ea typeface="Arial" pitchFamily="34" charset="-122"/>
                 <a:cs typeface="Arial"/>
               </a:rPr>
-              <a:t>Page 11 of 17</a:t>
+              <a:t>Page 13 of 19</a:t>
             </a:r>
             <a:endParaRPr lang="en-US" sz="900" dirty="0">
               <a:solidFill>
@@ -4750,7 +6458,7 @@
 </p:sld>
 </file>
 
-<file path=ppt/slides/slide12.xml><?xml version="1.0" encoding="utf-8"?>
+<file path=ppt/slides/slide14.xml><?xml version="1.0" encoding="utf-8"?>
 <p:sld xmlns:a="http://schemas.openxmlformats.org/drawingml/2006/main" xmlns:r="http://schemas.openxmlformats.org/officeDocument/2006/relationships" xmlns:p="http://schemas.openxmlformats.org/presentationml/2006/main">
   <p:cSld name="Slide 3">
     <p:bg>
@@ -4808,18 +6516,7 @@
                 <a:ea typeface="Arial" pitchFamily="34" charset="-122"/>
                 <a:cs typeface="Arial" pitchFamily="34" charset="-120"/>
               </a:rPr>
-              <a:t>WEEK 4  </a:t>
-            </a:r>
-            <a:r>
-              <a:rPr lang="en-US" sz="1200" b="1" kern="0" spc="150">
-                <a:solidFill>
-                  <a:srgbClr val="00B8D9"/>
-                </a:solidFill>
-                <a:latin typeface="Arial" pitchFamily="34" charset="0"/>
-                <a:ea typeface="Arial" pitchFamily="34" charset="-122"/>
-                <a:cs typeface="Arial" pitchFamily="34" charset="-120"/>
-              </a:rPr>
-              <a:t>·  REVIEW  ·  ~4 MIN</a:t>
+              <a:t>WEEK 4  ·  REVIEW</a:t>
             </a:r>
             <a:endParaRPr lang="en-US" sz="1200" dirty="0"/>
           </a:p>
@@ -4961,7 +6658,7 @@
                 <a:ea typeface="Arial" pitchFamily="34" charset="-122"/>
                 <a:cs typeface="Arial" pitchFamily="34" charset="-120"/>
               </a:rPr>
-              <a:t> It forecasts a series from its own history alone — no feature matrix, no engineered columns (diagram next).</a:t>
+              <a:t> It forecasts a series from its own history alone – no feature matrix, no engineered columns (diagram next).</a:t>
             </a:r>
             <a:endParaRPr lang="en-US" sz="1300" dirty="0"/>
           </a:p>
@@ -5031,7 +6728,7 @@
                 <a:ea typeface="Arial" pitchFamily="34" charset="-122"/>
                 <a:cs typeface="Arial" pitchFamily="34" charset="-120"/>
               </a:rPr>
-              <a:t> Smoothing level, smoothing trend, and damping — sanity-check them against domain intuition before trusting a forecast.</a:t>
+              <a:t> Smoothing level, smoothing trend, and damping – sanity-check them against domain intuition before trusting a forecast.</a:t>
             </a:r>
             <a:endParaRPr lang="en-US" sz="1300" dirty="0"/>
           </a:p>
@@ -5203,7 +6900,7 @@
                 <a:ea typeface="Arial" pitchFamily="34" charset="-122"/>
                 <a:cs typeface="Arial"/>
               </a:rPr>
-              <a:t>Page 12 of 17</a:t>
+              <a:t>Page 14 of 19</a:t>
             </a:r>
             <a:endParaRPr lang="en-US" sz="900" dirty="0">
               <a:solidFill>
@@ -5223,7 +6920,7 @@
 </p:sld>
 </file>
 
-<file path=ppt/slides/slide13.xml><?xml version="1.0" encoding="utf-8"?>
+<file path=ppt/slides/slide15.xml><?xml version="1.0" encoding="utf-8"?>
 <p:sld xmlns:a="http://schemas.openxmlformats.org/drawingml/2006/main" xmlns:r="http://schemas.openxmlformats.org/officeDocument/2006/relationships" xmlns:p="http://schemas.openxmlformats.org/presentationml/2006/main">
   <p:cSld>
     <p:spTree>
@@ -5679,7 +7376,7 @@
                 <a:ea typeface="Arial" pitchFamily="34" charset="-122"/>
                 <a:cs typeface="Arial" pitchFamily="34" charset="-120"/>
               </a:rPr>
-              <a:t>no new data — state evolves via φ-damped trend only</a:t>
+              <a:t>no new data – state evolves via φ-damped trend only</a:t>
             </a:r>
             <a:endParaRPr lang="en-US" sz="1400" dirty="0"/>
           </a:p>
@@ -5975,7 +7672,7 @@
                 <a:ea typeface="Arial" pitchFamily="34" charset="-122"/>
                 <a:cs typeface="Arial" pitchFamily="34" charset="-120"/>
               </a:rPr>
-              <a:t>There is no feature matrix here — only the series itself feeds the loop. Each year's actual value nudges the level and trend; forecasting just keeps running the loop forward without new data to correct it.</a:t>
+              <a:t>There is no feature matrix here – only the series itself feeds the loop. Each year's actual value nudges the level and trend; forecasting just keeps running the loop forward without new data to correct it.</a:t>
             </a:r>
             <a:endParaRPr lang="en-US" sz="1250" dirty="0"/>
           </a:p>
@@ -6083,7 +7780,7 @@
                 <a:ea typeface="Arial" pitchFamily="34" charset="-122"/>
                 <a:cs typeface="Arial"/>
               </a:rPr>
-              <a:t>Page 13 of 17</a:t>
+              <a:t>Page 15 of 19</a:t>
             </a:r>
             <a:endParaRPr lang="en-US" sz="900" dirty="0">
               <a:solidFill>
@@ -6103,7 +7800,7 @@
 </p:sld>
 </file>
 
-<file path=ppt/slides/slide14.xml><?xml version="1.0" encoding="utf-8"?>
+<file path=ppt/slides/slide16.xml><?xml version="1.0" encoding="utf-8"?>
 <p:sld xmlns:a="http://schemas.openxmlformats.org/drawingml/2006/main" xmlns:r="http://schemas.openxmlformats.org/officeDocument/2006/relationships" xmlns:p="http://schemas.openxmlformats.org/presentationml/2006/main">
   <p:cSld>
     <p:bg>
@@ -6239,7 +7936,7 @@
                 <a:ea typeface="Arial" pitchFamily="34" charset="-122"/>
                 <a:cs typeface="Arial" pitchFamily="34" charset="-120"/>
               </a:rPr>
-              <a:t>All questions are shown now — press → or click to reveal each answer in turn.</a:t>
+              <a:t>All questions are shown now – press → or click to reveal each answer in turn.</a:t>
             </a:r>
             <a:endParaRPr lang="en-US" sz="1100" dirty="0"/>
           </a:p>
@@ -6409,11 +8106,10 @@
           <a:bodyPr wrap="square" lIns="137160" tIns="45720" rIns="137160" bIns="45720" rtlCol="0" anchor="t"/>
           <a:lstStyle/>
           <a:p>
-            <a:pPr marL="0" indent="0" algn="l">
+            <a:pPr>
               <a:lnSpc>
                 <a:spcPct val="112000"/>
               </a:lnSpc>
-              <a:buNone/>
             </a:pPr>
             <a:r>
               <a:rPr lang="en-US" sz="1100" dirty="0">
@@ -6424,7 +8120,7 @@
                 <a:ea typeface="Arial" pitchFamily="34" charset="-122"/>
                 <a:cs typeface="Arial" pitchFamily="34" charset="-120"/>
               </a:rPr>
-              <a:t>Additive error, additive damped trend, no seasonality — the damped trend bounds a 20-year forecast to something plausible.</a:t>
+              <a:t>Error = Additive, Trend = Additive Damped, Seasonality = None - the damped trend bounds a 20-year forecast to something plausible, prevents unbounded linear extrapolation, which is more physically realistic for emissions that tend to slow, plateau, or reverse rather than grow at a constant rate forever.</a:t>
             </a:r>
             <a:endParaRPr lang="en-US" sz="1100" dirty="0"/>
           </a:p>
@@ -6502,7 +8198,7 @@
         <p:spPr>
           <a:xfrm>
             <a:off x="4739640" y="2875886"/>
-            <a:ext cx="6811975" cy="766166"/>
+            <a:ext cx="6811975" cy="819506"/>
           </a:xfrm>
           <a:prstGeom prst="roundRect">
             <a:avLst>
@@ -6520,12 +8216,22 @@
           <a:bodyPr wrap="square" lIns="137160" tIns="45720" rIns="137160" bIns="45720" rtlCol="0" anchor="t"/>
           <a:lstStyle/>
           <a:p>
-            <a:pPr marL="0" indent="0" algn="l">
+            <a:pPr>
               <a:lnSpc>
                 <a:spcPct val="112000"/>
               </a:lnSpc>
-              <a:buNone/>
-            </a:pPr>
+            </a:pPr>
+            <a:r>
+              <a:rPr lang="el-GR" sz="1100" dirty="0">
+                <a:solidFill>
+                  <a:srgbClr val="213541"/>
+                </a:solidFill>
+                <a:latin typeface="Arial" pitchFamily="34" charset="0"/>
+                <a:ea typeface="Arial" pitchFamily="34" charset="-122"/>
+                <a:cs typeface="Arial" pitchFamily="34" charset="-120"/>
+              </a:rPr>
+              <a:t>α (</a:t>
+            </a:r>
             <a:r>
               <a:rPr lang="en-US" sz="1100" dirty="0">
                 <a:solidFill>
@@ -6535,7 +8241,51 @@
                 <a:ea typeface="Arial" pitchFamily="34" charset="-122"/>
                 <a:cs typeface="Arial" pitchFamily="34" charset="-120"/>
               </a:rPr>
-              <a:t>α = level responsiveness, β* = trend responsiveness, φ = how fast the trend decays toward flat over the horizon.</a:t>
+              <a:t>smoothing level) is how much weight recent observations get versus the smoothed history. </a:t>
+            </a:r>
+            <a:r>
+              <a:rPr lang="el-GR" sz="1100" dirty="0">
+                <a:solidFill>
+                  <a:srgbClr val="213541"/>
+                </a:solidFill>
+                <a:latin typeface="Arial" pitchFamily="34" charset="0"/>
+                <a:ea typeface="Arial" pitchFamily="34" charset="-122"/>
+                <a:cs typeface="Arial" pitchFamily="34" charset="-120"/>
+              </a:rPr>
+              <a:t>β\* (</a:t>
+            </a:r>
+            <a:r>
+              <a:rPr lang="en-US" sz="1100" dirty="0">
+                <a:solidFill>
+                  <a:srgbClr val="213541"/>
+                </a:solidFill>
+                <a:latin typeface="Arial" pitchFamily="34" charset="0"/>
+                <a:ea typeface="Arial" pitchFamily="34" charset="-122"/>
+                <a:cs typeface="Arial" pitchFamily="34" charset="-120"/>
+              </a:rPr>
+              <a:t>smoothing trend) is how quickly the trend estimate itself updates to recent slope changes. </a:t>
+            </a:r>
+            <a:r>
+              <a:rPr lang="el-GR" sz="1100" dirty="0">
+                <a:solidFill>
+                  <a:srgbClr val="213541"/>
+                </a:solidFill>
+                <a:latin typeface="Arial" pitchFamily="34" charset="0"/>
+                <a:ea typeface="Arial" pitchFamily="34" charset="-122"/>
+                <a:cs typeface="Arial" pitchFamily="34" charset="-120"/>
+              </a:rPr>
+              <a:t>φ (</a:t>
+            </a:r>
+            <a:r>
+              <a:rPr lang="en-US" sz="1100" dirty="0">
+                <a:solidFill>
+                  <a:srgbClr val="213541"/>
+                </a:solidFill>
+                <a:latin typeface="Arial" pitchFamily="34" charset="0"/>
+                <a:ea typeface="Arial" pitchFamily="34" charset="-122"/>
+                <a:cs typeface="Arial" pitchFamily="34" charset="-120"/>
+              </a:rPr>
+              <a:t>damping) controls how fast the trend decays toward zero over the forecast horizon.</a:t>
             </a:r>
             <a:endParaRPr lang="en-US" sz="1100" dirty="0"/>
           </a:p>
@@ -6549,7 +8299,7 @@
         </p:nvCxnSpPr>
         <p:spPr>
           <a:xfrm>
-            <a:off x="640080" y="3672532"/>
+            <a:off x="640080" y="3751188"/>
             <a:ext cx="10911535" cy="0"/>
           </a:xfrm>
           <a:prstGeom prst="line">
@@ -6570,7 +8320,7 @@
         </p:nvSpPr>
         <p:spPr>
           <a:xfrm>
-            <a:off x="640080" y="3672532"/>
+            <a:off x="640080" y="3761020"/>
             <a:ext cx="3962400" cy="827126"/>
           </a:xfrm>
           <a:prstGeom prst="rect">
@@ -6612,7 +8362,7 @@
         </p:nvSpPr>
         <p:spPr>
           <a:xfrm>
-            <a:off x="4739640" y="3703012"/>
+            <a:off x="4739640" y="3791500"/>
             <a:ext cx="6811975" cy="766166"/>
           </a:xfrm>
           <a:prstGeom prst="roundRect">
@@ -6631,11 +8381,10 @@
           <a:bodyPr wrap="square" lIns="137160" tIns="45720" rIns="137160" bIns="45720" rtlCol="0" anchor="t"/>
           <a:lstStyle/>
           <a:p>
-            <a:pPr marL="0" indent="0" algn="l">
+            <a:pPr>
               <a:lnSpc>
                 <a:spcPct val="112000"/>
               </a:lnSpc>
-              <a:buNone/>
             </a:pPr>
             <a:r>
               <a:rPr lang="en-US" sz="1100" dirty="0">
@@ -6646,7 +8395,7 @@
                 <a:ea typeface="Arial" pitchFamily="34" charset="-122"/>
                 <a:cs typeface="Arial" pitchFamily="34" charset="-120"/>
               </a:rPr>
-              <a:t>It's a state-space model — it updates level/trend from the series' own history alone, unlike Week 3's regressions.</a:t>
+              <a:t>It's a state-space model – it updates level, trend, and (if present) seasonality components recursively from each new observation in the series. It has no feature matrix and doesn't use any Week 2 features – it’s a fundamentally different modeling paradigm from the Week 3 regressions.</a:t>
             </a:r>
             <a:endParaRPr lang="en-US" sz="1100" dirty="0"/>
           </a:p>
@@ -6660,7 +8409,7 @@
         </p:nvCxnSpPr>
         <p:spPr>
           <a:xfrm>
-            <a:off x="640080" y="4499658"/>
+            <a:off x="640080" y="4597981"/>
             <a:ext cx="10911535" cy="0"/>
           </a:xfrm>
           <a:prstGeom prst="line">
@@ -6681,8 +8430,8 @@
         </p:nvSpPr>
         <p:spPr>
           <a:xfrm>
-            <a:off x="640080" y="4499658"/>
-            <a:ext cx="3962400" cy="827126"/>
+            <a:off x="640080" y="4636818"/>
+            <a:ext cx="3962400" cy="689965"/>
           </a:xfrm>
           <a:prstGeom prst="rect">
             <a:avLst/>
@@ -6723,8 +8472,8 @@
         </p:nvSpPr>
         <p:spPr>
           <a:xfrm>
-            <a:off x="4739640" y="4530138"/>
-            <a:ext cx="6811975" cy="766166"/>
+            <a:off x="4739640" y="4636820"/>
+            <a:ext cx="6811975" cy="659483"/>
           </a:xfrm>
           <a:prstGeom prst="roundRect">
             <a:avLst>
@@ -6742,11 +8491,10 @@
           <a:bodyPr wrap="square" lIns="137160" tIns="45720" rIns="137160" bIns="45720" rtlCol="0" anchor="t"/>
           <a:lstStyle/>
           <a:p>
-            <a:pPr marL="0" indent="0" algn="l">
+            <a:pPr>
               <a:lnSpc>
                 <a:spcPct val="112000"/>
               </a:lnSpc>
-              <a:buNone/>
             </a:pPr>
             <a:r>
               <a:rPr lang="en-US" sz="1100" dirty="0">
@@ -6757,7 +8505,7 @@
                 <a:ea typeface="Arial" pitchFamily="34" charset="-122"/>
                 <a:cs typeface="Arial" pitchFamily="34" charset="-120"/>
               </a:rPr>
-              <a:t>Only in some cases — its real value is long-horizon plausibility, not short-horizon holdout accuracy.</a:t>
+              <a:t>Only in some cases – its real value isn't short-horizon accuracy; it's long-horizon *physical plausibility* – the 2019–2023 window includes the COVID dip, a discrete shock a smooth trend model can't anticipate, whereas LR's simple linear fit happens to interpolate through that turbulence well.</a:t>
             </a:r>
             <a:endParaRPr lang="en-US" sz="1100" dirty="0"/>
           </a:p>
@@ -6868,7 +8616,7 @@
                 <a:ea typeface="Arial" pitchFamily="34" charset="-122"/>
                 <a:cs typeface="Arial" pitchFamily="34" charset="-120"/>
               </a:rPr>
-              <a:t>It widens — treat a 2040 point estimate with far less confidence than a 2030 one.</a:t>
+              <a:t>It widens – uncertainty compounds the further out you forecast – treat a 2040 point estimate with far less confidence than a 2030 one.</a:t>
             </a:r>
             <a:endParaRPr lang="en-US" sz="1100" dirty="0"/>
           </a:p>
@@ -6970,7 +8718,7 @@
                 <a:ea typeface="Arial" pitchFamily="34" charset="-122"/>
                 <a:cs typeface="Arial"/>
               </a:rPr>
-              <a:t>Page 14 of 17</a:t>
+              <a:t>Page 16 of 19</a:t>
             </a:r>
             <a:endParaRPr lang="en-US" sz="900" dirty="0">
               <a:solidFill>
@@ -7252,7 +9000,7 @@
 </p:sld>
 </file>
 
-<file path=ppt/slides/slide15.xml><?xml version="1.0" encoding="utf-8"?>
+<file path=ppt/slides/slide17.xml><?xml version="1.0" encoding="utf-8"?>
 <p:sld xmlns:a="http://schemas.openxmlformats.org/drawingml/2006/main" xmlns:r="http://schemas.openxmlformats.org/officeDocument/2006/relationships" xmlns:p="http://schemas.openxmlformats.org/presentationml/2006/main">
   <p:cSld name="Slide 35">
     <p:bg>
@@ -7376,11 +9124,9 @@
           <a:bodyPr wrap="square" lIns="0" tIns="0" rIns="0" bIns="0" rtlCol="0" anchor="ctr"/>
           <a:lstStyle/>
           <a:p>
-            <a:pPr marL="0" indent="0" algn="ctr">
-              <a:buNone/>
-            </a:pPr>
-            <a:r>
-              <a:rPr lang="en-US" sz="1400">
+            <a:pPr algn="ctr"/>
+            <a:r>
+              <a:rPr lang="en-US" sz="1400" dirty="0">
                 <a:solidFill>
                   <a:srgbClr val="8A98A3"/>
                 </a:solidFill>
@@ -7388,18 +9134,7 @@
                 <a:ea typeface="Arial" pitchFamily="34" charset="-122"/>
                 <a:cs typeface="Arial" pitchFamily="34" charset="-120"/>
               </a:rPr>
-              <a:t>5 </a:t>
-            </a:r>
-            <a:r>
-              <a:rPr lang="en-US" sz="1400" dirty="0">
-                <a:solidFill>
-                  <a:srgbClr val="8A98A3"/>
-                </a:solidFill>
-                <a:latin typeface="Arial" pitchFamily="34" charset="0"/>
-                <a:ea typeface="Arial" pitchFamily="34" charset="-122"/>
-                <a:cs typeface="Arial" pitchFamily="34" charset="-120"/>
-              </a:rPr>
-              <a:t>Questions</a:t>
+              <a:t>Review &amp; Questions</a:t>
             </a:r>
             <a:endParaRPr lang="en-US" sz="1400" dirty="0"/>
           </a:p>
@@ -7501,7 +9236,7 @@
                 <a:ea typeface="Arial" pitchFamily="34" charset="-122"/>
                 <a:cs typeface="Arial"/>
               </a:rPr>
-              <a:t>Page 15 of 17</a:t>
+              <a:t>Page 17 of 19</a:t>
             </a:r>
             <a:endParaRPr lang="en-US" sz="900" dirty="0">
               <a:solidFill>
@@ -7521,7 +9256,7 @@
 </p:sld>
 </file>
 
-<file path=ppt/slides/slide16.xml><?xml version="1.0" encoding="utf-8"?>
+<file path=ppt/slides/slide18.xml><?xml version="1.0" encoding="utf-8"?>
 <p:sld xmlns:a="http://schemas.openxmlformats.org/drawingml/2006/main" xmlns:r="http://schemas.openxmlformats.org/officeDocument/2006/relationships" xmlns:p="http://schemas.openxmlformats.org/presentationml/2006/main">
   <p:cSld name="Slide 3">
     <p:bg>
@@ -7579,18 +9314,7 @@
                 <a:ea typeface="Arial" pitchFamily="34" charset="-122"/>
                 <a:cs typeface="Arial" pitchFamily="34" charset="-120"/>
               </a:rPr>
-              <a:t>WEEK 5  </a:t>
-            </a:r>
-            <a:r>
-              <a:rPr lang="en-US" sz="1200" b="1" kern="0" spc="150">
-                <a:solidFill>
-                  <a:srgbClr val="00B8D9"/>
-                </a:solidFill>
-                <a:latin typeface="Arial" pitchFamily="34" charset="0"/>
-                <a:ea typeface="Arial" pitchFamily="34" charset="-122"/>
-                <a:cs typeface="Arial" pitchFamily="34" charset="-120"/>
-              </a:rPr>
-              <a:t>·  REVIEW  ·  ~3 MIN</a:t>
+              <a:t>WEEK 5  ·  REVIEW</a:t>
             </a:r>
             <a:endParaRPr lang="en-US" sz="1200" dirty="0"/>
           </a:p>
@@ -7732,7 +9456,7 @@
                 <a:ea typeface="Arial" pitchFamily="34" charset="-122"/>
                 <a:cs typeface="Arial" pitchFamily="34" charset="-120"/>
               </a:rPr>
-              <a:t> It's a simple, transparent mechanism — not a new model.</a:t>
+              <a:t> It's a simple, transparent mechanism – not a new model.</a:t>
             </a:r>
             <a:endParaRPr lang="en-US" sz="1300" dirty="0"/>
           </a:p>
@@ -7939,7 +9663,7 @@
                 <a:ea typeface="Arial" pitchFamily="34" charset="-122"/>
                 <a:cs typeface="Arial"/>
               </a:rPr>
-              <a:t>Page 16 of 17</a:t>
+              <a:t>Page 18 of 19</a:t>
             </a:r>
             <a:endParaRPr lang="en-US" sz="900" dirty="0">
               <a:solidFill>
@@ -7959,7 +9683,7 @@
 </p:sld>
 </file>
 
-<file path=ppt/slides/slide17.xml><?xml version="1.0" encoding="utf-8"?>
+<file path=ppt/slides/slide19.xml><?xml version="1.0" encoding="utf-8"?>
 <p:sld xmlns:a="http://schemas.openxmlformats.org/drawingml/2006/main" xmlns:r="http://schemas.openxmlformats.org/officeDocument/2006/relationships" xmlns:p="http://schemas.openxmlformats.org/presentationml/2006/main">
   <p:cSld>
     <p:bg>
@@ -8095,7 +9819,7 @@
                 <a:ea typeface="Arial" pitchFamily="34" charset="-122"/>
                 <a:cs typeface="Arial" pitchFamily="34" charset="-120"/>
               </a:rPr>
-              <a:t>All questions are shown now — press → or click to reveal each answer in turn.</a:t>
+              <a:t>All questions are shown now – press → or click to reveal each answer in turn.</a:t>
             </a:r>
             <a:endParaRPr lang="en-US" sz="1100" dirty="0"/>
           </a:p>
@@ -8262,7 +9986,7 @@
           </a:ln>
         </p:spPr>
         <p:txBody>
-          <a:bodyPr wrap="square" lIns="137160" tIns="45720" rIns="137160" bIns="45720" rtlCol="0" anchor="ctr"/>
+          <a:bodyPr wrap="square" lIns="137160" tIns="45720" rIns="137160" bIns="45720" rtlCol="0" anchor="t"/>
           <a:lstStyle/>
           <a:p>
             <a:pPr marL="0" indent="0" algn="l">
@@ -8373,7 +10097,7 @@
           </a:ln>
         </p:spPr>
         <p:txBody>
-          <a:bodyPr wrap="square" lIns="137160" tIns="45720" rIns="137160" bIns="45720" rtlCol="0" anchor="ctr"/>
+          <a:bodyPr wrap="square" lIns="137160" tIns="45720" rIns="137160" bIns="45720" rtlCol="0" anchor="t"/>
           <a:lstStyle/>
           <a:p>
             <a:pPr marL="0" indent="0" algn="l">
@@ -8391,7 +10115,7 @@
                 <a:ea typeface="Arial" pitchFamily="34" charset="-122"/>
                 <a:cs typeface="Arial" pitchFamily="34" charset="-120"/>
               </a:rPr>
-              <a:t>No — they're explicitly illustrative, meant to build the what-if mechanics, not a calibrated projection.</a:t>
+              <a:t>No – they’re explicitly illustrative, meant to build the what-if mechanics, not a calibrated projection.</a:t>
             </a:r>
             <a:endParaRPr lang="en-US" sz="1100" dirty="0"/>
           </a:p>
@@ -8484,7 +10208,7 @@
           </a:ln>
         </p:spPr>
         <p:txBody>
-          <a:bodyPr wrap="square" lIns="137160" tIns="45720" rIns="137160" bIns="45720" rtlCol="0" anchor="ctr"/>
+          <a:bodyPr wrap="square" lIns="137160" tIns="45720" rIns="137160" bIns="45720" rtlCol="0" anchor="t"/>
           <a:lstStyle/>
           <a:p>
             <a:pPr marL="0" indent="0" algn="l">
@@ -8502,7 +10226,7 @@
                 <a:ea typeface="Arial" pitchFamily="34" charset="-122"/>
                 <a:cs typeface="Arial" pitchFamily="34" charset="-120"/>
               </a:rPr>
-              <a:t>It's the standard policy baseline — lets a reader see if a scenario gets back to it.</a:t>
+              <a:t>It's the standard policy baseline – lets a reader see if a scenario gets back to it.</a:t>
             </a:r>
             <a:endParaRPr lang="en-US" sz="1100" dirty="0"/>
           </a:p>
@@ -8595,7 +10319,7 @@
           </a:ln>
         </p:spPr>
         <p:txBody>
-          <a:bodyPr wrap="square" lIns="137160" tIns="45720" rIns="137160" bIns="45720" rtlCol="0" anchor="ctr"/>
+          <a:bodyPr wrap="square" lIns="137160" tIns="45720" rIns="137160" bIns="45720" rtlCol="0" anchor="t"/>
           <a:lstStyle/>
           <a:p>
             <a:pPr marL="0" indent="0" algn="l">
@@ -8613,7 +10337,7 @@
                 <a:ea typeface="Arial" pitchFamily="34" charset="-122"/>
                 <a:cs typeface="Arial" pitchFamily="34" charset="-120"/>
               </a:rPr>
-              <a:t>It sums all 10 countries per scenario — answers “how much does this whole group change,” which per-country charts don't.</a:t>
+              <a:t>It sums all 10 countries per scenario – answers “how much does this whole group change,” which per-country charts don't.</a:t>
             </a:r>
             <a:endParaRPr lang="en-US" sz="1100" dirty="0"/>
           </a:p>
@@ -8706,7 +10430,7 @@
           </a:ln>
         </p:spPr>
         <p:txBody>
-          <a:bodyPr wrap="square" lIns="137160" tIns="45720" rIns="137160" bIns="45720" rtlCol="0" anchor="ctr"/>
+          <a:bodyPr wrap="square" lIns="137160" tIns="45720" rIns="137160" bIns="45720" rtlCol="0" anchor="t"/>
           <a:lstStyle/>
           <a:p>
             <a:pPr marL="0" indent="0" algn="l">
@@ -8739,7 +10463,7 @@
           <p:nvPr/>
         </p:nvPicPr>
         <p:blipFill>
-          <a:blip r:embed="rId2"/>
+          <a:blip r:embed="rId3"/>
           <a:stretch>
             <a:fillRect/>
           </a:stretch>
@@ -8826,7 +10550,7 @@
                 <a:ea typeface="Arial" pitchFamily="34" charset="-122"/>
                 <a:cs typeface="Arial"/>
               </a:rPr>
-              <a:t>Page 17 of 17</a:t>
+              <a:t>Page 19 of 19</a:t>
             </a:r>
             <a:endParaRPr lang="en-US" sz="900" dirty="0">
               <a:solidFill>
@@ -9110,6 +10834,440 @@
 
 <file path=ppt/slides/slide2.xml><?xml version="1.0" encoding="utf-8"?>
 <p:sld xmlns:a="http://schemas.openxmlformats.org/drawingml/2006/main" xmlns:r="http://schemas.openxmlformats.org/officeDocument/2006/relationships" xmlns:p="http://schemas.openxmlformats.org/presentationml/2006/main">
+  <p:cSld>
+    <p:bg>
+      <p:bgPr>
+        <a:solidFill>
+          <a:srgbClr val="FFFFFF"/>
+        </a:solidFill>
+        <a:effectLst/>
+      </p:bgPr>
+    </p:bg>
+    <p:spTree>
+      <p:nvGrpSpPr>
+        <p:cNvPr id="1" name=""/>
+        <p:cNvGrpSpPr/>
+        <p:nvPr/>
+      </p:nvGrpSpPr>
+      <p:grpSpPr>
+        <a:xfrm>
+          <a:off x="0" y="0"/>
+          <a:ext cx="0" cy="0"/>
+          <a:chOff x="0" y="0"/>
+          <a:chExt cx="0" cy="0"/>
+        </a:xfrm>
+      </p:grpSpPr>
+      <p:sp>
+        <p:nvSpPr>
+          <p:cNvPr id="2" name="Text 0"/>
+          <p:cNvSpPr/>
+          <p:nvPr/>
+        </p:nvSpPr>
+        <p:spPr>
+          <a:xfrm>
+            <a:off x="640080" y="411480"/>
+            <a:ext cx="10911535" cy="320040"/>
+          </a:xfrm>
+          <a:prstGeom prst="rect">
+            <a:avLst/>
+          </a:prstGeom>
+          <a:noFill/>
+          <a:ln/>
+        </p:spPr>
+        <p:txBody>
+          <a:bodyPr wrap="square" lIns="0" tIns="0" rIns="0" bIns="0" rtlCol="0" anchor="ctr"/>
+          <a:lstStyle/>
+          <a:p>
+            <a:pPr marL="0" indent="0">
+              <a:buNone/>
+            </a:pPr>
+            <a:r>
+              <a:rPr lang="en-US" sz="1200" b="1" kern="0" spc="150" dirty="0">
+                <a:solidFill>
+                  <a:srgbClr val="00B8D9"/>
+                </a:solidFill>
+                <a:latin typeface="Arial" pitchFamily="34" charset="0"/>
+                <a:ea typeface="Arial" pitchFamily="34" charset="-122"/>
+                <a:cs typeface="Arial" pitchFamily="34" charset="-120"/>
+              </a:rPr>
+              <a:t>PROJECT OVERVIEW</a:t>
+            </a:r>
+            <a:endParaRPr lang="en-US" sz="1200" dirty="0"/>
+          </a:p>
+        </p:txBody>
+      </p:sp>
+      <p:sp>
+        <p:nvSpPr>
+          <p:cNvPr id="3" name="Text 1"/>
+          <p:cNvSpPr/>
+          <p:nvPr/>
+        </p:nvSpPr>
+        <p:spPr>
+          <a:xfrm>
+            <a:off x="640080" y="777240"/>
+            <a:ext cx="10911535" cy="548640"/>
+          </a:xfrm>
+          <a:prstGeom prst="rect">
+            <a:avLst/>
+          </a:prstGeom>
+          <a:noFill/>
+          <a:ln/>
+        </p:spPr>
+        <p:txBody>
+          <a:bodyPr wrap="square" lIns="0" tIns="0" rIns="0" bIns="0" rtlCol="0" anchor="t"/>
+          <a:lstStyle/>
+          <a:p>
+            <a:pPr marL="0" indent="0" algn="l">
+              <a:buNone/>
+            </a:pPr>
+            <a:r>
+              <a:rPr lang="en-US" sz="2400" b="1" dirty="0">
+                <a:solidFill>
+                  <a:srgbClr val="213541"/>
+                </a:solidFill>
+                <a:latin typeface="Arial" pitchFamily="34" charset="0"/>
+                <a:ea typeface="Arial" pitchFamily="34" charset="-122"/>
+                <a:cs typeface="Arial" pitchFamily="34" charset="-120"/>
+              </a:rPr>
+              <a:t>Objectives &amp; Scope</a:t>
+            </a:r>
+            <a:endParaRPr lang="en-US" sz="2400" dirty="0"/>
+          </a:p>
+        </p:txBody>
+      </p:sp>
+      <p:sp>
+        <p:nvSpPr>
+          <p:cNvPr id="4" name="Label"/>
+          <p:cNvSpPr/>
+          <p:nvPr/>
+        </p:nvSpPr>
+        <p:spPr>
+          <a:xfrm>
+            <a:off x="640080" y="1500000"/>
+            <a:ext cx="10911535" cy="228600"/>
+          </a:xfrm>
+          <a:prstGeom prst="rect">
+            <a:avLst/>
+          </a:prstGeom>
+          <a:noFill/>
+          <a:ln/>
+        </p:spPr>
+        <p:txBody>
+          <a:bodyPr wrap="square" lIns="0" tIns="0" rIns="0" bIns="0" rtlCol="0" anchor="ctr"/>
+          <a:lstStyle/>
+          <a:p>
+            <a:pPr marL="0" indent="0">
+              <a:buNone/>
+            </a:pPr>
+            <a:r>
+              <a:rPr lang="en-US" sz="1000" b="1" kern="0" spc="150" dirty="0">
+                <a:solidFill>
+                  <a:srgbClr val="00B8D9"/>
+                </a:solidFill>
+                <a:latin typeface="Arial" pitchFamily="34" charset="0"/>
+              </a:rPr>
+              <a:t>PRIMARY OBJECTIVE</a:t>
+            </a:r>
+            <a:endParaRPr lang="en-US" sz="1000" dirty="0"/>
+          </a:p>
+        </p:txBody>
+      </p:sp>
+      <p:sp>
+        <p:nvSpPr>
+          <p:cNvPr id="5" name="Para"/>
+          <p:cNvSpPr/>
+          <p:nvPr/>
+        </p:nvSpPr>
+        <p:spPr>
+          <a:xfrm>
+            <a:off x="640080" y="1788600"/>
+            <a:ext cx="10911535" cy="850000"/>
+          </a:xfrm>
+          <a:prstGeom prst="rect">
+            <a:avLst/>
+          </a:prstGeom>
+          <a:noFill/>
+          <a:ln/>
+        </p:spPr>
+        <p:txBody>
+          <a:bodyPr wrap="square" lIns="0" tIns="0" rIns="0" bIns="0" rtlCol="0" anchor="t"/>
+          <a:lstStyle/>
+          <a:p>
+            <a:pPr marL="0" indent="0" algn="l">
+              <a:lnSpc>
+                <a:spcPct val="122000"/>
+              </a:lnSpc>
+              <a:buNone/>
+            </a:pPr>
+            <a:r>
+              <a:rPr lang="en-US" sz="1500" dirty="0">
+                <a:solidFill>
+                  <a:srgbClr val="213541"/>
+                </a:solidFill>
+                <a:latin typeface="Arial" pitchFamily="34" charset="0"/>
+                <a:ea typeface="Arial" pitchFamily="34" charset="-122"/>
+                <a:cs typeface="Arial" pitchFamily="34" charset="-120"/>
+              </a:rPr>
+              <a:t>Build an end-to-end analytical project that ingests open Greenhouse Gas (GHG) emissions datasets, performs exploratory data analysis, trains forecasting models to project future emissions, and assembles findings into a well-documented Jupyter Notebook and an optional interactive Streamlit dashboard.</a:t>
+            </a:r>
+            <a:endParaRPr lang="en-US" sz="1500" dirty="0"/>
+          </a:p>
+        </p:txBody>
+      </p:sp>
+      <p:sp>
+        <p:nvSpPr>
+          <p:cNvPr id="6" name="Label"/>
+          <p:cNvSpPr/>
+          <p:nvPr/>
+        </p:nvSpPr>
+        <p:spPr>
+          <a:xfrm>
+            <a:off x="640080" y="2868600"/>
+            <a:ext cx="10911535" cy="228600"/>
+          </a:xfrm>
+          <a:prstGeom prst="rect">
+            <a:avLst/>
+          </a:prstGeom>
+          <a:noFill/>
+          <a:ln/>
+        </p:spPr>
+        <p:txBody>
+          <a:bodyPr wrap="square" lIns="0" tIns="0" rIns="0" bIns="0" rtlCol="0" anchor="ctr"/>
+          <a:lstStyle/>
+          <a:p>
+            <a:pPr marL="0" indent="0">
+              <a:buNone/>
+            </a:pPr>
+            <a:r>
+              <a:rPr lang="en-US" sz="1000" b="1" kern="0" spc="150" dirty="0">
+                <a:solidFill>
+                  <a:srgbClr val="00B8D9"/>
+                </a:solidFill>
+                <a:latin typeface="Arial" pitchFamily="34" charset="0"/>
+              </a:rPr>
+              <a:t>SCOPE NOTE</a:t>
+            </a:r>
+            <a:endParaRPr lang="en-US" sz="1000" dirty="0"/>
+          </a:p>
+        </p:txBody>
+      </p:sp>
+      <p:sp>
+        <p:nvSpPr>
+          <p:cNvPr id="7" name="Para"/>
+          <p:cNvSpPr/>
+          <p:nvPr/>
+        </p:nvSpPr>
+        <p:spPr>
+          <a:xfrm>
+            <a:off x="640080" y="3157200"/>
+            <a:ext cx="10911535" cy="1130000"/>
+          </a:xfrm>
+          <a:prstGeom prst="rect">
+            <a:avLst/>
+          </a:prstGeom>
+          <a:noFill/>
+          <a:ln/>
+        </p:spPr>
+        <p:txBody>
+          <a:bodyPr wrap="square" lIns="0" tIns="0" rIns="0" bIns="0" rtlCol="0" anchor="t"/>
+          <a:lstStyle/>
+          <a:p>
+            <a:pPr marL="0" indent="0" algn="l">
+              <a:lnSpc>
+                <a:spcPct val="122000"/>
+              </a:lnSpc>
+              <a:buNone/>
+            </a:pPr>
+            <a:r>
+              <a:rPr lang="en-US" sz="1500" dirty="0">
+                <a:solidFill>
+                  <a:srgbClr val="213541"/>
+                </a:solidFill>
+                <a:latin typeface="Arial" pitchFamily="34" charset="0"/>
+                <a:ea typeface="Arial" pitchFamily="34" charset="-122"/>
+                <a:cs typeface="Arial" pitchFamily="34" charset="-120"/>
+              </a:rPr>
+              <a:t>This project deliberately focused on classical machine learning and time-series methods – specifically regression models and Holt's Damped Trend (ETS) forecasting. These approaches are well-suited to structured tabular data and annual time-series with a limited number of data points and provide a solid foundation before exploring more complex techniques such as deep learning or LLMs.</a:t>
+            </a:r>
+            <a:endParaRPr lang="en-US" sz="1500" dirty="0"/>
+          </a:p>
+        </p:txBody>
+      </p:sp>
+      <p:sp>
+        <p:nvSpPr>
+          <p:cNvPr id="8" name="Callout"/>
+          <p:cNvSpPr/>
+          <p:nvPr/>
+        </p:nvSpPr>
+        <p:spPr>
+          <a:xfrm>
+            <a:off x="640080" y="4547200"/>
+            <a:ext cx="10911535" cy="1005840"/>
+          </a:xfrm>
+          <a:prstGeom prst="roundRect">
+            <a:avLst>
+              <a:gd name="adj" fmla="val 6000"/>
+            </a:avLst>
+          </a:prstGeom>
+          <a:solidFill>
+            <a:srgbClr val="EAF9FB"/>
+          </a:solidFill>
+          <a:ln w="12700">
+            <a:solidFill>
+              <a:srgbClr val="00B8D9"/>
+            </a:solidFill>
+          </a:ln>
+        </p:spPr>
+        <p:txBody>
+          <a:bodyPr wrap="square" lIns="320040" tIns="137160" rIns="320040" bIns="137160" rtlCol="0" anchor="ctr"/>
+          <a:lstStyle/>
+          <a:p>
+            <a:pPr marL="0" indent="0" algn="l">
+              <a:lnSpc>
+                <a:spcPct val="126000"/>
+              </a:lnSpc>
+              <a:buNone/>
+            </a:pPr>
+            <a:r>
+              <a:rPr lang="en-US" sz="1500" b="1" dirty="0">
+                <a:solidFill>
+                  <a:srgbClr val="213541"/>
+                </a:solidFill>
+                <a:latin typeface="Arial" pitchFamily="34" charset="0"/>
+              </a:rPr>
+              <a:t>The goal was not an accurate GHG prediction or the "best" model. </a:t>
+            </a:r>
+            <a:r>
+              <a:rPr lang="en-US" sz="1500" dirty="0">
+                <a:solidFill>
+                  <a:srgbClr val="213541"/>
+                </a:solidFill>
+                <a:latin typeface="Arial" pitchFamily="34" charset="0"/>
+              </a:rPr>
+              <a:t>It was to understand the methodology and practices – how to frame the problem, engineer features, evaluate honestly, and reason about a model's limitations.</a:t>
+            </a:r>
+            <a:endParaRPr lang="en-US" sz="1500" dirty="0"/>
+          </a:p>
+        </p:txBody>
+      </p:sp>
+      <p:pic>
+        <p:nvPicPr>
+          <p:cNvPr id="18" name="Image 0" descr="logo_small.png"/>
+          <p:cNvPicPr>
+            <a:picLocks noChangeAspect="1"/>
+          </p:cNvPicPr>
+          <p:nvPr/>
+        </p:nvPicPr>
+        <p:blipFill>
+          <a:blip r:embed="rId2"/>
+          <a:stretch>
+            <a:fillRect/>
+          </a:stretch>
+        </p:blipFill>
+        <p:spPr>
+          <a:xfrm>
+            <a:off x="457200" y="6291072"/>
+            <a:ext cx="292608" cy="292608"/>
+          </a:xfrm>
+          <a:prstGeom prst="rect">
+            <a:avLst/>
+          </a:prstGeom>
+        </p:spPr>
+      </p:pic>
+      <p:sp>
+        <p:nvSpPr>
+          <p:cNvPr id="19" name="Text 16"/>
+          <p:cNvSpPr/>
+          <p:nvPr/>
+        </p:nvSpPr>
+        <p:spPr>
+          <a:xfrm>
+            <a:off x="822960" y="6291072"/>
+            <a:ext cx="1371600" cy="292608"/>
+          </a:xfrm>
+          <a:prstGeom prst="rect">
+            <a:avLst/>
+          </a:prstGeom>
+          <a:noFill/>
+          <a:ln/>
+        </p:spPr>
+        <p:txBody>
+          <a:bodyPr wrap="square" lIns="0" tIns="0" rIns="0" bIns="0" rtlCol="0" anchor="ctr"/>
+          <a:lstStyle/>
+          <a:p>
+            <a:pPr marL="0" indent="0">
+              <a:buNone/>
+            </a:pPr>
+            <a:r>
+              <a:rPr lang="en-US" sz="900" b="1" kern="0" spc="200" dirty="0">
+                <a:solidFill>
+                  <a:srgbClr val="213541"/>
+                </a:solidFill>
+                <a:latin typeface="Arial" pitchFamily="34" charset="0"/>
+                <a:ea typeface="Arial" pitchFamily="34" charset="-122"/>
+                <a:cs typeface="Arial" pitchFamily="34" charset="-120"/>
+              </a:rPr>
+              <a:t>SYENA</a:t>
+            </a:r>
+            <a:endParaRPr lang="en-US" sz="900" dirty="0"/>
+          </a:p>
+        </p:txBody>
+      </p:sp>
+      <p:sp>
+        <p:nvSpPr>
+          <p:cNvPr id="20" name="Text 17"/>
+          <p:cNvSpPr/>
+          <p:nvPr/>
+        </p:nvSpPr>
+        <p:spPr>
+          <a:xfrm>
+            <a:off x="9753600" y="6291072"/>
+            <a:ext cx="1981200" cy="292608"/>
+          </a:xfrm>
+          <a:prstGeom prst="rect">
+            <a:avLst/>
+          </a:prstGeom>
+          <a:noFill/>
+          <a:ln/>
+        </p:spPr>
+        <p:txBody>
+          <a:bodyPr wrap="square" lIns="0" tIns="0" rIns="0" bIns="0" rtlCol="0" anchor="ctr"/>
+          <a:lstStyle/>
+          <a:p>
+            <a:pPr marL="0" indent="0" algn="r">
+              <a:buNone/>
+            </a:pPr>
+            <a:r>
+              <a:rPr lang="en-US" sz="900">
+                <a:solidFill>
+                  <a:srgbClr val="8A98A3"/>
+                </a:solidFill>
+                <a:latin typeface="Arial"/>
+                <a:ea typeface="Arial" pitchFamily="34" charset="-122"/>
+                <a:cs typeface="Arial"/>
+              </a:rPr>
+              <a:t>Page 2 of 19</a:t>
+            </a:r>
+            <a:endParaRPr lang="en-US" sz="900" dirty="0">
+              <a:solidFill>
+                <a:srgbClr val="8A98A3"/>
+              </a:solidFill>
+              <a:latin typeface="Arial"/>
+              <a:cs typeface="Arial"/>
+            </a:endParaRPr>
+          </a:p>
+        </p:txBody>
+      </p:sp>
+    </p:spTree>
+  </p:cSld>
+  <p:clrMapOvr>
+    <a:masterClrMapping/>
+  </p:clrMapOvr>
+</p:sld>
+</file>
+
+<file path=ppt/slides/slide3.xml><?xml version="1.0" encoding="utf-8"?>
+<p:sld xmlns:a="http://schemas.openxmlformats.org/drawingml/2006/main" xmlns:r="http://schemas.openxmlformats.org/officeDocument/2006/relationships" xmlns:p="http://schemas.openxmlformats.org/presentationml/2006/main">
   <p:cSld name="Slide 2">
     <p:bg>
       <p:bgPr>
@@ -9236,7 +11394,7 @@
               <a:buNone/>
             </a:pPr>
             <a:r>
-              <a:rPr lang="en-US" sz="1400">
+              <a:rPr lang="en-US" sz="1400" dirty="0">
                 <a:solidFill>
                   <a:srgbClr val="8A98A3"/>
                 </a:solidFill>
@@ -9244,18 +11402,7 @@
                 <a:ea typeface="Arial" pitchFamily="34" charset="-122"/>
                 <a:cs typeface="Arial" pitchFamily="34" charset="-120"/>
               </a:rPr>
-              <a:t>4 </a:t>
-            </a:r>
-            <a:r>
-              <a:rPr lang="en-US" sz="1400" dirty="0">
-                <a:solidFill>
-                  <a:srgbClr val="8A98A3"/>
-                </a:solidFill>
-                <a:latin typeface="Arial" pitchFamily="34" charset="0"/>
-                <a:ea typeface="Arial" pitchFamily="34" charset="-122"/>
-                <a:cs typeface="Arial" pitchFamily="34" charset="-120"/>
-              </a:rPr>
-              <a:t>Questions</a:t>
+              <a:t>Review &amp; Questions</a:t>
             </a:r>
             <a:endParaRPr lang="en-US" sz="1400" dirty="0"/>
           </a:p>
@@ -9357,7 +11504,7 @@
                 <a:ea typeface="Arial" pitchFamily="34" charset="-122"/>
                 <a:cs typeface="Arial"/>
               </a:rPr>
-              <a:t>Page 2 of 17</a:t>
+              <a:t>Page 3 of 19</a:t>
             </a:r>
             <a:endParaRPr lang="en-US" sz="900" dirty="0">
               <a:solidFill>
@@ -9377,7 +11524,7 @@
 </p:sld>
 </file>
 
-<file path=ppt/slides/slide3.xml><?xml version="1.0" encoding="utf-8"?>
+<file path=ppt/slides/slide4.xml><?xml version="1.0" encoding="utf-8"?>
 <p:sld xmlns:a="http://schemas.openxmlformats.org/drawingml/2006/main" xmlns:r="http://schemas.openxmlformats.org/officeDocument/2006/relationships" xmlns:p="http://schemas.openxmlformats.org/presentationml/2006/main">
   <p:cSld name="Slide 3">
     <p:bg>
@@ -9435,18 +11582,7 @@
                 <a:ea typeface="Arial" pitchFamily="34" charset="-122"/>
                 <a:cs typeface="Arial" pitchFamily="34" charset="-120"/>
               </a:rPr>
-              <a:t>WEEK 1  </a:t>
-            </a:r>
-            <a:r>
-              <a:rPr lang="en-US" sz="1200" b="1" kern="0" spc="150">
-                <a:solidFill>
-                  <a:srgbClr val="00B8D9"/>
-                </a:solidFill>
-                <a:latin typeface="Arial" pitchFamily="34" charset="0"/>
-                <a:ea typeface="Arial" pitchFamily="34" charset="-122"/>
-                <a:cs typeface="Arial" pitchFamily="34" charset="-120"/>
-              </a:rPr>
-              <a:t>·  REVIEW  ·  ~3 MIN</a:t>
+              <a:t>WEEK 1  ·  REVIEW</a:t>
             </a:r>
             <a:endParaRPr lang="en-US" sz="1200" dirty="0"/>
           </a:p>
@@ -9588,7 +11724,7 @@
                 <a:ea typeface="Arial" pitchFamily="34" charset="-122"/>
                 <a:cs typeface="Arial" pitchFamily="34" charset="-120"/>
               </a:rPr>
-              <a:t> Profiling, cleaning, and persisting a raw dataset routinely takes more effort than the modeling that follows — treat it as the main event, not a preamble.</a:t>
+              <a:t> Profiling, cleaning, and persisting a raw dataset routinely takes more effort than the modeling that follows – treat it as the main event, not a preamble.</a:t>
             </a:r>
             <a:endParaRPr lang="en-US" sz="1300" dirty="0"/>
           </a:p>
@@ -9623,7 +11759,7 @@
                 <a:ea typeface="Arial" pitchFamily="34" charset="-122"/>
                 <a:cs typeface="Arial" pitchFamily="34" charset="-120"/>
               </a:rPr>
-              <a:t> Check shape and dtypes, then missingness — concentration matters more than the overall rate, since it tells you which entities or periods are actually usable.</a:t>
+              <a:t> Check shape and dtypes, then missingness – concentration matters more than the overall rate, since it tells you which entities or periods are actually usable.</a:t>
             </a:r>
             <a:endParaRPr lang="en-US" sz="1300" dirty="0"/>
           </a:p>
@@ -9728,7 +11864,7 @@
                 <a:ea typeface="Arial" pitchFamily="34" charset="-122"/>
                 <a:cs typeface="Arial" pitchFamily="34" charset="-120"/>
               </a:rPr>
-              <a:t> Static matplotlib/pandas .plot() for a quick single-series check; Plotly Express once hovering or toggling a legend actually helps — e.g., comparing several countries at once.</a:t>
+              <a:t> Static matplotlib/pandas .plot() for a quick single-series check; Plotly Express once hovering or toggling a legend actually helps – e.g., comparing several countries at once.</a:t>
             </a:r>
             <a:endParaRPr lang="en-US" sz="1300" dirty="0"/>
           </a:p>
@@ -9830,7 +11966,7 @@
                 <a:ea typeface="Arial" pitchFamily="34" charset="-122"/>
                 <a:cs typeface="Arial"/>
               </a:rPr>
-              <a:t>Page 3 of 17</a:t>
+              <a:t>Page 4 of 19</a:t>
             </a:r>
             <a:endParaRPr lang="en-US" sz="900" dirty="0">
               <a:solidFill>
@@ -9850,7 +11986,7 @@
 </p:sld>
 </file>
 
-<file path=ppt/slides/slide4.xml><?xml version="1.0" encoding="utf-8"?>
+<file path=ppt/slides/slide5.xml><?xml version="1.0" encoding="utf-8"?>
 <p:sld xmlns:a="http://schemas.openxmlformats.org/drawingml/2006/main" xmlns:r="http://schemas.openxmlformats.org/officeDocument/2006/relationships" xmlns:p="http://schemas.openxmlformats.org/presentationml/2006/main">
   <p:cSld>
     <p:bg>
@@ -9986,7 +12122,7 @@
                 <a:ea typeface="Arial" pitchFamily="34" charset="-122"/>
                 <a:cs typeface="Arial" pitchFamily="34" charset="-120"/>
               </a:rPr>
-              <a:t>All questions are shown now — press → or click to reveal each answer in turn.</a:t>
+              <a:t>All questions are shown now – press → or click to reveal each answer in turn.</a:t>
             </a:r>
             <a:endParaRPr lang="en-US" sz="1100" dirty="0"/>
           </a:p>
@@ -10171,7 +12307,7 @@
                 <a:ea typeface="Arial" pitchFamily="34" charset="-122"/>
                 <a:cs typeface="Arial" pitchFamily="34" charset="-120"/>
               </a:rPr>
-              <a:t>Pre-1990 coverage is sparse and predates major boundary changes; 1990 is also the standard policy baseline year.</a:t>
+              <a:t>Pre-1990 data coverage is sparser and predates major geopolitical boundary changes (German reunification, Soviet collapse); 1990 is also the standard policy baseline year in most international climate policy targets, which makes later trend and scenario comparisons more interpretable.</a:t>
             </a:r>
             <a:endParaRPr lang="en-US" sz="1100" dirty="0"/>
           </a:p>
@@ -10267,11 +12403,10 @@
           <a:bodyPr wrap="square" lIns="137160" tIns="45720" rIns="137160" bIns="45720" rtlCol="0" anchor="t"/>
           <a:lstStyle/>
           <a:p>
-            <a:pPr marL="0" indent="0" algn="l">
+            <a:pPr>
               <a:lnSpc>
                 <a:spcPct val="112000"/>
               </a:lnSpc>
-              <a:buNone/>
             </a:pPr>
             <a:r>
               <a:rPr lang="en-US" sz="1100" dirty="0">
@@ -10282,7 +12417,7 @@
                 <a:ea typeface="Arial" pitchFamily="34" charset="-122"/>
                 <a:cs typeface="Arial" pitchFamily="34" charset="-120"/>
               </a:rPr>
-              <a:t>They'd double-count emissions if summed with the countries that make them up — filter to sovereign nations first.</a:t>
+              <a:t>The dataset mixes real countries with regional/income-group aggregates in the same `country` column. If aggregates aren't excluded, any group by or sum operation would double-count emissions – filter to sovereign nations first.</a:t>
             </a:r>
             <a:endParaRPr lang="en-US" sz="1100" dirty="0"/>
           </a:p>
@@ -10378,11 +12513,10 @@
           <a:bodyPr wrap="square" lIns="137160" tIns="45720" rIns="137160" bIns="45720" rtlCol="0" anchor="t"/>
           <a:lstStyle/>
           <a:p>
-            <a:pPr marL="0" indent="0" algn="l">
+            <a:pPr>
               <a:lnSpc>
                 <a:spcPct val="112000"/>
               </a:lnSpc>
-              <a:buNone/>
             </a:pPr>
             <a:r>
               <a:rPr lang="en-US" sz="1100" dirty="0">
@@ -10393,7 +12527,7 @@
                 <a:ea typeface="Arial" pitchFamily="34" charset="-122"/>
                 <a:cs typeface="Arial" pitchFamily="34" charset="-120"/>
               </a:rPr>
-              <a:t>Require each key column to individually clear a high non-null threshold, and document why that number was chosen.</a:t>
+              <a:t>The coverage should check each key column (`co2`, `total_ghg`, `population`, etc.) to individually clear a high non-null threshold – a single blended average across columns would let one well-populated column mask a badly-missing one (e.g., GDP is much spottier than CO₂). All countries should comfortably clear whatever reasonable threshold is chosen, since they're all large, well-documented economies.</a:t>
             </a:r>
             <a:endParaRPr lang="en-US" sz="1100" dirty="0"/>
           </a:p>
@@ -10489,11 +12623,10 @@
           <a:bodyPr wrap="square" lIns="137160" tIns="45720" rIns="137160" bIns="45720" rtlCol="0" anchor="t"/>
           <a:lstStyle/>
           <a:p>
-            <a:pPr marL="0" indent="0" algn="l">
+            <a:pPr>
               <a:lnSpc>
                 <a:spcPct val="112000"/>
               </a:lnSpc>
-              <a:buNone/>
             </a:pPr>
             <a:r>
               <a:rPr lang="en-US" sz="1100" dirty="0">
@@ -10504,7 +12637,7 @@
                 <a:ea typeface="Arial" pitchFamily="34" charset="-122"/>
                 <a:cs typeface="Arial" pitchFamily="34" charset="-120"/>
               </a:rPr>
-              <a:t>Each week runs in its own kernel, so the filtered dataset is persisted to disk and reloaded, not recomputed.</a:t>
+              <a:t>If there are separate notebooks per week, each runs in its own kernel – one week can’t see the prior week’s in-memory variables. Persisting the cleaned, filtered dataset as an intermediate artifact is what lets later weeks reload the same starting point without recomputing (and potentially re-deriving slightly differently) the previous week’s logic.</a:t>
             </a:r>
             <a:endParaRPr lang="en-US" sz="1100" dirty="0"/>
           </a:p>
@@ -10606,7 +12739,7 @@
                 <a:ea typeface="Arial" pitchFamily="34" charset="-122"/>
                 <a:cs typeface="Arial"/>
               </a:rPr>
-              <a:t>Page 4 of 17</a:t>
+              <a:t>Page 5 of 19</a:t>
             </a:r>
             <a:endParaRPr lang="en-US" sz="900" dirty="0">
               <a:solidFill>
@@ -10842,7 +12975,7 @@
 </p:sld>
 </file>
 
-<file path=ppt/slides/slide5.xml><?xml version="1.0" encoding="utf-8"?>
+<file path=ppt/slides/slide6.xml><?xml version="1.0" encoding="utf-8"?>
 <p:sld xmlns:a="http://schemas.openxmlformats.org/drawingml/2006/main" xmlns:r="http://schemas.openxmlformats.org/officeDocument/2006/relationships" xmlns:p="http://schemas.openxmlformats.org/presentationml/2006/main">
   <p:cSld name="Slide 9">
     <p:bg>
@@ -10966,11 +13099,9 @@
           <a:bodyPr wrap="square" lIns="0" tIns="0" rIns="0" bIns="0" rtlCol="0" anchor="ctr"/>
           <a:lstStyle/>
           <a:p>
-            <a:pPr marL="0" indent="0" algn="ctr">
-              <a:buNone/>
-            </a:pPr>
-            <a:r>
-              <a:rPr lang="en-US" sz="1400">
+            <a:pPr algn="ctr"/>
+            <a:r>
+              <a:rPr lang="en-US" sz="1400" dirty="0">
                 <a:solidFill>
                   <a:srgbClr val="8A98A3"/>
                 </a:solidFill>
@@ -10978,18 +13109,7 @@
                 <a:ea typeface="Arial" pitchFamily="34" charset="-122"/>
                 <a:cs typeface="Arial" pitchFamily="34" charset="-120"/>
               </a:rPr>
-              <a:t>5 </a:t>
-            </a:r>
-            <a:r>
-              <a:rPr lang="en-US" sz="1400" dirty="0">
-                <a:solidFill>
-                  <a:srgbClr val="8A98A3"/>
-                </a:solidFill>
-                <a:latin typeface="Arial" pitchFamily="34" charset="0"/>
-                <a:ea typeface="Arial" pitchFamily="34" charset="-122"/>
-                <a:cs typeface="Arial" pitchFamily="34" charset="-120"/>
-              </a:rPr>
-              <a:t>Questions</a:t>
+              <a:t>Review &amp; Questions</a:t>
             </a:r>
             <a:endParaRPr lang="en-US" sz="1400" dirty="0"/>
           </a:p>
@@ -11091,7 +13211,7 @@
                 <a:ea typeface="Arial" pitchFamily="34" charset="-122"/>
                 <a:cs typeface="Arial"/>
               </a:rPr>
-              <a:t>Page 5 of 17</a:t>
+              <a:t>Page 6 of 19</a:t>
             </a:r>
             <a:endParaRPr lang="en-US" sz="900" dirty="0">
               <a:solidFill>
@@ -11111,7 +13231,7 @@
 </p:sld>
 </file>
 
-<file path=ppt/slides/slide6.xml><?xml version="1.0" encoding="utf-8"?>
+<file path=ppt/slides/slide7.xml><?xml version="1.0" encoding="utf-8"?>
 <p:sld xmlns:a="http://schemas.openxmlformats.org/drawingml/2006/main" xmlns:r="http://schemas.openxmlformats.org/officeDocument/2006/relationships" xmlns:p="http://schemas.openxmlformats.org/presentationml/2006/main">
   <p:cSld name="Slide 3">
     <p:bg>
@@ -11169,18 +13289,7 @@
                 <a:ea typeface="Arial" pitchFamily="34" charset="-122"/>
                 <a:cs typeface="Arial" pitchFamily="34" charset="-120"/>
               </a:rPr>
-              <a:t>WEEK 2  </a:t>
-            </a:r>
-            <a:r>
-              <a:rPr lang="en-US" sz="1200" b="1" kern="0" spc="150">
-                <a:solidFill>
-                  <a:srgbClr val="00B8D9"/>
-                </a:solidFill>
-                <a:latin typeface="Arial" pitchFamily="34" charset="0"/>
-                <a:ea typeface="Arial" pitchFamily="34" charset="-122"/>
-                <a:cs typeface="Arial" pitchFamily="34" charset="-120"/>
-              </a:rPr>
-              <a:t>·  REVIEW  ·  ~3 MIN</a:t>
+              <a:t>WEEK 2  ·  REVIEW</a:t>
             </a:r>
             <a:endParaRPr lang="en-US" sz="1200" dirty="0"/>
           </a:p>
@@ -11322,7 +13431,7 @@
                 <a:ea typeface="Arial" pitchFamily="34" charset="-122"/>
                 <a:cs typeface="Arial" pitchFamily="34" charset="-120"/>
               </a:rPr>
-              <a:t> A model can only learn from the columns it's given — feature engineering is often what separates a mediocre model from a good one.</a:t>
+              <a:t> A model can only learn from the columns it's given – feature engineering is often what separates a mediocre model from a good one.</a:t>
             </a:r>
             <a:endParaRPr lang="en-US" sz="1300" dirty="0"/>
           </a:p>
@@ -11392,7 +13501,7 @@
                 <a:ea typeface="Arial" pitchFamily="34" charset="-122"/>
                 <a:cs typeface="Arial" pitchFamily="34" charset="-120"/>
               </a:rPr>
-              <a:t> This period's value predicts the next because most real processes have inertia — an assumption that breaks during structural shocks the model has never seen.</a:t>
+              <a:t> This period's value predicts the next because most real processes have inertia – an assumption that breaks during structural shocks the model has never seen.</a:t>
             </a:r>
             <a:endParaRPr lang="en-US" sz="1300" dirty="0"/>
           </a:p>
@@ -11427,7 +13536,7 @@
                 <a:ea typeface="Arial" pitchFamily="34" charset="-122"/>
                 <a:cs typeface="Arial" pitchFamily="34" charset="-120"/>
               </a:rPr>
-              <a:t> The first rows of each country's lag/rolling features are NaN by construction — never fill or impute them.</a:t>
+              <a:t> The first rows of each country's lag/rolling features are NaN by construction – never fill or impute them.</a:t>
             </a:r>
             <a:endParaRPr lang="en-US" sz="1300" dirty="0"/>
           </a:p>
@@ -11564,7 +13673,7 @@
                 <a:ea typeface="Arial" pitchFamily="34" charset="-122"/>
                 <a:cs typeface="Arial"/>
               </a:rPr>
-              <a:t>Page 6 of 17</a:t>
+              <a:t>Page 7 of 19</a:t>
             </a:r>
             <a:endParaRPr lang="en-US" sz="900" dirty="0">
               <a:solidFill>
@@ -11584,7 +13693,7 @@
 </p:sld>
 </file>
 
-<file path=ppt/slides/slide7.xml><?xml version="1.0" encoding="utf-8"?>
+<file path=ppt/slides/slide8.xml><?xml version="1.0" encoding="utf-8"?>
 <p:sld xmlns:a="http://schemas.openxmlformats.org/drawingml/2006/main" xmlns:r="http://schemas.openxmlformats.org/officeDocument/2006/relationships" xmlns:p="http://schemas.openxmlformats.org/presentationml/2006/main">
   <p:cSld>
     <p:bg>
@@ -11720,7 +13829,7 @@
                 <a:ea typeface="Arial" pitchFamily="34" charset="-122"/>
                 <a:cs typeface="Arial" pitchFamily="34" charset="-120"/>
               </a:rPr>
-              <a:t>All questions are shown now — press → or click to reveal each answer in turn.</a:t>
+              <a:t>All questions are shown now – press → or click to reveal each answer in turn.</a:t>
             </a:r>
             <a:endParaRPr lang="en-US" sz="1100" dirty="0"/>
           </a:p>
@@ -11905,7 +14014,7 @@
                 <a:ea typeface="Arial" pitchFamily="34" charset="-122"/>
                 <a:cs typeface="Arial" pitchFamily="34" charset="-120"/>
               </a:rPr>
-              <a:t>A past value (e.g. last year's CO₂) used as a model input — emissions are highly autocorrelated year-to-year.</a:t>
+              <a:t>A past value (e.g. last year's CO₂) used as a model input to predict a future value. Emissions are highly autocorrelated year-to-year, so lag features let a regression implicitly capture that persistence without needing an explicit time-series model.</a:t>
             </a:r>
             <a:endParaRPr lang="en-US" sz="1100" dirty="0"/>
           </a:p>
@@ -12001,11 +14110,10 @@
           <a:bodyPr wrap="square" lIns="137160" tIns="45720" rIns="137160" bIns="45720" rtlCol="0" anchor="t"/>
           <a:lstStyle/>
           <a:p>
-            <a:pPr marL="0" indent="0" algn="l">
+            <a:pPr>
               <a:lnSpc>
                 <a:spcPct val="112000"/>
               </a:lnSpc>
-              <a:buNone/>
             </a:pPr>
             <a:r>
               <a:rPr lang="en-US" sz="1100" dirty="0">
@@ -12016,9 +14124,133 @@
                 <a:ea typeface="Arial" pitchFamily="34" charset="-122"/>
                 <a:cs typeface="Arial" pitchFamily="34" charset="-120"/>
               </a:rPr>
-              <a:t>total_ghg / gdp, scaled by 1e9 to convert an otherwise-unreadable ~1e-9 ratio into kg CO₂e per dollar of GDP.</a:t>
-            </a:r>
-            <a:endParaRPr lang="en-US" sz="1100" dirty="0"/>
+              <a:t>`</a:t>
+            </a:r>
+            <a:r>
+              <a:rPr lang="en-US" sz="1100" dirty="0" err="1">
+                <a:solidFill>
+                  <a:srgbClr val="213541"/>
+                </a:solidFill>
+                <a:latin typeface="Arial" pitchFamily="34" charset="0"/>
+                <a:ea typeface="Arial" pitchFamily="34" charset="-122"/>
+                <a:cs typeface="Arial" pitchFamily="34" charset="-120"/>
+              </a:rPr>
+              <a:t>ghg_intensity</a:t>
+            </a:r>
+            <a:r>
+              <a:rPr lang="en-US" sz="1100" dirty="0">
+                <a:solidFill>
+                  <a:srgbClr val="213541"/>
+                </a:solidFill>
+                <a:latin typeface="Arial" pitchFamily="34" charset="0"/>
+                <a:ea typeface="Arial" pitchFamily="34" charset="-122"/>
+                <a:cs typeface="Arial" pitchFamily="34" charset="-120"/>
+              </a:rPr>
+              <a:t> = total_ghg / </a:t>
+            </a:r>
+            <a:r>
+              <a:rPr lang="en-US" sz="1100" dirty="0" err="1">
+                <a:solidFill>
+                  <a:srgbClr val="213541"/>
+                </a:solidFill>
+                <a:latin typeface="Arial" pitchFamily="34" charset="0"/>
+                <a:ea typeface="Arial" pitchFamily="34" charset="-122"/>
+                <a:cs typeface="Arial" pitchFamily="34" charset="-120"/>
+              </a:rPr>
+              <a:t>gdp</a:t>
+            </a:r>
+            <a:r>
+              <a:rPr lang="en-US" sz="1100" dirty="0">
+                <a:solidFill>
+                  <a:srgbClr val="213541"/>
+                </a:solidFill>
+                <a:latin typeface="Arial" pitchFamily="34" charset="0"/>
+                <a:ea typeface="Arial" pitchFamily="34" charset="-122"/>
+                <a:cs typeface="Arial" pitchFamily="34" charset="-120"/>
+              </a:rPr>
+              <a:t> * 1e9`. `total_ghg` is expressed in </a:t>
+            </a:r>
+            <a:r>
+              <a:rPr lang="en-US" sz="1100" dirty="0" err="1">
+                <a:solidFill>
+                  <a:srgbClr val="213541"/>
+                </a:solidFill>
+                <a:latin typeface="Arial" pitchFamily="34" charset="0"/>
+                <a:ea typeface="Arial" pitchFamily="34" charset="-122"/>
+                <a:cs typeface="Arial" pitchFamily="34" charset="-120"/>
+              </a:rPr>
+              <a:t>MtCO₂e</a:t>
+            </a:r>
+            <a:r>
+              <a:rPr lang="en-US" sz="1100" dirty="0">
+                <a:solidFill>
+                  <a:srgbClr val="213541"/>
+                </a:solidFill>
+                <a:latin typeface="Arial" pitchFamily="34" charset="0"/>
+                <a:ea typeface="Arial" pitchFamily="34" charset="-122"/>
+                <a:cs typeface="Arial" pitchFamily="34" charset="-120"/>
+              </a:rPr>
+              <a:t> (1 Mt = 1e9 kg), while `</a:t>
+            </a:r>
+            <a:r>
+              <a:rPr lang="en-US" sz="1100" dirty="0" err="1">
+                <a:solidFill>
+                  <a:srgbClr val="213541"/>
+                </a:solidFill>
+                <a:latin typeface="Arial" pitchFamily="34" charset="0"/>
+                <a:ea typeface="Arial" pitchFamily="34" charset="-122"/>
+                <a:cs typeface="Arial" pitchFamily="34" charset="-120"/>
+              </a:rPr>
+              <a:t>gdp</a:t>
+            </a:r>
+            <a:r>
+              <a:rPr lang="en-US" sz="1100" dirty="0">
+                <a:solidFill>
+                  <a:srgbClr val="213541"/>
+                </a:solidFill>
+                <a:latin typeface="Arial" pitchFamily="34" charset="0"/>
+                <a:ea typeface="Arial" pitchFamily="34" charset="-122"/>
+                <a:cs typeface="Arial" pitchFamily="34" charset="-120"/>
+              </a:rPr>
+              <a:t>` is in raw dollars, so the unscaled ratio is on the order of 1e-9 and would round to 0.00 at any reasonable display precision. Multiplying by 1e9 converts the result into kg </a:t>
+            </a:r>
+            <a:r>
+              <a:rPr lang="en-US" sz="1100" dirty="0" err="1">
+                <a:solidFill>
+                  <a:srgbClr val="213541"/>
+                </a:solidFill>
+                <a:latin typeface="Arial" pitchFamily="34" charset="0"/>
+                <a:ea typeface="Arial" pitchFamily="34" charset="-122"/>
+                <a:cs typeface="Arial" pitchFamily="34" charset="-120"/>
+              </a:rPr>
+              <a:t>CO₂e</a:t>
+            </a:r>
+            <a:r>
+              <a:rPr lang="en-US" sz="1100" dirty="0">
+                <a:solidFill>
+                  <a:srgbClr val="213541"/>
+                </a:solidFill>
+                <a:latin typeface="Arial" pitchFamily="34" charset="0"/>
+                <a:ea typeface="Arial" pitchFamily="34" charset="-122"/>
+                <a:cs typeface="Arial" pitchFamily="34" charset="-120"/>
+              </a:rPr>
+              <a:t> per dollar of GDP – a readable unit.</a:t>
+            </a:r>
+          </a:p>
+          <a:p>
+            <a:pPr>
+              <a:lnSpc>
+                <a:spcPct val="112000"/>
+              </a:lnSpc>
+            </a:pPr>
+            <a:endParaRPr lang="en-US" sz="1100" dirty="0">
+              <a:solidFill>
+                <a:srgbClr val="213541"/>
+              </a:solidFill>
+              <a:latin typeface="Arial" pitchFamily="34" charset="0"/>
+              <a:ea typeface="Arial" pitchFamily="34" charset="-122"/>
+              <a:cs typeface="Arial" pitchFamily="34" charset="-120"/>
+            </a:endParaRPr>
           </a:p>
         </p:txBody>
       </p:sp>
@@ -12112,11 +14344,10 @@
           <a:bodyPr wrap="square" lIns="137160" tIns="45720" rIns="137160" bIns="45720" rtlCol="0" anchor="t"/>
           <a:lstStyle/>
           <a:p>
-            <a:pPr marL="0" indent="0" algn="l">
+            <a:pPr>
               <a:lnSpc>
                 <a:spcPct val="112000"/>
               </a:lnSpc>
-              <a:buNone/>
             </a:pPr>
             <a:r>
               <a:rPr lang="en-US" sz="1100" dirty="0">
@@ -12127,9 +14358,45 @@
                 <a:ea typeface="Arial" pitchFamily="34" charset="-122"/>
                 <a:cs typeface="Arial" pitchFamily="34" charset="-120"/>
               </a:rPr>
-              <a:t>GDP is ~70% missing across the 10 countries, so including it would force dropna to discard usable training rows.</a:t>
-            </a:r>
-            <a:endParaRPr lang="en-US" sz="1100" dirty="0"/>
+              <a:t>GDP coverage is much sparser than the other columns (roughly 70% missing across the years and countries in scope), so including it in the regression feature set would force `</a:t>
+            </a:r>
+            <a:r>
+              <a:rPr lang="en-US" sz="1100" dirty="0" err="1">
+                <a:solidFill>
+                  <a:srgbClr val="213541"/>
+                </a:solidFill>
+                <a:latin typeface="Arial" pitchFamily="34" charset="0"/>
+                <a:ea typeface="Arial" pitchFamily="34" charset="-122"/>
+                <a:cs typeface="Arial" pitchFamily="34" charset="-120"/>
+              </a:rPr>
+              <a:t>dropna</a:t>
+            </a:r>
+            <a:r>
+              <a:rPr lang="en-US" sz="1100" dirty="0">
+                <a:solidFill>
+                  <a:srgbClr val="213541"/>
+                </a:solidFill>
+                <a:latin typeface="Arial" pitchFamily="34" charset="0"/>
+                <a:ea typeface="Arial" pitchFamily="34" charset="-122"/>
+                <a:cs typeface="Arial" pitchFamily="34" charset="-120"/>
+              </a:rPr>
+              <a:t>` to discard a large share of training rows – a costly trade-off across just 10 countries with only ~25 training years each.</a:t>
+            </a:r>
+          </a:p>
+          <a:p>
+            <a:pPr>
+              <a:lnSpc>
+                <a:spcPct val="112000"/>
+              </a:lnSpc>
+            </a:pPr>
+            <a:endParaRPr lang="en-US" sz="1100" dirty="0">
+              <a:solidFill>
+                <a:srgbClr val="213541"/>
+              </a:solidFill>
+              <a:latin typeface="Arial" pitchFamily="34" charset="0"/>
+              <a:ea typeface="Arial" pitchFamily="34" charset="-122"/>
+              <a:cs typeface="Arial" pitchFamily="34" charset="-120"/>
+            </a:endParaRPr>
           </a:p>
         </p:txBody>
       </p:sp>
@@ -12190,7 +14457,7 @@
                 <a:ea typeface="Arial" pitchFamily="34" charset="-122"/>
                 <a:cs typeface="Arial" pitchFamily="34" charset="-120"/>
               </a:rPr>
-              <a:t>co2_yoy_change vs co2_yoy_pct_change — when to use which?</a:t>
+              <a:t>co2_yoy_change vs co2_yoy_pct_change – when to use which?</a:t>
             </a:r>
             <a:endParaRPr lang="en-US" sz="1100" dirty="0"/>
           </a:p>
@@ -12223,11 +14490,10 @@
           <a:bodyPr wrap="square" lIns="137160" tIns="45720" rIns="137160" bIns="45720" rtlCol="0" anchor="t"/>
           <a:lstStyle/>
           <a:p>
-            <a:pPr marL="0" indent="0" algn="l">
+            <a:pPr>
               <a:lnSpc>
                 <a:spcPct val="112000"/>
               </a:lnSpc>
-              <a:buNone/>
             </a:pPr>
             <a:r>
               <a:rPr lang="en-US" sz="1100" dirty="0">
@@ -12238,9 +14504,23 @@
                 <a:ea typeface="Arial" pitchFamily="34" charset="-122"/>
                 <a:cs typeface="Arial" pitchFamily="34" charset="-120"/>
               </a:rPr>
-              <a:t>Absolute change for total climate impact; percentage change to fairly rank growth rates across countries of different scale.</a:t>
-            </a:r>
-            <a:endParaRPr lang="en-US" sz="1100" dirty="0"/>
+              <a:t>The absolute difference in CO₂ vs percentage growth from prior year's value. Absolute change is more relevant for total climate impact, while percentage change lets you fairly rank countries' growth *rates* against each other despite their very different emissions scales.</a:t>
+            </a:r>
+          </a:p>
+          <a:p>
+            <a:pPr>
+              <a:lnSpc>
+                <a:spcPct val="112000"/>
+              </a:lnSpc>
+            </a:pPr>
+            <a:endParaRPr lang="en-US" sz="1100" dirty="0">
+              <a:solidFill>
+                <a:srgbClr val="213541"/>
+              </a:solidFill>
+              <a:latin typeface="Arial" pitchFamily="34" charset="0"/>
+              <a:ea typeface="Arial" pitchFamily="34" charset="-122"/>
+              <a:cs typeface="Arial" pitchFamily="34" charset="-120"/>
+            </a:endParaRPr>
           </a:p>
         </p:txBody>
       </p:sp>
@@ -12334,11 +14614,10 @@
           <a:bodyPr wrap="square" lIns="137160" tIns="45720" rIns="137160" bIns="45720" rtlCol="0" anchor="t"/>
           <a:lstStyle/>
           <a:p>
-            <a:pPr marL="0" indent="0" algn="l">
+            <a:pPr>
               <a:lnSpc>
                 <a:spcPct val="112000"/>
               </a:lnSpc>
-              <a:buNone/>
             </a:pPr>
             <a:r>
               <a:rPr lang="en-US" sz="1100" dirty="0">
@@ -12349,9 +14628,23 @@
                 <a:ea typeface="Arial" pitchFamily="34" charset="-122"/>
                 <a:cs typeface="Arial" pitchFamily="34" charset="-120"/>
               </a:rPr>
-              <a:t>Lags capture recent points; the rolling mean captures the smoothed recent trend level — complementary information.</a:t>
-            </a:r>
-            <a:endParaRPr lang="en-US" sz="1100" dirty="0"/>
+              <a:t>The rolling mean smooths out year-to-year noise (a single anomalous year from a recession or a one-off event) and gives the model a feature representing the *trend level* rather than any single year's value - lag features and a rolling mean capture complementary information.</a:t>
+            </a:r>
+          </a:p>
+          <a:p>
+            <a:pPr>
+              <a:lnSpc>
+                <a:spcPct val="112000"/>
+              </a:lnSpc>
+            </a:pPr>
+            <a:endParaRPr lang="en-US" sz="1100" dirty="0">
+              <a:solidFill>
+                <a:srgbClr val="213541"/>
+              </a:solidFill>
+              <a:latin typeface="Arial" pitchFamily="34" charset="0"/>
+              <a:ea typeface="Arial" pitchFamily="34" charset="-122"/>
+              <a:cs typeface="Arial" pitchFamily="34" charset="-120"/>
+            </a:endParaRPr>
           </a:p>
         </p:txBody>
       </p:sp>
@@ -12364,7 +14657,7 @@
           <p:nvPr/>
         </p:nvPicPr>
         <p:blipFill>
-          <a:blip r:embed="rId2"/>
+          <a:blip r:embed="rId3"/>
           <a:stretch>
             <a:fillRect/>
           </a:stretch>
@@ -12451,7 +14744,7 @@
                 <a:ea typeface="Arial" pitchFamily="34" charset="-122"/>
                 <a:cs typeface="Arial"/>
               </a:rPr>
-              <a:t>Page 7 of 17</a:t>
+              <a:t>Page 8 of 19</a:t>
             </a:r>
             <a:endParaRPr lang="en-US" sz="900" dirty="0">
               <a:solidFill>
@@ -12733,7 +15026,7 @@
 </p:sld>
 </file>
 
-<file path=ppt/slides/slide8.xml><?xml version="1.0" encoding="utf-8"?>
+<file path=ppt/slides/slide9.xml><?xml version="1.0" encoding="utf-8"?>
 <p:sld xmlns:a="http://schemas.openxmlformats.org/drawingml/2006/main" xmlns:r="http://schemas.openxmlformats.org/officeDocument/2006/relationships" xmlns:p="http://schemas.openxmlformats.org/presentationml/2006/main">
   <p:cSld name="Slide 16">
     <p:bg>
@@ -12857,11 +15150,9 @@
           <a:bodyPr wrap="square" lIns="0" tIns="0" rIns="0" bIns="0" rtlCol="0" anchor="ctr"/>
           <a:lstStyle/>
           <a:p>
-            <a:pPr marL="0" indent="0" algn="ctr">
-              <a:buNone/>
-            </a:pPr>
-            <a:r>
-              <a:rPr lang="en-US" sz="1400">
+            <a:pPr algn="ctr"/>
+            <a:r>
+              <a:rPr lang="en-US" sz="1400" dirty="0">
                 <a:solidFill>
                   <a:srgbClr val="8A98A3"/>
                 </a:solidFill>
@@ -12869,18 +15160,7 @@
                 <a:ea typeface="Arial" pitchFamily="34" charset="-122"/>
                 <a:cs typeface="Arial" pitchFamily="34" charset="-120"/>
               </a:rPr>
-              <a:t>7 </a:t>
-            </a:r>
-            <a:r>
-              <a:rPr lang="en-US" sz="1400" dirty="0">
-                <a:solidFill>
-                  <a:srgbClr val="8A98A3"/>
-                </a:solidFill>
-                <a:latin typeface="Arial" pitchFamily="34" charset="0"/>
-                <a:ea typeface="Arial" pitchFamily="34" charset="-122"/>
-                <a:cs typeface="Arial" pitchFamily="34" charset="-120"/>
-              </a:rPr>
-              <a:t>Questions</a:t>
+              <a:t>Review &amp; Questions</a:t>
             </a:r>
             <a:endParaRPr lang="en-US" sz="1400" dirty="0"/>
           </a:p>
@@ -12982,480 +15262,7 @@
                 <a:ea typeface="Arial" pitchFamily="34" charset="-122"/>
                 <a:cs typeface="Arial"/>
               </a:rPr>
-              <a:t>Page 8 of 17</a:t>
-            </a:r>
-            <a:endParaRPr lang="en-US" sz="900" dirty="0">
-              <a:solidFill>
-                <a:srgbClr val="8A98A3"/>
-              </a:solidFill>
-              <a:latin typeface="Arial"/>
-              <a:cs typeface="Arial"/>
-            </a:endParaRPr>
-          </a:p>
-        </p:txBody>
-      </p:sp>
-    </p:spTree>
-  </p:cSld>
-  <p:clrMapOvr>
-    <a:masterClrMapping/>
-  </p:clrMapOvr>
-</p:sld>
-</file>
-
-<file path=ppt/slides/slide9.xml><?xml version="1.0" encoding="utf-8"?>
-<p:sld xmlns:a="http://schemas.openxmlformats.org/drawingml/2006/main" xmlns:r="http://schemas.openxmlformats.org/officeDocument/2006/relationships" xmlns:p="http://schemas.openxmlformats.org/presentationml/2006/main">
-  <p:cSld name="Slide 3">
-    <p:bg>
-      <p:bgPr>
-        <a:solidFill>
-          <a:srgbClr val="FFFFFF"/>
-        </a:solidFill>
-        <a:effectLst/>
-      </p:bgPr>
-    </p:bg>
-    <p:spTree>
-      <p:nvGrpSpPr>
-        <p:cNvPr id="1" name=""/>
-        <p:cNvGrpSpPr/>
-        <p:nvPr/>
-      </p:nvGrpSpPr>
-      <p:grpSpPr>
-        <a:xfrm>
-          <a:off x="0" y="0"/>
-          <a:ext cx="0" cy="0"/>
-          <a:chOff x="0" y="0"/>
-          <a:chExt cx="0" cy="0"/>
-        </a:xfrm>
-      </p:grpSpPr>
-      <p:sp>
-        <p:nvSpPr>
-          <p:cNvPr id="2" name="Text 0"/>
-          <p:cNvSpPr/>
-          <p:nvPr/>
-        </p:nvSpPr>
-        <p:spPr>
-          <a:xfrm>
-            <a:off x="640080" y="411480"/>
-            <a:ext cx="10911535" cy="320040"/>
-          </a:xfrm>
-          <a:prstGeom prst="rect">
-            <a:avLst/>
-          </a:prstGeom>
-          <a:noFill/>
-          <a:ln/>
-        </p:spPr>
-        <p:txBody>
-          <a:bodyPr wrap="square" lIns="0" tIns="0" rIns="0" bIns="0" rtlCol="0" anchor="ctr"/>
-          <a:lstStyle/>
-          <a:p>
-            <a:pPr marL="0" indent="0">
-              <a:buNone/>
-            </a:pPr>
-            <a:r>
-              <a:rPr lang="en-US" sz="1200" b="1" kern="0" spc="150" dirty="0">
-                <a:solidFill>
-                  <a:srgbClr val="00B8D9"/>
-                </a:solidFill>
-                <a:latin typeface="Arial" pitchFamily="34" charset="0"/>
-                <a:ea typeface="Arial" pitchFamily="34" charset="-122"/>
-                <a:cs typeface="Arial" pitchFamily="34" charset="-120"/>
-              </a:rPr>
-              <a:t>WEEK 3  </a:t>
-            </a:r>
-            <a:r>
-              <a:rPr lang="en-US" sz="1200" b="1" kern="0" spc="150">
-                <a:solidFill>
-                  <a:srgbClr val="00B8D9"/>
-                </a:solidFill>
-                <a:latin typeface="Arial" pitchFamily="34" charset="0"/>
-                <a:ea typeface="Arial" pitchFamily="34" charset="-122"/>
-                <a:cs typeface="Arial" pitchFamily="34" charset="-120"/>
-              </a:rPr>
-              <a:t>·  REVIEW  ·  ~3 MIN</a:t>
-            </a:r>
-            <a:endParaRPr lang="en-US" sz="1200" dirty="0"/>
-          </a:p>
-        </p:txBody>
-      </p:sp>
-      <p:sp>
-        <p:nvSpPr>
-          <p:cNvPr id="3" name="Text 1"/>
-          <p:cNvSpPr/>
-          <p:nvPr/>
-        </p:nvSpPr>
-        <p:spPr>
-          <a:xfrm>
-            <a:off x="640080" y="868680"/>
-            <a:ext cx="10911535" cy="1280160"/>
-          </a:xfrm>
-          <a:prstGeom prst="rect">
-            <a:avLst/>
-          </a:prstGeom>
-          <a:noFill/>
-          <a:ln/>
-        </p:spPr>
-        <p:txBody>
-          <a:bodyPr wrap="square" lIns="0" tIns="0" rIns="0" bIns="0" rtlCol="0" anchor="t"/>
-          <a:lstStyle/>
-          <a:p>
-            <a:pPr marL="0" indent="0" algn="l">
-              <a:lnSpc>
-                <a:spcPct val="112000"/>
-              </a:lnSpc>
-              <a:buNone/>
-            </a:pPr>
-            <a:r>
-              <a:rPr lang="en-US" sz="2700" b="1" dirty="0">
-                <a:solidFill>
-                  <a:srgbClr val="213541"/>
-                </a:solidFill>
-                <a:latin typeface="Arial" pitchFamily="34" charset="0"/>
-                <a:ea typeface="Arial" pitchFamily="34" charset="-122"/>
-                <a:cs typeface="Arial" pitchFamily="34" charset="-120"/>
-              </a:rPr>
-              <a:t>Key Lessons – Regression Models</a:t>
-            </a:r>
-            <a:endParaRPr lang="en-US" sz="2700" dirty="0"/>
-          </a:p>
-        </p:txBody>
-      </p:sp>
-      <p:sp>
-        <p:nvSpPr>
-          <p:cNvPr id="4" name="Text 2"/>
-          <p:cNvSpPr/>
-          <p:nvPr/>
-        </p:nvSpPr>
-        <p:spPr>
-          <a:xfrm>
-            <a:off x="640080" y="2194560"/>
-            <a:ext cx="10911535" cy="274320"/>
-          </a:xfrm>
-          <a:prstGeom prst="rect">
-            <a:avLst/>
-          </a:prstGeom>
-          <a:noFill/>
-          <a:ln/>
-        </p:spPr>
-        <p:txBody>
-          <a:bodyPr wrap="square" lIns="0" tIns="0" rIns="0" bIns="0" rtlCol="0" anchor="ctr"/>
-          <a:lstStyle/>
-          <a:p>
-            <a:pPr marL="0" indent="0">
-              <a:buNone/>
-            </a:pPr>
-            <a:r>
-              <a:rPr lang="en-US" sz="1100" i="1" dirty="0">
-                <a:solidFill>
-                  <a:srgbClr val="8A98A3"/>
-                </a:solidFill>
-                <a:latin typeface="Arial" pitchFamily="34" charset="0"/>
-                <a:ea typeface="Arial" pitchFamily="34" charset="-122"/>
-                <a:cs typeface="Arial" pitchFamily="34" charset="-120"/>
-              </a:rPr>
-              <a:t>Source: Regression Models curriculum doc</a:t>
-            </a:r>
-            <a:endParaRPr lang="en-US" sz="1100" dirty="0"/>
-          </a:p>
-        </p:txBody>
-      </p:sp>
-      <p:sp>
-        <p:nvSpPr>
-          <p:cNvPr id="5" name="AnswerBox"/>
-          <p:cNvSpPr/>
-          <p:nvPr/>
-        </p:nvSpPr>
-        <p:spPr>
-          <a:xfrm>
-            <a:off x="640080" y="2606040"/>
-            <a:ext cx="10911535" cy="3474720"/>
-          </a:xfrm>
-          <a:prstGeom prst="roundRect">
-            <a:avLst>
-              <a:gd name="adj" fmla="val 2105"/>
-            </a:avLst>
-          </a:prstGeom>
-          <a:solidFill>
-            <a:srgbClr val="EAF9FB"/>
-          </a:solidFill>
-          <a:ln/>
-        </p:spPr>
-        <p:txBody>
-          <a:bodyPr wrap="square" lIns="320040" tIns="320040" rIns="320040" bIns="320040" rtlCol="0" anchor="t"/>
-          <a:lstStyle/>
-          <a:p>
-            <a:pPr marL="228600" indent="-228600" algn="l">
-              <a:lnSpc>
-                <a:spcPct val="110000"/>
-              </a:lnSpc>
-              <a:spcAft>
-                <a:spcPts val="600"/>
-              </a:spcAft>
-              <a:buFont typeface="Arial"/>
-              <a:buChar char="•"/>
-            </a:pPr>
-            <a:r>
-              <a:rPr lang="en-US" sz="1300" b="1" dirty="0">
-                <a:solidFill>
-                  <a:srgbClr val="213541"/>
-                </a:solidFill>
-                <a:latin typeface="Arial" pitchFamily="34" charset="0"/>
-                <a:ea typeface="Arial" pitchFamily="34" charset="-122"/>
-                <a:cs typeface="Arial" pitchFamily="34" charset="-120"/>
-              </a:rPr>
-              <a:t>The naive baseline is a floor, not a competitor.</a:t>
-            </a:r>
-            <a:r>
-              <a:rPr lang="en-US" sz="1300" dirty="0">
-                <a:solidFill>
-                  <a:srgbClr val="213541"/>
-                </a:solidFill>
-                <a:latin typeface="Arial" pitchFamily="34" charset="0"/>
-                <a:ea typeface="Arial" pitchFamily="34" charset="-122"/>
-                <a:cs typeface="Arial" pitchFamily="34" charset="-120"/>
-              </a:rPr>
-              <a:t> Any real model that can't beat “repeat last year's value” isn't adding value — always report it alongside every other model.</a:t>
-            </a:r>
-            <a:endParaRPr lang="en-US" sz="1300" dirty="0"/>
-          </a:p>
-          <a:p>
-            <a:pPr marL="228600" indent="-228600" algn="l">
-              <a:lnSpc>
-                <a:spcPct val="110000"/>
-              </a:lnSpc>
-              <a:spcAft>
-                <a:spcPts val="600"/>
-              </a:spcAft>
-              <a:buFont typeface="Arial"/>
-              <a:buChar char="•"/>
-            </a:pPr>
-            <a:r>
-              <a:rPr lang="en-US" sz="1300" b="1" dirty="0">
-                <a:solidFill>
-                  <a:srgbClr val="213541"/>
-                </a:solidFill>
-                <a:latin typeface="Arial" pitchFamily="34" charset="0"/>
-                <a:ea typeface="Arial" pitchFamily="34" charset="-122"/>
-                <a:cs typeface="Arial" pitchFamily="34" charset="-120"/>
-              </a:rPr>
-              <a:t>Model complexity must match data availability.</a:t>
-            </a:r>
-            <a:r>
-              <a:rPr lang="en-US" sz="1300" dirty="0">
-                <a:solidFill>
-                  <a:srgbClr val="213541"/>
-                </a:solidFill>
-                <a:latin typeface="Arial" pitchFamily="34" charset="0"/>
-                <a:ea typeface="Arial" pitchFamily="34" charset="-122"/>
-                <a:cs typeface="Arial" pitchFamily="34" charset="-120"/>
-              </a:rPr>
-              <a:t> This is the bias-variance trade-off in practice — a 100-tree Random Forest on 25 rows/country memorizes noise and can lose to the baseline.</a:t>
-            </a:r>
-            <a:endParaRPr lang="en-US" sz="1300" dirty="0"/>
-          </a:p>
-          <a:p>
-            <a:pPr marL="228600" indent="-228600" algn="l">
-              <a:lnSpc>
-                <a:spcPct val="110000"/>
-              </a:lnSpc>
-              <a:spcAft>
-                <a:spcPts val="600"/>
-              </a:spcAft>
-              <a:buFont typeface="Arial"/>
-              <a:buChar char="•"/>
-            </a:pPr>
-            <a:r>
-              <a:rPr lang="en-US" sz="1300" b="1" dirty="0">
-                <a:solidFill>
-                  <a:srgbClr val="213541"/>
-                </a:solidFill>
-                <a:latin typeface="Arial" pitchFamily="34" charset="0"/>
-                <a:ea typeface="Arial" pitchFamily="34" charset="-122"/>
-                <a:cs typeface="Arial" pitchFamily="34" charset="-120"/>
-              </a:rPr>
-              <a:t>Pooling is the fix when segments are individually too small.</a:t>
-            </a:r>
-            <a:r>
-              <a:rPr lang="en-US" sz="1300" dirty="0">
-                <a:solidFill>
-                  <a:srgbClr val="213541"/>
-                </a:solidFill>
-                <a:latin typeface="Arial" pitchFamily="34" charset="0"/>
-                <a:ea typeface="Arial" pitchFamily="34" charset="-122"/>
-                <a:cs typeface="Arial" pitchFamily="34" charset="-120"/>
-              </a:rPr>
-              <a:t> Combine countries into one training set and add a categorical country feature so the model can still tell them apart.</a:t>
-            </a:r>
-            <a:endParaRPr lang="en-US" sz="1300" dirty="0"/>
-          </a:p>
-          <a:p>
-            <a:pPr marL="228600" indent="-228600" algn="l">
-              <a:lnSpc>
-                <a:spcPct val="110000"/>
-              </a:lnSpc>
-              <a:spcAft>
-                <a:spcPts val="600"/>
-              </a:spcAft>
-              <a:buFont typeface="Arial"/>
-              <a:buChar char="•"/>
-            </a:pPr>
-            <a:r>
-              <a:rPr lang="en-US" sz="1300" b="1" dirty="0">
-                <a:solidFill>
-                  <a:srgbClr val="213541"/>
-                </a:solidFill>
-                <a:latin typeface="Arial" pitchFamily="34" charset="0"/>
-                <a:ea typeface="Arial" pitchFamily="34" charset="-122"/>
-                <a:cs typeface="Arial" pitchFamily="34" charset="-120"/>
-              </a:rPr>
-              <a:t>Time-series data needs a chronological split, never a random shuffle.</a:t>
-            </a:r>
-            <a:r>
-              <a:rPr lang="en-US" sz="1300" dirty="0">
-                <a:solidFill>
-                  <a:srgbClr val="213541"/>
-                </a:solidFill>
-                <a:latin typeface="Arial" pitchFamily="34" charset="0"/>
-                <a:ea typeface="Arial" pitchFamily="34" charset="-122"/>
-                <a:cs typeface="Arial" pitchFamily="34" charset="-120"/>
-              </a:rPr>
-              <a:t> Use TimeSeriesSplit for cross-validation — a shuffled split leaks future information into training.</a:t>
-            </a:r>
-            <a:endParaRPr lang="en-US" sz="1300" dirty="0"/>
-          </a:p>
-          <a:p>
-            <a:pPr marL="228600" indent="-228600" algn="l">
-              <a:lnSpc>
-                <a:spcPct val="110000"/>
-              </a:lnSpc>
-              <a:spcAft>
-                <a:spcPts val="600"/>
-              </a:spcAft>
-              <a:buFont typeface="Arial"/>
-              <a:buChar char="•"/>
-            </a:pPr>
-            <a:r>
-              <a:rPr lang="en-US" sz="1300" b="1" dirty="0">
-                <a:solidFill>
-                  <a:srgbClr val="213541"/>
-                </a:solidFill>
-                <a:latin typeface="Arial" pitchFamily="34" charset="0"/>
-                <a:ea typeface="Arial" pitchFamily="34" charset="-122"/>
-                <a:cs typeface="Arial" pitchFamily="34" charset="-120"/>
-              </a:rPr>
-              <a:t>Linear Regression extrapolates without limit.</a:t>
-            </a:r>
-            <a:r>
-              <a:rPr lang="en-US" sz="1300" dirty="0">
-                <a:solidFill>
-                  <a:srgbClr val="213541"/>
-                </a:solidFill>
-                <a:latin typeface="Arial" pitchFamily="34" charset="0"/>
-                <a:ea typeface="Arial" pitchFamily="34" charset="-122"/>
-                <a:cs typeface="Arial" pitchFamily="34" charset="-120"/>
-              </a:rPr>
-              <a:t> It can predict past zero for a quantity that can't go negative — a real risk once predictions feed back into a recursive multi-step forecast.</a:t>
-            </a:r>
-            <a:endParaRPr lang="en-US" sz="1300" dirty="0"/>
-          </a:p>
-        </p:txBody>
-      </p:sp>
-      <p:pic>
-        <p:nvPicPr>
-          <p:cNvPr id="6" name="Image 0" descr="logo_small.png"/>
-          <p:cNvPicPr>
-            <a:picLocks noChangeAspect="1"/>
-          </p:cNvPicPr>
-          <p:nvPr/>
-        </p:nvPicPr>
-        <p:blipFill>
-          <a:blip r:embed="rId2"/>
-          <a:stretch>
-            <a:fillRect/>
-          </a:stretch>
-        </p:blipFill>
-        <p:spPr>
-          <a:xfrm>
-            <a:off x="457200" y="6291072"/>
-            <a:ext cx="292608" cy="292608"/>
-          </a:xfrm>
-          <a:prstGeom prst="rect">
-            <a:avLst/>
-          </a:prstGeom>
-        </p:spPr>
-      </p:pic>
-      <p:sp>
-        <p:nvSpPr>
-          <p:cNvPr id="7" name="Text 4"/>
-          <p:cNvSpPr/>
-          <p:nvPr/>
-        </p:nvSpPr>
-        <p:spPr>
-          <a:xfrm>
-            <a:off x="822960" y="6291072"/>
-            <a:ext cx="1371600" cy="292608"/>
-          </a:xfrm>
-          <a:prstGeom prst="rect">
-            <a:avLst/>
-          </a:prstGeom>
-          <a:noFill/>
-          <a:ln/>
-        </p:spPr>
-        <p:txBody>
-          <a:bodyPr wrap="square" lIns="0" tIns="0" rIns="0" bIns="0" rtlCol="0" anchor="ctr"/>
-          <a:lstStyle/>
-          <a:p>
-            <a:pPr marL="0" indent="0">
-              <a:buNone/>
-            </a:pPr>
-            <a:r>
-              <a:rPr lang="en-US" sz="900" b="1" kern="0" spc="200" dirty="0">
-                <a:solidFill>
-                  <a:srgbClr val="213541"/>
-                </a:solidFill>
-                <a:latin typeface="Arial" pitchFamily="34" charset="0"/>
-                <a:ea typeface="Arial" pitchFamily="34" charset="-122"/>
-                <a:cs typeface="Arial" pitchFamily="34" charset="-120"/>
-              </a:rPr>
-              <a:t>SYENA</a:t>
-            </a:r>
-            <a:endParaRPr lang="en-US" sz="900" dirty="0"/>
-          </a:p>
-        </p:txBody>
-      </p:sp>
-      <p:sp>
-        <p:nvSpPr>
-          <p:cNvPr id="8" name="Text 5"/>
-          <p:cNvSpPr/>
-          <p:nvPr/>
-        </p:nvSpPr>
-        <p:spPr>
-          <a:xfrm>
-            <a:off x="9753600" y="6291072"/>
-            <a:ext cx="1981200" cy="292608"/>
-          </a:xfrm>
-          <a:prstGeom prst="rect">
-            <a:avLst/>
-          </a:prstGeom>
-          <a:noFill/>
-          <a:ln/>
-        </p:spPr>
-        <p:txBody>
-          <a:bodyPr wrap="square" lIns="0" tIns="0" rIns="0" bIns="0" rtlCol="0" anchor="ctr"/>
-          <a:lstStyle/>
-          <a:p>
-            <a:pPr marL="0" indent="0" algn="r">
-              <a:buNone/>
-            </a:pPr>
-            <a:r>
-              <a:rPr lang="en-US" sz="900">
-                <a:solidFill>
-                  <a:srgbClr val="8A98A3"/>
-                </a:solidFill>
-                <a:latin typeface="Arial"/>
-                <a:ea typeface="Arial" pitchFamily="34" charset="-122"/>
-                <a:cs typeface="Arial"/>
-              </a:rPr>
-              <a:t>Page 9 of 17</a:t>
+              <a:t>Page 9 of 19</a:t>
             </a:r>
             <a:endParaRPr lang="en-US" sz="900" dirty="0">
               <a:solidFill>
